--- a/report/presentation.pptx
+++ b/report/presentation.pptx
@@ -3515,13 +3515,40 @@
           <a:lstStyle/>
           <a:p>
             <a:r>
-              <a:rPr sz="1200" b="0">
+              <a:rPr sz="1200" b="0" dirty="0" err="1">
                 <a:solidFill>
                   <a:srgbClr val="687484"/>
                 </a:solidFill>
                 <a:latin typeface="Leelawadee UI"/>
               </a:rPr>
-              <a:t>ภาคการศึกษา: Final Semester, Academic Year 2568</a:t>
+              <a:t>ภาคการศึกษา</a:t>
+            </a:r>
+            <a:r>
+              <a:rPr sz="1200" b="0" dirty="0">
+                <a:solidFill>
+                  <a:srgbClr val="687484"/>
+                </a:solidFill>
+                <a:latin typeface="Leelawadee UI"/>
+              </a:rPr>
+              <a:t>: </a:t>
+            </a:r>
+            <a:r>
+              <a:rPr lang="en-US" sz="1200" dirty="0">
+                <a:solidFill>
+                  <a:srgbClr val="687484"/>
+                </a:solidFill>
+                <a:latin typeface="Leelawadee UI"/>
+              </a:rPr>
+              <a:t>Second</a:t>
+            </a:r>
+            <a:r>
+              <a:rPr sz="1200" b="0" dirty="0">
+                <a:solidFill>
+                  <a:srgbClr val="687484"/>
+                </a:solidFill>
+                <a:latin typeface="Leelawadee UI"/>
+              </a:rPr>
+              <a:t> Semester, Academic Year 2568</a:t>
             </a:r>
           </a:p>
         </p:txBody>

--- a/report/presentation.pptx
+++ b/report/presentation.pptx
@@ -3271,7 +3271,7 @@
         <p:spPr>
           <a:xfrm>
             <a:off x="768096" y="4508992"/>
-            <a:ext cx="3977640" cy="523220"/>
+            <a:ext cx="5257800" cy="523220"/>
           </a:xfrm>
           <a:prstGeom prst="rect">
             <a:avLst/>
@@ -3320,6 +3320,21 @@
               </a:rPr>
               <a:t>Ngamsukkasemsri</a:t>
             </a:r>
+            <a:r>
+              <a:rPr lang="th-TH" sz="1400" dirty="0">
+                <a:solidFill>
+                  <a:srgbClr val="323A46"/>
+                </a:solidFill>
+                <a:latin typeface="Leelawadee UI"/>
+              </a:rPr>
+              <a:t>	6633109021</a:t>
+            </a:r>
+            <a:endParaRPr lang="en-US" sz="1400" dirty="0">
+              <a:solidFill>
+                <a:srgbClr val="323A46"/>
+              </a:solidFill>
+              <a:latin typeface="Leelawadee UI"/>
+            </a:endParaRPr>
           </a:p>
           <a:p>
             <a:r>
@@ -3366,6 +3381,15 @@
                 <a:latin typeface="Leelawadee UI"/>
               </a:rPr>
               <a:t>Porapakpenjul</a:t>
+            </a:r>
+            <a:r>
+              <a:rPr lang="th-TH" sz="1400" dirty="0">
+                <a:solidFill>
+                  <a:srgbClr val="323A46"/>
+                </a:solidFill>
+                <a:latin typeface="Leelawadee UI"/>
+              </a:rPr>
+              <a:t>		6630368721</a:t>
             </a:r>
             <a:endParaRPr lang="en-US" sz="1400" dirty="0">
               <a:solidFill>
@@ -3700,7 +3724,13 @@
       </p:sp>
       <p:pic>
         <p:nvPicPr>
-          <p:cNvPr id="4" name="Picture 3" descr="plots.png"/>
+          <p:cNvPr id="8" name="Picture 7">
+            <a:extLst>
+              <a:ext uri="{FF2B5EF4-FFF2-40B4-BE49-F238E27FC236}">
+                <a16:creationId xmlns:a16="http://schemas.microsoft.com/office/drawing/2014/main" id="{83AFEA5E-370C-A89D-089B-8CA714274405}"/>
+              </a:ext>
+            </a:extLst>
+          </p:cNvPr>
           <p:cNvPicPr>
             <a:picLocks noChangeAspect="1"/>
           </p:cNvPicPr>
@@ -3714,72 +3744,14 @@
         </p:blipFill>
         <p:spPr>
           <a:xfrm>
-            <a:off x="640080" y="1600200"/>
-            <a:ext cx="5577840" cy="3346704"/>
+            <a:off x="2807592" y="1627632"/>
+            <a:ext cx="6723119" cy="4032210"/>
           </a:xfrm>
           <a:prstGeom prst="rect">
             <a:avLst/>
           </a:prstGeom>
         </p:spPr>
       </p:pic>
-      <p:pic>
-        <p:nvPicPr>
-          <p:cNvPr id="5" name="Picture 4" descr="demo_strip.png"/>
-          <p:cNvPicPr>
-            <a:picLocks noChangeAspect="1"/>
-          </p:cNvPicPr>
-          <p:nvPr/>
-        </p:nvPicPr>
-        <p:blipFill>
-          <a:blip r:embed="rId3"/>
-          <a:stretch>
-            <a:fillRect/>
-          </a:stretch>
-        </p:blipFill>
-        <p:spPr>
-          <a:xfrm>
-            <a:off x="6492240" y="1737360"/>
-            <a:ext cx="5029200" cy="554355"/>
-          </a:xfrm>
-          <a:prstGeom prst="rect">
-            <a:avLst/>
-          </a:prstGeom>
-        </p:spPr>
-      </p:pic>
-      <p:sp>
-        <p:nvSpPr>
-          <p:cNvPr id="6" name="TextBox 5"/>
-          <p:cNvSpPr txBox="1"/>
-          <p:nvPr/>
-        </p:nvSpPr>
-        <p:spPr>
-          <a:xfrm>
-            <a:off x="731520" y="5577840"/>
-            <a:ext cx="10789920" cy="411480"/>
-          </a:xfrm>
-          <a:prstGeom prst="rect">
-            <a:avLst/>
-          </a:prstGeom>
-          <a:noFill/>
-        </p:spPr>
-        <p:txBody>
-          <a:bodyPr wrap="square" anchor="t">
-            <a:spAutoFit/>
-          </a:bodyPr>
-          <a:lstStyle/>
-          <a:p>
-            <a:r>
-              <a:rPr sz="1500" b="0">
-                <a:solidFill>
-                  <a:srgbClr val="687484"/>
-                </a:solidFill>
-                <a:latin typeface="Leelawadee UI"/>
-              </a:rPr>
-              <a:t>ซ้าย: กราฟผล scaling benchmark จาก `experiments/results/plots.png` ขวา: เฟรมตัวอย่างจาก demo video ที่เปรียบเทียบ baseline กับ proposed แบบ side-by-side</a:t>
-            </a:r>
-          </a:p>
-        </p:txBody>
-      </p:sp>
     </p:spTree>
   </p:cSld>
   <p:clrMapOvr>
@@ -3900,7 +3872,7 @@
         <p:spPr>
           <a:xfrm>
             <a:off x="777240" y="1783080"/>
-            <a:ext cx="10332720" cy="4297680"/>
+            <a:ext cx="10332720" cy="2267287"/>
           </a:xfrm>
           <a:prstGeom prst="rect">
             <a:avLst/>
@@ -3925,7 +3897,36 @@
               </a:defRPr>
             </a:pPr>
             <a:r>
-              <a:t>จุดแข็ง: proposed ลด temporal jitter ได้โดยไม่เปลี่ยน interface และไม่ต้องพึ่ง learned weights</a:t>
+              <a:rPr dirty="0" err="1"/>
+              <a:t>จุดแข็ง</a:t>
+            </a:r>
+            <a:r>
+              <a:rPr dirty="0"/>
+              <a:t>: proposed </a:t>
+            </a:r>
+            <a:r>
+              <a:rPr dirty="0" err="1"/>
+              <a:t>ลด</a:t>
+            </a:r>
+            <a:r>
+              <a:rPr dirty="0"/>
+              <a:t> temporal jitter </a:t>
+            </a:r>
+            <a:r>
+              <a:rPr dirty="0" err="1"/>
+              <a:t>ได้โดยไม่เปลี่ยน</a:t>
+            </a:r>
+            <a:r>
+              <a:rPr dirty="0"/>
+              <a:t> interface </a:t>
+            </a:r>
+            <a:r>
+              <a:rPr dirty="0" err="1"/>
+              <a:t>และไม่ต้องพึ่ง</a:t>
+            </a:r>
+            <a:r>
+              <a:rPr dirty="0"/>
+              <a:t> learned weights</a:t>
             </a:r>
           </a:p>
           <a:p>
@@ -3941,8 +3942,34 @@
               </a:defRPr>
             </a:pPr>
             <a:r>
-              <a:t>จุดแข็ง: repository มี benchmark, tests, plots, demo video และ pipeline สำหรับข้อมูลจริงครบ</a:t>
-            </a:r>
+              <a:rPr dirty="0" err="1"/>
+              <a:t>จุดแข็ง</a:t>
+            </a:r>
+            <a:r>
+              <a:rPr dirty="0"/>
+              <a:t>: repository </a:t>
+            </a:r>
+            <a:r>
+              <a:rPr dirty="0" err="1"/>
+              <a:t>มี</a:t>
+            </a:r>
+            <a:r>
+              <a:rPr dirty="0"/>
+              <a:t> benchmark, tests, plots, demo video </a:t>
+            </a:r>
+            <a:r>
+              <a:rPr dirty="0" err="1"/>
+              <a:t>และ</a:t>
+            </a:r>
+            <a:r>
+              <a:rPr dirty="0"/>
+              <a:t> pipeline </a:t>
+            </a:r>
+            <a:r>
+              <a:rPr dirty="0" err="1"/>
+              <a:t>สำหรับข้อมูลจริงครบ</a:t>
+            </a:r>
+            <a:endParaRPr dirty="0"/>
           </a:p>
           <a:p>
             <a:pPr>
@@ -3957,8 +3984,26 @@
               </a:defRPr>
             </a:pPr>
             <a:r>
-              <a:t>ข้อจำกัด: benchmark เชิงปริมาณยังโฟกัสที่ motion primitive หลักเพียงชนิดเดียว</a:t>
-            </a:r>
+              <a:rPr dirty="0" err="1"/>
+              <a:t>ข้อจำกัด</a:t>
+            </a:r>
+            <a:r>
+              <a:rPr dirty="0"/>
+              <a:t>: benchmark </a:t>
+            </a:r>
+            <a:r>
+              <a:rPr dirty="0" err="1"/>
+              <a:t>เชิงปริมาณยังโฟกัสที่</a:t>
+            </a:r>
+            <a:r>
+              <a:rPr dirty="0"/>
+              <a:t> motion primitive </a:t>
+            </a:r>
+            <a:r>
+              <a:rPr dirty="0" err="1"/>
+              <a:t>หลักเพียงชนิดเดียว</a:t>
+            </a:r>
+            <a:endParaRPr dirty="0"/>
           </a:p>
           <a:p>
             <a:pPr>
@@ -3973,8 +4018,46 @@
               </a:defRPr>
             </a:pPr>
             <a:r>
-              <a:t>ข้อจำกัด: repo ไม่ได้ commit human recording จริงไว้โดยตรง เพราะข้อมูล landmark จากผู้ใช้มีประเด็นด้าน privacy</a:t>
-            </a:r>
+              <a:rPr dirty="0" err="1"/>
+              <a:t>ข้อจำกัด</a:t>
+            </a:r>
+            <a:r>
+              <a:rPr dirty="0"/>
+              <a:t>: repo </a:t>
+            </a:r>
+            <a:r>
+              <a:rPr dirty="0" err="1"/>
+              <a:t>ไม่ได้</a:t>
+            </a:r>
+            <a:r>
+              <a:rPr dirty="0"/>
+              <a:t> commit human recording </a:t>
+            </a:r>
+            <a:r>
+              <a:rPr dirty="0" err="1"/>
+              <a:t>จริงไว้โดยตรง</a:t>
+            </a:r>
+            <a:r>
+              <a:rPr dirty="0"/>
+              <a:t> </a:t>
+            </a:r>
+            <a:r>
+              <a:rPr dirty="0" err="1"/>
+              <a:t>เพราะข้อมูล</a:t>
+            </a:r>
+            <a:r>
+              <a:rPr dirty="0"/>
+              <a:t> landmark </a:t>
+            </a:r>
+            <a:r>
+              <a:rPr dirty="0" err="1"/>
+              <a:t>จากผู้ใช้มีประเด็นด้าน</a:t>
+            </a:r>
+            <a:r>
+              <a:rPr dirty="0"/>
+              <a:t> privacy</a:t>
+            </a:r>
+            <a:endParaRPr lang="en-US" dirty="0"/>
           </a:p>
           <a:p>
             <a:pPr>
@@ -3989,7 +4072,94 @@
               </a:defRPr>
             </a:pPr>
             <a:r>
-              <a:t>งานต่อยอด: เชื่อม skeleton เข้ากับ animated avatar, เพิ่ม motion curves และขยาย benchmark ไปทุก exercise mode</a:t>
+              <a:rPr lang="th-TH" dirty="0"/>
+              <a:t>ข้อจำกัด</a:t>
+            </a:r>
+            <a:r>
+              <a:rPr lang="en-US" dirty="0"/>
+              <a:t>: </a:t>
+            </a:r>
+            <a:r>
+              <a:rPr lang="th-TH" dirty="0"/>
+              <a:t>ถ้า </a:t>
+            </a:r>
+            <a:r>
+              <a:rPr lang="en-US" dirty="0"/>
+              <a:t>camera </a:t>
+            </a:r>
+            <a:r>
+              <a:rPr lang="th-TH" dirty="0"/>
+              <a:t>ใกล้จะเห็นแค่ครึ่งตัวทำให้มีการ </a:t>
+            </a:r>
+            <a:r>
+              <a:rPr lang="en-US" dirty="0"/>
+              <a:t>track </a:t>
+            </a:r>
+            <a:r>
+              <a:rPr lang="th-TH" dirty="0"/>
+              <a:t>ผิดพลาด ในอนาคตอาจจะแก้ให้ให้ดีขึ้นได้</a:t>
+            </a:r>
+            <a:endParaRPr dirty="0"/>
+          </a:p>
+          <a:p>
+            <a:pPr>
+              <a:spcAft>
+                <a:spcPts val="800"/>
+              </a:spcAft>
+              <a:defRPr sz="1800">
+                <a:solidFill>
+                  <a:srgbClr val="323A46"/>
+                </a:solidFill>
+                <a:latin typeface="Leelawadee UI"/>
+              </a:defRPr>
+            </a:pPr>
+            <a:r>
+              <a:rPr dirty="0" err="1"/>
+              <a:t>งานต่อยอด</a:t>
+            </a:r>
+            <a:r>
+              <a:rPr dirty="0"/>
+              <a:t>: </a:t>
+            </a:r>
+            <a:r>
+              <a:rPr dirty="0" err="1"/>
+              <a:t>เชื่อม</a:t>
+            </a:r>
+            <a:r>
+              <a:rPr dirty="0"/>
+              <a:t> skeleton </a:t>
+            </a:r>
+            <a:r>
+              <a:rPr dirty="0" err="1"/>
+              <a:t>เข้ากับ</a:t>
+            </a:r>
+            <a:r>
+              <a:rPr dirty="0"/>
+              <a:t> animated avatar, </a:t>
+            </a:r>
+            <a:r>
+              <a:rPr dirty="0" err="1"/>
+              <a:t>เพิ่ม</a:t>
+            </a:r>
+            <a:r>
+              <a:rPr dirty="0"/>
+              <a:t> motion curves </a:t>
+            </a:r>
+            <a:r>
+              <a:rPr dirty="0" err="1"/>
+              <a:t>และขยาย</a:t>
+            </a:r>
+            <a:r>
+              <a:rPr dirty="0"/>
+              <a:t> benchmark </a:t>
+            </a:r>
+            <a:r>
+              <a:rPr dirty="0" err="1"/>
+              <a:t>ไปทุก</a:t>
+            </a:r>
+            <a:r>
+              <a:rPr dirty="0"/>
+              <a:t> exercise mode</a:t>
             </a:r>
           </a:p>
         </p:txBody>
@@ -7208,7 +7378,32 @@
               </a:defRPr>
             </a:pPr>
             <a:r>
-              <a:t>Scaling benchmark ใช้ข้อมูลสังเคราะห์ 3 ขนาด: 1k, 10k และ 100k frames</a:t>
+              <a:rPr dirty="0"/>
+              <a:t>Scaling benchmark </a:t>
+            </a:r>
+            <a:r>
+              <a:rPr dirty="0" err="1"/>
+              <a:t>ใช้ข้อมูลสังเคราะห์</a:t>
+            </a:r>
+            <a:r>
+              <a:rPr dirty="0"/>
+              <a:t> 3 </a:t>
+            </a:r>
+            <a:r>
+              <a:rPr dirty="0" err="1"/>
+              <a:t>ขนาด</a:t>
+            </a:r>
+            <a:r>
+              <a:rPr dirty="0"/>
+              <a:t>: 1k, 10k </a:t>
+            </a:r>
+            <a:r>
+              <a:rPr dirty="0" err="1"/>
+              <a:t>และ</a:t>
+            </a:r>
+            <a:r>
+              <a:rPr dirty="0"/>
+              <a:t> 100k frames</a:t>
             </a:r>
           </a:p>
           <a:p>
@@ -7224,7 +7419,28 @@
               </a:defRPr>
             </a:pPr>
             <a:r>
-              <a:t>ตัวสร้างข้อมูลเพิ่มทั้ง angle noise และ visibility dropout เพื่อทดสอบ temporal robustness</a:t>
+              <a:rPr dirty="0" err="1"/>
+              <a:t>ตัวสร้างข้อมูลเพิ่มทั้ง</a:t>
+            </a:r>
+            <a:r>
+              <a:rPr dirty="0"/>
+              <a:t> angle noise </a:t>
+            </a:r>
+            <a:r>
+              <a:rPr dirty="0" err="1"/>
+              <a:t>และ</a:t>
+            </a:r>
+            <a:r>
+              <a:rPr dirty="0"/>
+              <a:t> visibility dropout </a:t>
+            </a:r>
+            <a:r>
+              <a:rPr dirty="0" err="1"/>
+              <a:t>เพื่อทดสอบ</a:t>
+            </a:r>
+            <a:r>
+              <a:rPr dirty="0"/>
+              <a:t> temporal robustness</a:t>
             </a:r>
           </a:p>
           <a:p>
@@ -7240,8 +7456,34 @@
               </a:defRPr>
             </a:pPr>
             <a:r>
-              <a:t>ข้อมูลจริงรองรับผ่านการอัด landmark CSV จาก webcam แล้ว replay เพื่อประเมินซ้ำ</a:t>
-            </a:r>
+              <a:rPr dirty="0" err="1"/>
+              <a:t>ข้อมูลจริงรองรับผ่านการอัด</a:t>
+            </a:r>
+            <a:r>
+              <a:rPr dirty="0"/>
+              <a:t> landmark CSV </a:t>
+            </a:r>
+            <a:r>
+              <a:rPr dirty="0" err="1"/>
+              <a:t>จาก</a:t>
+            </a:r>
+            <a:r>
+              <a:rPr dirty="0"/>
+              <a:t> webcam </a:t>
+            </a:r>
+            <a:r>
+              <a:rPr dirty="0" err="1"/>
+              <a:t>แล้ว</a:t>
+            </a:r>
+            <a:r>
+              <a:rPr dirty="0"/>
+              <a:t> replay </a:t>
+            </a:r>
+            <a:r>
+              <a:rPr dirty="0" err="1"/>
+              <a:t>เพื่อประเมินซ้ำ</a:t>
+            </a:r>
+            <a:endParaRPr dirty="0"/>
           </a:p>
           <a:p>
             <a:pPr>
@@ -7256,7 +7498,32 @@
               </a:defRPr>
             </a:pPr>
             <a:r>
-              <a:t>Metrics ที่ใช้: total runtime, ms/frame, peak traced memory, repetition count error และ side-switch jitter</a:t>
+              <a:rPr dirty="0"/>
+              <a:t>Metrics </a:t>
+            </a:r>
+            <a:r>
+              <a:rPr dirty="0" err="1"/>
+              <a:t>ที่ใช้</a:t>
+            </a:r>
+            <a:r>
+              <a:rPr dirty="0"/>
+              <a:t>: total runtime, </a:t>
+            </a:r>
+            <a:r>
+              <a:rPr dirty="0" err="1"/>
+              <a:t>ms</a:t>
+            </a:r>
+            <a:r>
+              <a:rPr dirty="0"/>
+              <a:t>/frame, peak traced memory, repetition count error </a:t>
+            </a:r>
+            <a:r>
+              <a:rPr dirty="0" err="1"/>
+              <a:t>และ</a:t>
+            </a:r>
+            <a:r>
+              <a:rPr dirty="0"/>
+              <a:t> side-switch jitter</a:t>
             </a:r>
           </a:p>
           <a:p>
@@ -7272,8 +7539,34 @@
               </a:defRPr>
             </a:pPr>
             <a:r>
-              <a:t>การตรวจสอบความถูกต้อง: `python -m unittest tests.test_simulation` ผ่าน</a:t>
-            </a:r>
+              <a:rPr dirty="0" err="1"/>
+              <a:t>การตรวจสอบความถูกต้อง</a:t>
+            </a:r>
+            <a:r>
+              <a:rPr dirty="0"/>
+              <a:t>: `python -m </a:t>
+            </a:r>
+            <a:r>
+              <a:rPr dirty="0" err="1"/>
+              <a:t>unittest</a:t>
+            </a:r>
+            <a:r>
+              <a:rPr dirty="0"/>
+              <a:t> </a:t>
+            </a:r>
+            <a:r>
+              <a:rPr dirty="0" err="1"/>
+              <a:t>tests.test_simulation</a:t>
+            </a:r>
+            <a:r>
+              <a:rPr dirty="0"/>
+              <a:t>` </a:t>
+            </a:r>
+            <a:r>
+              <a:rPr dirty="0" err="1"/>
+              <a:t>ผ่าน</a:t>
+            </a:r>
+            <a:endParaRPr dirty="0"/>
           </a:p>
         </p:txBody>
       </p:sp>
@@ -7285,7 +7578,7 @@
         </p:nvSpPr>
         <p:spPr>
           <a:xfrm>
-            <a:off x="6766560" y="1828800"/>
+            <a:off x="8138160" y="1828800"/>
             <a:ext cx="2377440" cy="1005840"/>
           </a:xfrm>
           <a:prstGeom prst="roundRect">
@@ -7320,7 +7613,7 @@
           <a:p>
             <a:pPr algn="ctr"/>
             <a:r>
-              <a:rPr sz="1100" b="1">
+              <a:rPr sz="1100" b="1" dirty="0">
                 <a:solidFill>
                   <a:srgbClr val="006D77"/>
                 </a:solidFill>
@@ -7332,79 +7625,13 @@
           <a:p>
             <a:pPr algn="ctr"/>
             <a:r>
-              <a:rPr sz="1700" b="1">
+              <a:rPr sz="1700" b="1" dirty="0">
                 <a:solidFill>
                   <a:srgbClr val="141820"/>
                 </a:solidFill>
                 <a:latin typeface="Leelawadee UI"/>
               </a:rPr>
               <a:t>1k / 10k / 100k</a:t>
-            </a:r>
-          </a:p>
-        </p:txBody>
-      </p:sp>
-      <p:sp>
-        <p:nvSpPr>
-          <p:cNvPr id="6" name="Rounded Rectangle 5"/>
-          <p:cNvSpPr/>
-          <p:nvPr/>
-        </p:nvSpPr>
-        <p:spPr>
-          <a:xfrm>
-            <a:off x="9326880" y="1828800"/>
-            <a:ext cx="2103120" cy="1005840"/>
-          </a:xfrm>
-          <a:prstGeom prst="roundRect">
-            <a:avLst/>
-          </a:prstGeom>
-          <a:solidFill>
-            <a:srgbClr val="E8F8F9"/>
-          </a:solidFill>
-          <a:ln w="19050">
-            <a:solidFill>
-              <a:srgbClr val="006D77"/>
-            </a:solidFill>
-          </a:ln>
-        </p:spPr>
-        <p:style>
-          <a:lnRef idx="1">
-            <a:schemeClr val="accent1"/>
-          </a:lnRef>
-          <a:fillRef idx="3">
-            <a:schemeClr val="accent1"/>
-          </a:fillRef>
-          <a:effectRef idx="2">
-            <a:schemeClr val="accent1"/>
-          </a:effectRef>
-          <a:fontRef idx="minor">
-            <a:schemeClr val="lt1"/>
-          </a:fontRef>
-        </p:style>
-        <p:txBody>
-          <a:bodyPr rtlCol="0" anchor="ctr"/>
-          <a:lstStyle/>
-          <a:p>
-            <a:pPr algn="ctr"/>
-            <a:r>
-              <a:rPr sz="1100" b="1">
-                <a:solidFill>
-                  <a:srgbClr val="006D77"/>
-                </a:solidFill>
-                <a:latin typeface="Leelawadee UI"/>
-              </a:rPr>
-              <a:t>Count Error</a:t>
-            </a:r>
-          </a:p>
-          <a:p>
-            <a:pPr algn="ctr"/>
-            <a:r>
-              <a:rPr sz="1700" b="1">
-                <a:solidFill>
-                  <a:srgbClr val="141820"/>
-                </a:solidFill>
-                <a:latin typeface="Leelawadee UI"/>
-              </a:rPr>
-              <a:t>0 ทุก scale</a:t>
             </a:r>
           </a:p>
         </p:txBody>

--- a/report/presentation.pptx
+++ b/report/presentation.pptx
@@ -7,17 +7,18 @@
   <p:sldIdLst>
     <p:sldId id="256" r:id="rId2"/>
     <p:sldId id="257" r:id="rId3"/>
-    <p:sldId id="258" r:id="rId4"/>
-    <p:sldId id="259" r:id="rId5"/>
-    <p:sldId id="260" r:id="rId6"/>
-    <p:sldId id="268" r:id="rId7"/>
-    <p:sldId id="261" r:id="rId8"/>
-    <p:sldId id="262" r:id="rId9"/>
-    <p:sldId id="263" r:id="rId10"/>
-    <p:sldId id="264" r:id="rId11"/>
-    <p:sldId id="265" r:id="rId12"/>
-    <p:sldId id="266" r:id="rId13"/>
-    <p:sldId id="267" r:id="rId14"/>
+    <p:sldId id="269" r:id="rId4"/>
+    <p:sldId id="258" r:id="rId5"/>
+    <p:sldId id="259" r:id="rId6"/>
+    <p:sldId id="260" r:id="rId7"/>
+    <p:sldId id="268" r:id="rId8"/>
+    <p:sldId id="261" r:id="rId9"/>
+    <p:sldId id="262" r:id="rId10"/>
+    <p:sldId id="263" r:id="rId11"/>
+    <p:sldId id="264" r:id="rId12"/>
+    <p:sldId id="265" r:id="rId13"/>
+    <p:sldId id="266" r:id="rId14"/>
+    <p:sldId id="267" r:id="rId15"/>
   </p:sldIdLst>
   <p:sldSz cx="12192000" cy="6858000"/>
   <p:notesSz cx="6858000" cy="9144000"/>
@@ -3217,13 +3218,22 @@
           <a:lstStyle/>
           <a:p>
             <a:r>
-              <a:rPr sz="1800" b="1">
+              <a:rPr sz="1800" b="1" dirty="0" err="1">
                 <a:solidFill>
                   <a:srgbClr val="006D77"/>
                 </a:solidFill>
                 <a:latin typeface="Leelawadee UI"/>
               </a:rPr>
-              <a:t>รายวิชา Computer Animation</a:t>
+              <a:t>รายวิชา</a:t>
+            </a:r>
+            <a:r>
+              <a:rPr sz="1800" b="1" dirty="0">
+                <a:solidFill>
+                  <a:srgbClr val="006D77"/>
+                </a:solidFill>
+                <a:latin typeface="Leelawadee UI"/>
+              </a:rPr>
+              <a:t> Computer Animation</a:t>
             </a:r>
           </a:p>
         </p:txBody>
@@ -3620,4163 +3630,6 @@
 </file>
 
 <file path=ppt/slides/slide10.xml><?xml version="1.0" encoding="utf-8"?>
-<p:sld xmlns:a="http://schemas.openxmlformats.org/drawingml/2006/main" xmlns:r="http://schemas.openxmlformats.org/officeDocument/2006/relationships" xmlns:p="http://schemas.openxmlformats.org/presentationml/2006/main">
-  <p:cSld>
-    <p:bg>
-      <p:bgPr>
-        <a:solidFill>
-          <a:srgbClr val="FFFFFF"/>
-        </a:solidFill>
-        <a:effectLst/>
-      </p:bgPr>
-    </p:bg>
-    <p:spTree>
-      <p:nvGrpSpPr>
-        <p:cNvPr id="1" name=""/>
-        <p:cNvGrpSpPr/>
-        <p:nvPr/>
-      </p:nvGrpSpPr>
-      <p:grpSpPr>
-        <a:xfrm>
-          <a:off x="0" y="0"/>
-          <a:ext cx="0" cy="0"/>
-          <a:chOff x="0" y="0"/>
-          <a:chExt cx="0" cy="0"/>
-        </a:xfrm>
-      </p:grpSpPr>
-      <p:sp>
-        <p:nvSpPr>
-          <p:cNvPr id="2" name="TextBox 1"/>
-          <p:cNvSpPr txBox="1"/>
-          <p:nvPr/>
-        </p:nvSpPr>
-        <p:spPr>
-          <a:xfrm>
-            <a:off x="548640" y="365760"/>
-            <a:ext cx="10972800" cy="731520"/>
-          </a:xfrm>
-          <a:prstGeom prst="rect">
-            <a:avLst/>
-          </a:prstGeom>
-          <a:noFill/>
-        </p:spPr>
-        <p:txBody>
-          <a:bodyPr wrap="none">
-            <a:spAutoFit/>
-          </a:bodyPr>
-          <a:lstStyle/>
-          <a:p>
-            <a:r>
-              <a:rPr sz="2400" b="1">
-                <a:solidFill>
-                  <a:srgbClr val="141820"/>
-                </a:solidFill>
-                <a:latin typeface="Leelawadee UI"/>
-              </a:rPr>
-              <a:t>ผลเชิงภาพและ Visualization</a:t>
-            </a:r>
-          </a:p>
-        </p:txBody>
-      </p:sp>
-      <p:sp>
-        <p:nvSpPr>
-          <p:cNvPr id="3" name="Rectangle 2"/>
-          <p:cNvSpPr/>
-          <p:nvPr/>
-        </p:nvSpPr>
-        <p:spPr>
-          <a:xfrm>
-            <a:off x="548640" y="1060704"/>
-            <a:ext cx="2103120" cy="54864"/>
-          </a:xfrm>
-          <a:prstGeom prst="rect">
-            <a:avLst/>
-          </a:prstGeom>
-          <a:solidFill>
-            <a:srgbClr val="006D77"/>
-          </a:solidFill>
-          <a:ln>
-            <a:noFill/>
-          </a:ln>
-        </p:spPr>
-        <p:style>
-          <a:lnRef idx="1">
-            <a:schemeClr val="accent1"/>
-          </a:lnRef>
-          <a:fillRef idx="3">
-            <a:schemeClr val="accent1"/>
-          </a:fillRef>
-          <a:effectRef idx="2">
-            <a:schemeClr val="accent1"/>
-          </a:effectRef>
-          <a:fontRef idx="minor">
-            <a:schemeClr val="lt1"/>
-          </a:fontRef>
-        </p:style>
-        <p:txBody>
-          <a:bodyPr rtlCol="0" anchor="ctr"/>
-          <a:lstStyle/>
-          <a:p>
-            <a:pPr algn="ctr"/>
-            <a:endParaRPr/>
-          </a:p>
-        </p:txBody>
-      </p:sp>
-      <p:pic>
-        <p:nvPicPr>
-          <p:cNvPr id="8" name="Picture 7">
-            <a:extLst>
-              <a:ext uri="{FF2B5EF4-FFF2-40B4-BE49-F238E27FC236}">
-                <a16:creationId xmlns:a16="http://schemas.microsoft.com/office/drawing/2014/main" id="{83AFEA5E-370C-A89D-089B-8CA714274405}"/>
-              </a:ext>
-            </a:extLst>
-          </p:cNvPr>
-          <p:cNvPicPr>
-            <a:picLocks noChangeAspect="1"/>
-          </p:cNvPicPr>
-          <p:nvPr/>
-        </p:nvPicPr>
-        <p:blipFill>
-          <a:blip r:embed="rId2"/>
-          <a:stretch>
-            <a:fillRect/>
-          </a:stretch>
-        </p:blipFill>
-        <p:spPr>
-          <a:xfrm>
-            <a:off x="2807592" y="1627632"/>
-            <a:ext cx="6723119" cy="4032210"/>
-          </a:xfrm>
-          <a:prstGeom prst="rect">
-            <a:avLst/>
-          </a:prstGeom>
-        </p:spPr>
-      </p:pic>
-    </p:spTree>
-  </p:cSld>
-  <p:clrMapOvr>
-    <a:masterClrMapping/>
-  </p:clrMapOvr>
-</p:sld>
-</file>
-
-<file path=ppt/slides/slide11.xml><?xml version="1.0" encoding="utf-8"?>
-<p:sld xmlns:a="http://schemas.openxmlformats.org/drawingml/2006/main" xmlns:r="http://schemas.openxmlformats.org/officeDocument/2006/relationships" xmlns:p="http://schemas.openxmlformats.org/presentationml/2006/main">
-  <p:cSld>
-    <p:bg>
-      <p:bgPr>
-        <a:solidFill>
-          <a:srgbClr val="FFFFFF"/>
-        </a:solidFill>
-        <a:effectLst/>
-      </p:bgPr>
-    </p:bg>
-    <p:spTree>
-      <p:nvGrpSpPr>
-        <p:cNvPr id="1" name=""/>
-        <p:cNvGrpSpPr/>
-        <p:nvPr/>
-      </p:nvGrpSpPr>
-      <p:grpSpPr>
-        <a:xfrm>
-          <a:off x="0" y="0"/>
-          <a:ext cx="0" cy="0"/>
-          <a:chOff x="0" y="0"/>
-          <a:chExt cx="0" cy="0"/>
-        </a:xfrm>
-      </p:grpSpPr>
-      <p:sp>
-        <p:nvSpPr>
-          <p:cNvPr id="2" name="TextBox 1"/>
-          <p:cNvSpPr txBox="1"/>
-          <p:nvPr/>
-        </p:nvSpPr>
-        <p:spPr>
-          <a:xfrm>
-            <a:off x="548640" y="365760"/>
-            <a:ext cx="10972800" cy="731520"/>
-          </a:xfrm>
-          <a:prstGeom prst="rect">
-            <a:avLst/>
-          </a:prstGeom>
-          <a:noFill/>
-        </p:spPr>
-        <p:txBody>
-          <a:bodyPr wrap="none">
-            <a:spAutoFit/>
-          </a:bodyPr>
-          <a:lstStyle/>
-          <a:p>
-            <a:r>
-              <a:rPr sz="2400" b="1">
-                <a:solidFill>
-                  <a:srgbClr val="141820"/>
-                </a:solidFill>
-                <a:latin typeface="Leelawadee UI"/>
-              </a:rPr>
-              <a:t>อภิปรายผล ข้อจำกัด และงานต่อยอด</a:t>
-            </a:r>
-          </a:p>
-        </p:txBody>
-      </p:sp>
-      <p:sp>
-        <p:nvSpPr>
-          <p:cNvPr id="3" name="Rectangle 2"/>
-          <p:cNvSpPr/>
-          <p:nvPr/>
-        </p:nvSpPr>
-        <p:spPr>
-          <a:xfrm>
-            <a:off x="548640" y="1060704"/>
-            <a:ext cx="2103120" cy="54864"/>
-          </a:xfrm>
-          <a:prstGeom prst="rect">
-            <a:avLst/>
-          </a:prstGeom>
-          <a:solidFill>
-            <a:srgbClr val="006D77"/>
-          </a:solidFill>
-          <a:ln>
-            <a:noFill/>
-          </a:ln>
-        </p:spPr>
-        <p:style>
-          <a:lnRef idx="1">
-            <a:schemeClr val="accent1"/>
-          </a:lnRef>
-          <a:fillRef idx="3">
-            <a:schemeClr val="accent1"/>
-          </a:fillRef>
-          <a:effectRef idx="2">
-            <a:schemeClr val="accent1"/>
-          </a:effectRef>
-          <a:fontRef idx="minor">
-            <a:schemeClr val="lt1"/>
-          </a:fontRef>
-        </p:style>
-        <p:txBody>
-          <a:bodyPr rtlCol="0" anchor="ctr"/>
-          <a:lstStyle/>
-          <a:p>
-            <a:pPr algn="ctr"/>
-            <a:endParaRPr/>
-          </a:p>
-        </p:txBody>
-      </p:sp>
-      <p:sp>
-        <p:nvSpPr>
-          <p:cNvPr id="4" name="TextBox 3"/>
-          <p:cNvSpPr txBox="1"/>
-          <p:nvPr/>
-        </p:nvSpPr>
-        <p:spPr>
-          <a:xfrm>
-            <a:off x="777240" y="1783080"/>
-            <a:ext cx="10332720" cy="2267287"/>
-          </a:xfrm>
-          <a:prstGeom prst="rect">
-            <a:avLst/>
-          </a:prstGeom>
-          <a:noFill/>
-        </p:spPr>
-        <p:txBody>
-          <a:bodyPr wrap="square" lIns="0">
-            <a:spAutoFit/>
-          </a:bodyPr>
-          <a:lstStyle/>
-          <a:p>
-            <a:pPr>
-              <a:spcAft>
-                <a:spcPts val="800"/>
-              </a:spcAft>
-              <a:defRPr sz="1800">
-                <a:solidFill>
-                  <a:srgbClr val="323A46"/>
-                </a:solidFill>
-                <a:latin typeface="Leelawadee UI"/>
-              </a:defRPr>
-            </a:pPr>
-            <a:r>
-              <a:rPr dirty="0" err="1"/>
-              <a:t>จุดแข็ง</a:t>
-            </a:r>
-            <a:r>
-              <a:rPr dirty="0"/>
-              <a:t>: proposed </a:t>
-            </a:r>
-            <a:r>
-              <a:rPr dirty="0" err="1"/>
-              <a:t>ลด</a:t>
-            </a:r>
-            <a:r>
-              <a:rPr dirty="0"/>
-              <a:t> temporal jitter </a:t>
-            </a:r>
-            <a:r>
-              <a:rPr dirty="0" err="1"/>
-              <a:t>ได้โดยไม่เปลี่ยน</a:t>
-            </a:r>
-            <a:r>
-              <a:rPr dirty="0"/>
-              <a:t> interface </a:t>
-            </a:r>
-            <a:r>
-              <a:rPr dirty="0" err="1"/>
-              <a:t>และไม่ต้องพึ่ง</a:t>
-            </a:r>
-            <a:r>
-              <a:rPr dirty="0"/>
-              <a:t> learned weights</a:t>
-            </a:r>
-          </a:p>
-          <a:p>
-            <a:pPr>
-              <a:spcAft>
-                <a:spcPts val="800"/>
-              </a:spcAft>
-              <a:defRPr sz="1800">
-                <a:solidFill>
-                  <a:srgbClr val="323A46"/>
-                </a:solidFill>
-                <a:latin typeface="Leelawadee UI"/>
-              </a:defRPr>
-            </a:pPr>
-            <a:r>
-              <a:rPr dirty="0" err="1"/>
-              <a:t>จุดแข็ง</a:t>
-            </a:r>
-            <a:r>
-              <a:rPr dirty="0"/>
-              <a:t>: repository </a:t>
-            </a:r>
-            <a:r>
-              <a:rPr dirty="0" err="1"/>
-              <a:t>มี</a:t>
-            </a:r>
-            <a:r>
-              <a:rPr dirty="0"/>
-              <a:t> benchmark, tests, plots, demo video </a:t>
-            </a:r>
-            <a:r>
-              <a:rPr dirty="0" err="1"/>
-              <a:t>และ</a:t>
-            </a:r>
-            <a:r>
-              <a:rPr dirty="0"/>
-              <a:t> pipeline </a:t>
-            </a:r>
-            <a:r>
-              <a:rPr dirty="0" err="1"/>
-              <a:t>สำหรับข้อมูลจริงครบ</a:t>
-            </a:r>
-            <a:endParaRPr dirty="0"/>
-          </a:p>
-          <a:p>
-            <a:pPr>
-              <a:spcAft>
-                <a:spcPts val="800"/>
-              </a:spcAft>
-              <a:defRPr sz="1800">
-                <a:solidFill>
-                  <a:srgbClr val="323A46"/>
-                </a:solidFill>
-                <a:latin typeface="Leelawadee UI"/>
-              </a:defRPr>
-            </a:pPr>
-            <a:r>
-              <a:rPr dirty="0" err="1"/>
-              <a:t>ข้อจำกัด</a:t>
-            </a:r>
-            <a:r>
-              <a:rPr dirty="0"/>
-              <a:t>: benchmark </a:t>
-            </a:r>
-            <a:r>
-              <a:rPr dirty="0" err="1"/>
-              <a:t>เชิงปริมาณยังโฟกัสที่</a:t>
-            </a:r>
-            <a:r>
-              <a:rPr dirty="0"/>
-              <a:t> motion primitive </a:t>
-            </a:r>
-            <a:r>
-              <a:rPr dirty="0" err="1"/>
-              <a:t>หลักเพียงชนิดเดียว</a:t>
-            </a:r>
-            <a:endParaRPr dirty="0"/>
-          </a:p>
-          <a:p>
-            <a:pPr>
-              <a:spcAft>
-                <a:spcPts val="800"/>
-              </a:spcAft>
-              <a:defRPr sz="1800">
-                <a:solidFill>
-                  <a:srgbClr val="323A46"/>
-                </a:solidFill>
-                <a:latin typeface="Leelawadee UI"/>
-              </a:defRPr>
-            </a:pPr>
-            <a:r>
-              <a:rPr dirty="0" err="1"/>
-              <a:t>ข้อจำกัด</a:t>
-            </a:r>
-            <a:r>
-              <a:rPr dirty="0"/>
-              <a:t>: repo </a:t>
-            </a:r>
-            <a:r>
-              <a:rPr dirty="0" err="1"/>
-              <a:t>ไม่ได้</a:t>
-            </a:r>
-            <a:r>
-              <a:rPr dirty="0"/>
-              <a:t> commit human recording </a:t>
-            </a:r>
-            <a:r>
-              <a:rPr dirty="0" err="1"/>
-              <a:t>จริงไว้โดยตรง</a:t>
-            </a:r>
-            <a:r>
-              <a:rPr dirty="0"/>
-              <a:t> </a:t>
-            </a:r>
-            <a:r>
-              <a:rPr dirty="0" err="1"/>
-              <a:t>เพราะข้อมูล</a:t>
-            </a:r>
-            <a:r>
-              <a:rPr dirty="0"/>
-              <a:t> landmark </a:t>
-            </a:r>
-            <a:r>
-              <a:rPr dirty="0" err="1"/>
-              <a:t>จากผู้ใช้มีประเด็นด้าน</a:t>
-            </a:r>
-            <a:r>
-              <a:rPr dirty="0"/>
-              <a:t> privacy</a:t>
-            </a:r>
-            <a:endParaRPr lang="en-US" dirty="0"/>
-          </a:p>
-          <a:p>
-            <a:pPr>
-              <a:spcAft>
-                <a:spcPts val="800"/>
-              </a:spcAft>
-              <a:defRPr sz="1800">
-                <a:solidFill>
-                  <a:srgbClr val="323A46"/>
-                </a:solidFill>
-                <a:latin typeface="Leelawadee UI"/>
-              </a:defRPr>
-            </a:pPr>
-            <a:r>
-              <a:rPr lang="th-TH" dirty="0"/>
-              <a:t>ข้อจำกัด</a:t>
-            </a:r>
-            <a:r>
-              <a:rPr lang="en-US" dirty="0"/>
-              <a:t>: </a:t>
-            </a:r>
-            <a:r>
-              <a:rPr lang="th-TH" dirty="0"/>
-              <a:t>ถ้า </a:t>
-            </a:r>
-            <a:r>
-              <a:rPr lang="en-US" dirty="0"/>
-              <a:t>camera </a:t>
-            </a:r>
-            <a:r>
-              <a:rPr lang="th-TH" dirty="0"/>
-              <a:t>ใกล้จะเห็นแค่ครึ่งตัวทำให้มีการ </a:t>
-            </a:r>
-            <a:r>
-              <a:rPr lang="en-US" dirty="0"/>
-              <a:t>track </a:t>
-            </a:r>
-            <a:r>
-              <a:rPr lang="th-TH" dirty="0"/>
-              <a:t>ผิดพลาด ในอนาคตอาจจะแก้ให้ให้ดีขึ้นได้</a:t>
-            </a:r>
-            <a:endParaRPr dirty="0"/>
-          </a:p>
-          <a:p>
-            <a:pPr>
-              <a:spcAft>
-                <a:spcPts val="800"/>
-              </a:spcAft>
-              <a:defRPr sz="1800">
-                <a:solidFill>
-                  <a:srgbClr val="323A46"/>
-                </a:solidFill>
-                <a:latin typeface="Leelawadee UI"/>
-              </a:defRPr>
-            </a:pPr>
-            <a:r>
-              <a:rPr dirty="0" err="1"/>
-              <a:t>งานต่อยอด</a:t>
-            </a:r>
-            <a:r>
-              <a:rPr dirty="0"/>
-              <a:t>: </a:t>
-            </a:r>
-            <a:r>
-              <a:rPr dirty="0" err="1"/>
-              <a:t>เชื่อม</a:t>
-            </a:r>
-            <a:r>
-              <a:rPr dirty="0"/>
-              <a:t> skeleton </a:t>
-            </a:r>
-            <a:r>
-              <a:rPr dirty="0" err="1"/>
-              <a:t>เข้ากับ</a:t>
-            </a:r>
-            <a:r>
-              <a:rPr dirty="0"/>
-              <a:t> animated avatar, </a:t>
-            </a:r>
-            <a:r>
-              <a:rPr dirty="0" err="1"/>
-              <a:t>เพิ่ม</a:t>
-            </a:r>
-            <a:r>
-              <a:rPr dirty="0"/>
-              <a:t> motion curves </a:t>
-            </a:r>
-            <a:r>
-              <a:rPr dirty="0" err="1"/>
-              <a:t>และขยาย</a:t>
-            </a:r>
-            <a:r>
-              <a:rPr dirty="0"/>
-              <a:t> benchmark </a:t>
-            </a:r>
-            <a:r>
-              <a:rPr dirty="0" err="1"/>
-              <a:t>ไปทุก</a:t>
-            </a:r>
-            <a:r>
-              <a:rPr dirty="0"/>
-              <a:t> exercise mode</a:t>
-            </a:r>
-          </a:p>
-        </p:txBody>
-      </p:sp>
-    </p:spTree>
-  </p:cSld>
-  <p:clrMapOvr>
-    <a:masterClrMapping/>
-  </p:clrMapOvr>
-</p:sld>
-</file>
-
-<file path=ppt/slides/slide12.xml><?xml version="1.0" encoding="utf-8"?>
-<p:sld xmlns:a="http://schemas.openxmlformats.org/drawingml/2006/main" xmlns:r="http://schemas.openxmlformats.org/officeDocument/2006/relationships" xmlns:p="http://schemas.openxmlformats.org/presentationml/2006/main">
-  <p:cSld>
-    <p:bg>
-      <p:bgPr>
-        <a:solidFill>
-          <a:srgbClr val="FFFFFF"/>
-        </a:solidFill>
-        <a:effectLst/>
-      </p:bgPr>
-    </p:bg>
-    <p:spTree>
-      <p:nvGrpSpPr>
-        <p:cNvPr id="1" name=""/>
-        <p:cNvGrpSpPr/>
-        <p:nvPr/>
-      </p:nvGrpSpPr>
-      <p:grpSpPr>
-        <a:xfrm>
-          <a:off x="0" y="0"/>
-          <a:ext cx="0" cy="0"/>
-          <a:chOff x="0" y="0"/>
-          <a:chExt cx="0" cy="0"/>
-        </a:xfrm>
-      </p:grpSpPr>
-      <p:sp>
-        <p:nvSpPr>
-          <p:cNvPr id="2" name="TextBox 1"/>
-          <p:cNvSpPr txBox="1"/>
-          <p:nvPr/>
-        </p:nvSpPr>
-        <p:spPr>
-          <a:xfrm>
-            <a:off x="548640" y="365760"/>
-            <a:ext cx="10972800" cy="731520"/>
-          </a:xfrm>
-          <a:prstGeom prst="rect">
-            <a:avLst/>
-          </a:prstGeom>
-          <a:noFill/>
-        </p:spPr>
-        <p:txBody>
-          <a:bodyPr wrap="none">
-            <a:spAutoFit/>
-          </a:bodyPr>
-          <a:lstStyle/>
-          <a:p>
-            <a:r>
-              <a:rPr sz="2400" b="1">
-                <a:solidFill>
-                  <a:srgbClr val="141820"/>
-                </a:solidFill>
-                <a:latin typeface="Leelawadee UI"/>
-              </a:rPr>
-              <a:t>สรุปและการทำซ้ำงาน</a:t>
-            </a:r>
-          </a:p>
-        </p:txBody>
-      </p:sp>
-      <p:sp>
-        <p:nvSpPr>
-          <p:cNvPr id="3" name="Rectangle 2"/>
-          <p:cNvSpPr/>
-          <p:nvPr/>
-        </p:nvSpPr>
-        <p:spPr>
-          <a:xfrm>
-            <a:off x="548640" y="1060704"/>
-            <a:ext cx="2103120" cy="54864"/>
-          </a:xfrm>
-          <a:prstGeom prst="rect">
-            <a:avLst/>
-          </a:prstGeom>
-          <a:solidFill>
-            <a:srgbClr val="006D77"/>
-          </a:solidFill>
-          <a:ln>
-            <a:noFill/>
-          </a:ln>
-        </p:spPr>
-        <p:style>
-          <a:lnRef idx="1">
-            <a:schemeClr val="accent1"/>
-          </a:lnRef>
-          <a:fillRef idx="3">
-            <a:schemeClr val="accent1"/>
-          </a:fillRef>
-          <a:effectRef idx="2">
-            <a:schemeClr val="accent1"/>
-          </a:effectRef>
-          <a:fontRef idx="minor">
-            <a:schemeClr val="lt1"/>
-          </a:fontRef>
-        </p:style>
-        <p:txBody>
-          <a:bodyPr rtlCol="0" anchor="ctr"/>
-          <a:lstStyle/>
-          <a:p>
-            <a:pPr algn="ctr"/>
-            <a:endParaRPr/>
-          </a:p>
-        </p:txBody>
-      </p:sp>
-      <p:sp>
-        <p:nvSpPr>
-          <p:cNvPr id="4" name="TextBox 3"/>
-          <p:cNvSpPr txBox="1"/>
-          <p:nvPr/>
-        </p:nvSpPr>
-        <p:spPr>
-          <a:xfrm>
-            <a:off x="777240" y="1783080"/>
-            <a:ext cx="10332720" cy="4206240"/>
-          </a:xfrm>
-          <a:prstGeom prst="rect">
-            <a:avLst/>
-          </a:prstGeom>
-          <a:noFill/>
-        </p:spPr>
-        <p:txBody>
-          <a:bodyPr wrap="square" lIns="0">
-            <a:spAutoFit/>
-          </a:bodyPr>
-          <a:lstStyle/>
-          <a:p>
-            <a:pPr>
-              <a:spcAft>
-                <a:spcPts val="800"/>
-              </a:spcAft>
-              <a:defRPr sz="1800">
-                <a:solidFill>
-                  <a:srgbClr val="323A46"/>
-                </a:solidFill>
-                <a:latin typeface="Leelawadee UI"/>
-              </a:defRPr>
-            </a:pPr>
-            <a:r>
-              <a:t>โปรเจกต์นี้มีองค์ประกอบครบตาม rubric: baseline comparison, scaling test และ visualization</a:t>
-            </a:r>
-          </a:p>
-          <a:p>
-            <a:pPr>
-              <a:spcAft>
-                <a:spcPts val="800"/>
-              </a:spcAft>
-              <a:defRPr sz="1800">
-                <a:solidFill>
-                  <a:srgbClr val="323A46"/>
-                </a:solidFill>
-                <a:latin typeface="Leelawadee UI"/>
-              </a:defRPr>
-            </a:pPr>
-            <a:r>
-              <a:t>แกนหลักของงานคือการตีความ pose tracking ผ่านแนวคิดด้าน skeleton, key poses, interpolation และ temporal continuity</a:t>
-            </a:r>
-          </a:p>
-          <a:p>
-            <a:pPr>
-              <a:spcAft>
-                <a:spcPts val="800"/>
-              </a:spcAft>
-              <a:defRPr sz="1800">
-                <a:solidFill>
-                  <a:srgbClr val="323A46"/>
-                </a:solidFill>
-                <a:latin typeface="Leelawadee UI"/>
-              </a:defRPr>
-            </a:pPr>
-            <a:r>
-              <a:t>คำสั่งหลัก: `python src/main.py --mode web`, `python src/main.py --mode benchmark`, `python src/main.py --mode demo`</a:t>
-            </a:r>
-          </a:p>
-          <a:p>
-            <a:pPr>
-              <a:spcAft>
-                <a:spcPts val="800"/>
-              </a:spcAft>
-              <a:defRPr sz="1800">
-                <a:solidFill>
-                  <a:srgbClr val="323A46"/>
-                </a:solidFill>
-                <a:latin typeface="Leelawadee UI"/>
-              </a:defRPr>
-            </a:pPr>
-            <a:r>
-              <a:t>คำสั่งเสริมสำหรับข้อมูลจริง: `python tools/collect_mocap.py` และ `python experiments/evaluate_recorded_sequence.py`</a:t>
-            </a:r>
-          </a:p>
-          <a:p>
-            <a:pPr>
-              <a:spcAft>
-                <a:spcPts val="800"/>
-              </a:spcAft>
-              <a:defRPr sz="1800">
-                <a:solidFill>
-                  <a:srgbClr val="323A46"/>
-                </a:solidFill>
-                <a:latin typeface="Leelawadee UI"/>
-              </a:defRPr>
-            </a:pPr>
-            <a:r>
-              <a:t>artifact ที่ส่งมีรายงาน Word, สไลด์ไทย/อังกฤษ, benchmark CSV/plot, demo video, tests และ source code ที่ทำซ้ำได้</a:t>
-            </a:r>
-          </a:p>
-        </p:txBody>
-      </p:sp>
-    </p:spTree>
-  </p:cSld>
-  <p:clrMapOvr>
-    <a:masterClrMapping/>
-  </p:clrMapOvr>
-</p:sld>
-</file>
-
-<file path=ppt/slides/slide13.xml><?xml version="1.0" encoding="utf-8"?>
-<p:sld xmlns:a="http://schemas.openxmlformats.org/drawingml/2006/main" xmlns:r="http://schemas.openxmlformats.org/officeDocument/2006/relationships" xmlns:p="http://schemas.openxmlformats.org/presentationml/2006/main">
-  <p:cSld>
-    <p:bg>
-      <p:bgPr>
-        <a:solidFill>
-          <a:srgbClr val="FFFFFF"/>
-        </a:solidFill>
-        <a:effectLst/>
-      </p:bgPr>
-    </p:bg>
-    <p:spTree>
-      <p:nvGrpSpPr>
-        <p:cNvPr id="1" name=""/>
-        <p:cNvGrpSpPr/>
-        <p:nvPr/>
-      </p:nvGrpSpPr>
-      <p:grpSpPr>
-        <a:xfrm>
-          <a:off x="0" y="0"/>
-          <a:ext cx="0" cy="0"/>
-          <a:chOff x="0" y="0"/>
-          <a:chExt cx="0" cy="0"/>
-        </a:xfrm>
-      </p:grpSpPr>
-      <p:sp>
-        <p:nvSpPr>
-          <p:cNvPr id="2" name="TextBox 1"/>
-          <p:cNvSpPr txBox="1"/>
-          <p:nvPr/>
-        </p:nvSpPr>
-        <p:spPr>
-          <a:xfrm>
-            <a:off x="548640" y="365760"/>
-            <a:ext cx="10972800" cy="731520"/>
-          </a:xfrm>
-          <a:prstGeom prst="rect">
-            <a:avLst/>
-          </a:prstGeom>
-          <a:noFill/>
-        </p:spPr>
-        <p:txBody>
-          <a:bodyPr wrap="none">
-            <a:spAutoFit/>
-          </a:bodyPr>
-          <a:lstStyle/>
-          <a:p>
-            <a:r>
-              <a:rPr sz="2400" b="1">
-                <a:solidFill>
-                  <a:srgbClr val="141820"/>
-                </a:solidFill>
-                <a:latin typeface="Leelawadee UI"/>
-              </a:rPr>
-              <a:t>เอกสารอ้างอิง</a:t>
-            </a:r>
-          </a:p>
-        </p:txBody>
-      </p:sp>
-      <p:sp>
-        <p:nvSpPr>
-          <p:cNvPr id="3" name="Rectangle 2"/>
-          <p:cNvSpPr/>
-          <p:nvPr/>
-        </p:nvSpPr>
-        <p:spPr>
-          <a:xfrm>
-            <a:off x="548640" y="1060704"/>
-            <a:ext cx="2103120" cy="54864"/>
-          </a:xfrm>
-          <a:prstGeom prst="rect">
-            <a:avLst/>
-          </a:prstGeom>
-          <a:solidFill>
-            <a:srgbClr val="006D77"/>
-          </a:solidFill>
-          <a:ln>
-            <a:noFill/>
-          </a:ln>
-        </p:spPr>
-        <p:style>
-          <a:lnRef idx="1">
-            <a:schemeClr val="accent1"/>
-          </a:lnRef>
-          <a:fillRef idx="3">
-            <a:schemeClr val="accent1"/>
-          </a:fillRef>
-          <a:effectRef idx="2">
-            <a:schemeClr val="accent1"/>
-          </a:effectRef>
-          <a:fontRef idx="minor">
-            <a:schemeClr val="lt1"/>
-          </a:fontRef>
-        </p:style>
-        <p:txBody>
-          <a:bodyPr rtlCol="0" anchor="ctr"/>
-          <a:lstStyle/>
-          <a:p>
-            <a:pPr algn="ctr"/>
-            <a:endParaRPr/>
-          </a:p>
-        </p:txBody>
-      </p:sp>
-      <p:sp>
-        <p:nvSpPr>
-          <p:cNvPr id="4" name="TextBox 3"/>
-          <p:cNvSpPr txBox="1"/>
-          <p:nvPr/>
-        </p:nvSpPr>
-        <p:spPr>
-          <a:xfrm>
-            <a:off x="777240" y="1783080"/>
-            <a:ext cx="10241280" cy="4389120"/>
-          </a:xfrm>
-          <a:prstGeom prst="rect">
-            <a:avLst/>
-          </a:prstGeom>
-          <a:noFill/>
-        </p:spPr>
-        <p:txBody>
-          <a:bodyPr wrap="square" lIns="0">
-            <a:spAutoFit/>
-          </a:bodyPr>
-          <a:lstStyle/>
-          <a:p>
-            <a:pPr>
-              <a:spcAft>
-                <a:spcPts val="800"/>
-              </a:spcAft>
-              <a:defRPr sz="1700">
-                <a:solidFill>
-                  <a:srgbClr val="323A46"/>
-                </a:solidFill>
-                <a:latin typeface="Leelawadee UI"/>
-              </a:defRPr>
-            </a:pPr>
-            <a:r>
-              <a:t>Bradski, G. The OpenCV Library. Dr. Dobb's Journal of Software Tools, 2000.</a:t>
-            </a:r>
-          </a:p>
-          <a:p>
-            <a:pPr>
-              <a:spcAft>
-                <a:spcPts val="800"/>
-              </a:spcAft>
-              <a:defRPr sz="1700">
-                <a:solidFill>
-                  <a:srgbClr val="323A46"/>
-                </a:solidFill>
-                <a:latin typeface="Leelawadee UI"/>
-              </a:defRPr>
-            </a:pPr>
-            <a:r>
-              <a:t>Bazarevsky, V. et al. BlazePose: On-device Real-time Body Pose tracking. arXiv, 2020.</a:t>
-            </a:r>
-          </a:p>
-          <a:p>
-            <a:pPr>
-              <a:spcAft>
-                <a:spcPts val="800"/>
-              </a:spcAft>
-              <a:defRPr sz="1700">
-                <a:solidFill>
-                  <a:srgbClr val="323A46"/>
-                </a:solidFill>
-                <a:latin typeface="Leelawadee UI"/>
-              </a:defRPr>
-            </a:pPr>
-            <a:r>
-              <a:t>Google MediaPipe Team. MediaPipe Pose documentation.</a:t>
-            </a:r>
-          </a:p>
-          <a:p>
-            <a:pPr>
-              <a:spcAft>
-                <a:spcPts val="800"/>
-              </a:spcAft>
-              <a:defRPr sz="1700">
-                <a:solidFill>
-                  <a:srgbClr val="323A46"/>
-                </a:solidFill>
-                <a:latin typeface="Leelawadee UI"/>
-              </a:defRPr>
-            </a:pPr>
-            <a:r>
-              <a:t>Casiez, G., Roussel, N., and Vogel, D. 1 Euro Filter. CHI 2012.</a:t>
-            </a:r>
-          </a:p>
-          <a:p>
-            <a:pPr>
-              <a:spcAft>
-                <a:spcPts val="800"/>
-              </a:spcAft>
-              <a:defRPr sz="1700">
-                <a:solidFill>
-                  <a:srgbClr val="323A46"/>
-                </a:solidFill>
-                <a:latin typeface="Leelawadee UI"/>
-              </a:defRPr>
-            </a:pPr>
-            <a:r>
-              <a:t>Parent, R. Computer Animation: Algorithms and Techniques. Morgan Kaufmann, 2012.</a:t>
-            </a:r>
-          </a:p>
-          <a:p>
-            <a:pPr>
-              <a:spcAft>
-                <a:spcPts val="800"/>
-              </a:spcAft>
-              <a:defRPr sz="1700">
-                <a:solidFill>
-                  <a:srgbClr val="323A46"/>
-                </a:solidFill>
-                <a:latin typeface="Leelawadee UI"/>
-              </a:defRPr>
-            </a:pPr>
-            <a:r>
-              <a:t>Menache, A. Understanding Motion Capture for Computer Animation and Video Games. Morgan Kaufmann, 2010.</a:t>
-            </a:r>
-          </a:p>
-        </p:txBody>
-      </p:sp>
-    </p:spTree>
-  </p:cSld>
-  <p:clrMapOvr>
-    <a:masterClrMapping/>
-  </p:clrMapOvr>
-</p:sld>
-</file>
-
-<file path=ppt/slides/slide2.xml><?xml version="1.0" encoding="utf-8"?>
-<p:sld xmlns:a="http://schemas.openxmlformats.org/drawingml/2006/main" xmlns:r="http://schemas.openxmlformats.org/officeDocument/2006/relationships" xmlns:p="http://schemas.openxmlformats.org/presentationml/2006/main">
-  <p:cSld>
-    <p:bg>
-      <p:bgPr>
-        <a:solidFill>
-          <a:srgbClr val="FFFFFF"/>
-        </a:solidFill>
-        <a:effectLst/>
-      </p:bgPr>
-    </p:bg>
-    <p:spTree>
-      <p:nvGrpSpPr>
-        <p:cNvPr id="1" name=""/>
-        <p:cNvGrpSpPr/>
-        <p:nvPr/>
-      </p:nvGrpSpPr>
-      <p:grpSpPr>
-        <a:xfrm>
-          <a:off x="0" y="0"/>
-          <a:ext cx="0" cy="0"/>
-          <a:chOff x="0" y="0"/>
-          <a:chExt cx="0" cy="0"/>
-        </a:xfrm>
-      </p:grpSpPr>
-      <p:sp>
-        <p:nvSpPr>
-          <p:cNvPr id="2" name="TextBox 1"/>
-          <p:cNvSpPr txBox="1"/>
-          <p:nvPr/>
-        </p:nvSpPr>
-        <p:spPr>
-          <a:xfrm>
-            <a:off x="548640" y="365760"/>
-            <a:ext cx="10972800" cy="731520"/>
-          </a:xfrm>
-          <a:prstGeom prst="rect">
-            <a:avLst/>
-          </a:prstGeom>
-          <a:noFill/>
-        </p:spPr>
-        <p:txBody>
-          <a:bodyPr wrap="none">
-            <a:spAutoFit/>
-          </a:bodyPr>
-          <a:lstStyle/>
-          <a:p>
-            <a:r>
-              <a:rPr sz="2400" b="1">
-                <a:solidFill>
-                  <a:srgbClr val="141820"/>
-                </a:solidFill>
-                <a:latin typeface="Leelawadee UI"/>
-              </a:rPr>
-              <a:t>นิยามปัญหาและวัตถุประสงค์</a:t>
-            </a:r>
-          </a:p>
-        </p:txBody>
-      </p:sp>
-      <p:sp>
-        <p:nvSpPr>
-          <p:cNvPr id="3" name="Rectangle 2"/>
-          <p:cNvSpPr/>
-          <p:nvPr/>
-        </p:nvSpPr>
-        <p:spPr>
-          <a:xfrm>
-            <a:off x="548640" y="1060704"/>
-            <a:ext cx="2103120" cy="54864"/>
-          </a:xfrm>
-          <a:prstGeom prst="rect">
-            <a:avLst/>
-          </a:prstGeom>
-          <a:solidFill>
-            <a:srgbClr val="006D77"/>
-          </a:solidFill>
-          <a:ln>
-            <a:noFill/>
-          </a:ln>
-        </p:spPr>
-        <p:style>
-          <a:lnRef idx="1">
-            <a:schemeClr val="accent1"/>
-          </a:lnRef>
-          <a:fillRef idx="3">
-            <a:schemeClr val="accent1"/>
-          </a:fillRef>
-          <a:effectRef idx="2">
-            <a:schemeClr val="accent1"/>
-          </a:effectRef>
-          <a:fontRef idx="minor">
-            <a:schemeClr val="lt1"/>
-          </a:fontRef>
-        </p:style>
-        <p:txBody>
-          <a:bodyPr rtlCol="0" anchor="ctr"/>
-          <a:lstStyle/>
-          <a:p>
-            <a:pPr algn="ctr"/>
-            <a:endParaRPr/>
-          </a:p>
-        </p:txBody>
-      </p:sp>
-      <p:sp>
-        <p:nvSpPr>
-          <p:cNvPr id="4" name="TextBox 3"/>
-          <p:cNvSpPr txBox="1"/>
-          <p:nvPr/>
-        </p:nvSpPr>
-        <p:spPr>
-          <a:xfrm>
-            <a:off x="548640" y="1170432"/>
-            <a:ext cx="10972800" cy="411480"/>
-          </a:xfrm>
-          <a:prstGeom prst="rect">
-            <a:avLst/>
-          </a:prstGeom>
-          <a:noFill/>
-        </p:spPr>
-        <p:txBody>
-          <a:bodyPr wrap="none">
-            <a:spAutoFit/>
-          </a:bodyPr>
-          <a:lstStyle/>
-          <a:p>
-            <a:r>
-              <a:rPr sz="1100">
-                <a:solidFill>
-                  <a:srgbClr val="687484"/>
-                </a:solidFill>
-                <a:latin typeface="Leelawadee UI"/>
-              </a:rPr>
-              <a:t>ครอบคลุม rubric ส่วน problem definition, baseline/proposed และเป้าหมายเชิงวิศวกรรม</a:t>
-            </a:r>
-          </a:p>
-        </p:txBody>
-      </p:sp>
-      <p:sp>
-        <p:nvSpPr>
-          <p:cNvPr id="5" name="TextBox 4"/>
-          <p:cNvSpPr txBox="1"/>
-          <p:nvPr/>
-        </p:nvSpPr>
-        <p:spPr>
-          <a:xfrm>
-            <a:off x="731520" y="1737360"/>
-            <a:ext cx="5577840" cy="4389120"/>
-          </a:xfrm>
-          <a:prstGeom prst="rect">
-            <a:avLst/>
-          </a:prstGeom>
-          <a:noFill/>
-        </p:spPr>
-        <p:txBody>
-          <a:bodyPr wrap="square" lIns="0">
-            <a:spAutoFit/>
-          </a:bodyPr>
-          <a:lstStyle/>
-          <a:p>
-            <a:pPr>
-              <a:spcAft>
-                <a:spcPts val="800"/>
-              </a:spcAft>
-              <a:defRPr sz="1800">
-                <a:solidFill>
-                  <a:srgbClr val="323A46"/>
-                </a:solidFill>
-                <a:latin typeface="Leelawadee UI"/>
-              </a:defRPr>
-            </a:pPr>
-            <a:r>
-              <a:rPr dirty="0" err="1"/>
-              <a:t>ศึกษาโจทย์การติดตามท่าออกกำลังกายแบบเรียลไทม์ในมุมมองของ</a:t>
-            </a:r>
-            <a:r>
-              <a:rPr dirty="0"/>
-              <a:t> Computer Animation </a:t>
-            </a:r>
-            <a:r>
-              <a:rPr dirty="0" err="1"/>
-              <a:t>ไม่ใช่แค่การจำแนกภาพจากกล้อง</a:t>
-            </a:r>
-            <a:endParaRPr dirty="0"/>
-          </a:p>
-          <a:p>
-            <a:pPr>
-              <a:spcAft>
-                <a:spcPts val="800"/>
-              </a:spcAft>
-              <a:defRPr sz="1800">
-                <a:solidFill>
-                  <a:srgbClr val="323A46"/>
-                </a:solidFill>
-                <a:latin typeface="Leelawadee UI"/>
-              </a:defRPr>
-            </a:pPr>
-            <a:r>
-              <a:rPr dirty="0" err="1"/>
-              <a:t>ใช้</a:t>
-            </a:r>
-            <a:r>
-              <a:rPr dirty="0"/>
-              <a:t> pose landmark </a:t>
-            </a:r>
-            <a:r>
-              <a:rPr dirty="0" err="1"/>
-              <a:t>เป็นโครงกระดูกแบบย่อ</a:t>
-            </a:r>
-            <a:r>
-              <a:rPr dirty="0"/>
-              <a:t> </a:t>
-            </a:r>
-            <a:r>
-              <a:rPr dirty="0" err="1"/>
-              <a:t>และตีความท่าออกกำลังกายเป็นการเปลี่ยนผ่านระหว่าง</a:t>
-            </a:r>
-            <a:r>
-              <a:rPr dirty="0"/>
-              <a:t> key poses</a:t>
-            </a:r>
-          </a:p>
-          <a:p>
-            <a:pPr>
-              <a:spcAft>
-                <a:spcPts val="800"/>
-              </a:spcAft>
-              <a:defRPr sz="1800">
-                <a:solidFill>
-                  <a:srgbClr val="323A46"/>
-                </a:solidFill>
-                <a:latin typeface="Leelawadee UI"/>
-              </a:defRPr>
-            </a:pPr>
-            <a:r>
-              <a:rPr dirty="0" err="1"/>
-              <a:t>เปรียบเทียบวิธี</a:t>
-            </a:r>
-            <a:r>
-              <a:rPr dirty="0"/>
-              <a:t> baseline </a:t>
-            </a:r>
-            <a:r>
-              <a:rPr dirty="0" err="1"/>
-              <a:t>แบบ</a:t>
-            </a:r>
-            <a:r>
-              <a:rPr dirty="0"/>
-              <a:t> threshold </a:t>
-            </a:r>
-            <a:r>
-              <a:rPr dirty="0" err="1"/>
-              <a:t>ตรง</a:t>
-            </a:r>
-            <a:r>
-              <a:rPr dirty="0"/>
-              <a:t> ๆ </a:t>
-            </a:r>
-            <a:r>
-              <a:rPr dirty="0" err="1"/>
-              <a:t>กับวิธี</a:t>
-            </a:r>
-            <a:r>
-              <a:rPr dirty="0"/>
-              <a:t> proposed </a:t>
-            </a:r>
-            <a:r>
-              <a:rPr dirty="0" err="1"/>
-              <a:t>ที่เพิ่ม</a:t>
-            </a:r>
-            <a:r>
-              <a:rPr dirty="0"/>
-              <a:t> confidence-aware side lock </a:t>
-            </a:r>
-            <a:r>
-              <a:rPr dirty="0" err="1"/>
-              <a:t>และ</a:t>
-            </a:r>
-            <a:r>
-              <a:rPr dirty="0"/>
-              <a:t> temporal filtering</a:t>
-            </a:r>
-          </a:p>
-          <a:p>
-            <a:pPr>
-              <a:spcAft>
-                <a:spcPts val="800"/>
-              </a:spcAft>
-              <a:defRPr sz="1800">
-                <a:solidFill>
-                  <a:srgbClr val="323A46"/>
-                </a:solidFill>
-                <a:latin typeface="Leelawadee UI"/>
-              </a:defRPr>
-            </a:pPr>
-            <a:r>
-              <a:rPr dirty="0" err="1"/>
-              <a:t>วัดผลด้วย</a:t>
-            </a:r>
-            <a:r>
-              <a:rPr dirty="0"/>
-              <a:t> runtime, memory, repetition-count accuracy </a:t>
-            </a:r>
-            <a:r>
-              <a:rPr dirty="0" err="1"/>
-              <a:t>และ</a:t>
-            </a:r>
-            <a:r>
-              <a:rPr dirty="0"/>
-              <a:t> temporal stability</a:t>
-            </a:r>
-          </a:p>
-          <a:p>
-            <a:pPr>
-              <a:spcAft>
-                <a:spcPts val="800"/>
-              </a:spcAft>
-              <a:defRPr sz="1800">
-                <a:solidFill>
-                  <a:srgbClr val="323A46"/>
-                </a:solidFill>
-                <a:latin typeface="Leelawadee UI"/>
-              </a:defRPr>
-            </a:pPr>
-            <a:r>
-              <a:rPr dirty="0" err="1"/>
-              <a:t>จัดทำ</a:t>
-            </a:r>
-            <a:r>
-              <a:rPr dirty="0"/>
-              <a:t> artifact </a:t>
-            </a:r>
-            <a:r>
-              <a:rPr dirty="0" err="1"/>
-              <a:t>ที่ทำซ้ำได้จริง</a:t>
-            </a:r>
-            <a:r>
-              <a:rPr dirty="0"/>
-              <a:t> </a:t>
-            </a:r>
-            <a:r>
-              <a:rPr dirty="0" err="1"/>
-              <a:t>พร้อม</a:t>
-            </a:r>
-            <a:r>
-              <a:rPr dirty="0"/>
-              <a:t> live demo, benchmark, tests </a:t>
-            </a:r>
-            <a:r>
-              <a:rPr dirty="0" err="1"/>
-              <a:t>และเอกสารส่งงาน</a:t>
-            </a:r>
-            <a:endParaRPr dirty="0"/>
-          </a:p>
-        </p:txBody>
-      </p:sp>
-      <p:sp>
-        <p:nvSpPr>
-          <p:cNvPr id="6" name="TextBox 5"/>
-          <p:cNvSpPr txBox="1"/>
-          <p:nvPr/>
-        </p:nvSpPr>
-        <p:spPr>
-          <a:xfrm>
-            <a:off x="6583680" y="1737360"/>
-            <a:ext cx="3749039" cy="646331"/>
-          </a:xfrm>
-          <a:prstGeom prst="rect">
-            <a:avLst/>
-          </a:prstGeom>
-          <a:noFill/>
-        </p:spPr>
-        <p:txBody>
-          <a:bodyPr wrap="square" anchor="t">
-            <a:spAutoFit/>
-          </a:bodyPr>
-          <a:lstStyle/>
-          <a:p>
-            <a:r>
-              <a:rPr lang="th-TH" b="1" dirty="0">
-                <a:solidFill>
-                  <a:srgbClr val="006D77"/>
-                </a:solidFill>
-                <a:latin typeface="Leelawadee UI"/>
-              </a:rPr>
-              <a:t>เกี่ยวข้องกับ </a:t>
-            </a:r>
-            <a:r>
-              <a:rPr lang="en-US" sz="1800" b="1" dirty="0">
-                <a:solidFill>
-                  <a:srgbClr val="006D77"/>
-                </a:solidFill>
-                <a:latin typeface="Leelawadee UI"/>
-              </a:rPr>
-              <a:t>Computer Animation</a:t>
-            </a:r>
-            <a:r>
-              <a:rPr lang="th-TH" sz="1800" b="1" dirty="0">
-                <a:solidFill>
-                  <a:srgbClr val="006D77"/>
-                </a:solidFill>
-                <a:latin typeface="Leelawadee UI"/>
-              </a:rPr>
-              <a:t> อย่างไร</a:t>
-            </a:r>
-            <a:endParaRPr sz="1800" b="1" dirty="0">
-              <a:solidFill>
-                <a:srgbClr val="006D77"/>
-              </a:solidFill>
-              <a:latin typeface="Leelawadee UI"/>
-            </a:endParaRPr>
-          </a:p>
-        </p:txBody>
-      </p:sp>
-      <p:sp>
-        <p:nvSpPr>
-          <p:cNvPr id="7" name="TextBox 6"/>
-          <p:cNvSpPr txBox="1"/>
-          <p:nvPr/>
-        </p:nvSpPr>
-        <p:spPr>
-          <a:xfrm>
-            <a:off x="6739128" y="2606040"/>
-            <a:ext cx="4572000" cy="2926080"/>
-          </a:xfrm>
-          <a:prstGeom prst="rect">
-            <a:avLst/>
-          </a:prstGeom>
-          <a:noFill/>
-        </p:spPr>
-        <p:txBody>
-          <a:bodyPr wrap="square" lIns="0">
-            <a:spAutoFit/>
-          </a:bodyPr>
-          <a:lstStyle/>
-          <a:p>
-            <a:pPr>
-              <a:spcAft>
-                <a:spcPts val="800"/>
-              </a:spcAft>
-              <a:defRPr sz="1700">
-                <a:solidFill>
-                  <a:srgbClr val="323A46"/>
-                </a:solidFill>
-                <a:latin typeface="Leelawadee UI"/>
-              </a:defRPr>
-            </a:pPr>
-            <a:r>
-              <a:rPr dirty="0" err="1"/>
-              <a:t>มองร่างกายเป็น</a:t>
-            </a:r>
-            <a:r>
-              <a:rPr dirty="0"/>
-              <a:t> skeleton-like structure</a:t>
-            </a:r>
-          </a:p>
-          <a:p>
-            <a:pPr>
-              <a:spcAft>
-                <a:spcPts val="800"/>
-              </a:spcAft>
-              <a:defRPr sz="1700">
-                <a:solidFill>
-                  <a:srgbClr val="323A46"/>
-                </a:solidFill>
-                <a:latin typeface="Leelawadee UI"/>
-              </a:defRPr>
-            </a:pPr>
-            <a:r>
-              <a:rPr dirty="0" err="1"/>
-              <a:t>มี</a:t>
-            </a:r>
-            <a:r>
-              <a:rPr dirty="0"/>
-              <a:t> key poses </a:t>
-            </a:r>
-            <a:r>
-              <a:rPr dirty="0" err="1"/>
-              <a:t>และ</a:t>
-            </a:r>
-            <a:r>
-              <a:rPr dirty="0"/>
-              <a:t> stage transitions</a:t>
-            </a:r>
-          </a:p>
-          <a:p>
-            <a:pPr>
-              <a:spcAft>
-                <a:spcPts val="800"/>
-              </a:spcAft>
-              <a:defRPr sz="1700">
-                <a:solidFill>
-                  <a:srgbClr val="323A46"/>
-                </a:solidFill>
-                <a:latin typeface="Leelawadee UI"/>
-              </a:defRPr>
-            </a:pPr>
-            <a:r>
-              <a:rPr dirty="0" err="1"/>
-              <a:t>มีการแปลง</a:t>
-            </a:r>
-            <a:r>
-              <a:rPr dirty="0"/>
-              <a:t> pose progress </a:t>
-            </a:r>
-            <a:r>
-              <a:rPr dirty="0" err="1"/>
-              <a:t>เป็นค่าต่อเนื่อง</a:t>
-            </a:r>
-            <a:endParaRPr dirty="0"/>
-          </a:p>
-          <a:p>
-            <a:pPr>
-              <a:spcAft>
-                <a:spcPts val="800"/>
-              </a:spcAft>
-              <a:defRPr sz="1700">
-                <a:solidFill>
-                  <a:srgbClr val="323A46"/>
-                </a:solidFill>
-                <a:latin typeface="Leelawadee UI"/>
-              </a:defRPr>
-            </a:pPr>
-            <a:r>
-              <a:rPr dirty="0" err="1"/>
-              <a:t>เชื่อมโยงกับ</a:t>
-            </a:r>
-            <a:r>
-              <a:rPr dirty="0"/>
-              <a:t> motion capture </a:t>
-            </a:r>
-            <a:r>
-              <a:rPr dirty="0" err="1"/>
-              <a:t>แบบ</a:t>
-            </a:r>
-            <a:r>
-              <a:rPr dirty="0"/>
-              <a:t> </a:t>
-            </a:r>
-            <a:r>
-              <a:rPr dirty="0" err="1"/>
-              <a:t>markerless</a:t>
-            </a:r>
-            <a:endParaRPr dirty="0"/>
-          </a:p>
-        </p:txBody>
-      </p:sp>
-    </p:spTree>
-  </p:cSld>
-  <p:clrMapOvr>
-    <a:masterClrMapping/>
-  </p:clrMapOvr>
-</p:sld>
-</file>
-
-<file path=ppt/slides/slide3.xml><?xml version="1.0" encoding="utf-8"?>
-<p:sld xmlns:a="http://schemas.openxmlformats.org/drawingml/2006/main" xmlns:r="http://schemas.openxmlformats.org/officeDocument/2006/relationships" xmlns:p="http://schemas.openxmlformats.org/presentationml/2006/main">
-  <p:cSld>
-    <p:bg>
-      <p:bgPr>
-        <a:solidFill>
-          <a:srgbClr val="FFFFFF"/>
-        </a:solidFill>
-        <a:effectLst/>
-      </p:bgPr>
-    </p:bg>
-    <p:spTree>
-      <p:nvGrpSpPr>
-        <p:cNvPr id="1" name=""/>
-        <p:cNvGrpSpPr/>
-        <p:nvPr/>
-      </p:nvGrpSpPr>
-      <p:grpSpPr>
-        <a:xfrm>
-          <a:off x="0" y="0"/>
-          <a:ext cx="0" cy="0"/>
-          <a:chOff x="0" y="0"/>
-          <a:chExt cx="0" cy="0"/>
-        </a:xfrm>
-      </p:grpSpPr>
-      <p:sp>
-        <p:nvSpPr>
-          <p:cNvPr id="2" name="TextBox 1"/>
-          <p:cNvSpPr txBox="1"/>
-          <p:nvPr/>
-        </p:nvSpPr>
-        <p:spPr>
-          <a:xfrm>
-            <a:off x="548640" y="365760"/>
-            <a:ext cx="10972800" cy="731520"/>
-          </a:xfrm>
-          <a:prstGeom prst="rect">
-            <a:avLst/>
-          </a:prstGeom>
-          <a:noFill/>
-        </p:spPr>
-        <p:txBody>
-          <a:bodyPr wrap="none">
-            <a:spAutoFit/>
-          </a:bodyPr>
-          <a:lstStyle/>
-          <a:p>
-            <a:r>
-              <a:rPr sz="2400" b="1">
-                <a:solidFill>
-                  <a:srgbClr val="141820"/>
-                </a:solidFill>
-                <a:latin typeface="Leelawadee UI"/>
-              </a:rPr>
-              <a:t>นิยามปัญหาเชิงรูปนัย</a:t>
-            </a:r>
-          </a:p>
-        </p:txBody>
-      </p:sp>
-      <p:sp>
-        <p:nvSpPr>
-          <p:cNvPr id="3" name="Rectangle 2"/>
-          <p:cNvSpPr/>
-          <p:nvPr/>
-        </p:nvSpPr>
-        <p:spPr>
-          <a:xfrm>
-            <a:off x="548640" y="1060704"/>
-            <a:ext cx="2103120" cy="54864"/>
-          </a:xfrm>
-          <a:prstGeom prst="rect">
-            <a:avLst/>
-          </a:prstGeom>
-          <a:solidFill>
-            <a:srgbClr val="006D77"/>
-          </a:solidFill>
-          <a:ln>
-            <a:noFill/>
-          </a:ln>
-        </p:spPr>
-        <p:style>
-          <a:lnRef idx="1">
-            <a:schemeClr val="accent1"/>
-          </a:lnRef>
-          <a:fillRef idx="3">
-            <a:schemeClr val="accent1"/>
-          </a:fillRef>
-          <a:effectRef idx="2">
-            <a:schemeClr val="accent1"/>
-          </a:effectRef>
-          <a:fontRef idx="minor">
-            <a:schemeClr val="lt1"/>
-          </a:fontRef>
-        </p:style>
-        <p:txBody>
-          <a:bodyPr rtlCol="0" anchor="ctr"/>
-          <a:lstStyle/>
-          <a:p>
-            <a:pPr algn="ctr"/>
-            <a:endParaRPr/>
-          </a:p>
-        </p:txBody>
-      </p:sp>
-      <p:sp>
-        <p:nvSpPr>
-          <p:cNvPr id="4" name="TextBox 3"/>
-          <p:cNvSpPr txBox="1"/>
-          <p:nvPr/>
-        </p:nvSpPr>
-        <p:spPr>
-          <a:xfrm>
-            <a:off x="777240" y="1737360"/>
-            <a:ext cx="5440680" cy="4389120"/>
-          </a:xfrm>
-          <a:prstGeom prst="rect">
-            <a:avLst/>
-          </a:prstGeom>
-          <a:noFill/>
-        </p:spPr>
-        <p:txBody>
-          <a:bodyPr wrap="square" lIns="0">
-            <a:spAutoFit/>
-          </a:bodyPr>
-          <a:lstStyle/>
-          <a:p>
-            <a:pPr>
-              <a:spcAft>
-                <a:spcPts val="800"/>
-              </a:spcAft>
-              <a:defRPr sz="1800">
-                <a:solidFill>
-                  <a:srgbClr val="323A46"/>
-                </a:solidFill>
-                <a:latin typeface="Leelawadee UI"/>
-              </a:defRPr>
-            </a:pPr>
-            <a:r>
-              <a:t>Input: ลำดับของ 2D joint landmarks พร้อม visibility จาก webcam หรือไฟล์ CSV ที่บันทึกไว้</a:t>
-            </a:r>
-          </a:p>
-          <a:p>
-            <a:pPr>
-              <a:spcAft>
-                <a:spcPts val="800"/>
-              </a:spcAft>
-              <a:defRPr sz="1800">
-                <a:solidFill>
-                  <a:srgbClr val="323A46"/>
-                </a:solidFill>
-                <a:latin typeface="Leelawadee UI"/>
-              </a:defRPr>
-            </a:pPr>
-            <a:r>
-              <a:t>Output: จำนวนครั้ง, stage ปัจจุบัน, progress percentage และภาพ visualization</a:t>
-            </a:r>
-          </a:p>
-          <a:p>
-            <a:pPr>
-              <a:spcAft>
-                <a:spcPts val="800"/>
-              </a:spcAft>
-              <a:defRPr sz="1800">
-                <a:solidFill>
-                  <a:srgbClr val="323A46"/>
-                </a:solidFill>
-                <a:latin typeface="Leelawadee UI"/>
-              </a:defRPr>
-            </a:pPr>
-            <a:r>
-              <a:t>Constraints: ต้องตอบสนองแบบ interactive, ทนต่อ occlusion, ลด threshold chatter และทำงานได้แบบ deterministic</a:t>
-            </a:r>
-          </a:p>
-          <a:p>
-            <a:pPr>
-              <a:spcAft>
-                <a:spcPts val="800"/>
-              </a:spcAft>
-              <a:defRPr sz="1800">
-                <a:solidFill>
-                  <a:srgbClr val="323A46"/>
-                </a:solidFill>
-                <a:latin typeface="Leelawadee UI"/>
-              </a:defRPr>
-            </a:pPr>
-            <a:r>
-              <a:t>ความท้าทาย 1: จุดกลับตัวของท่ามี noise ทำให้เกิดนับซ้ำหรือหลุดนับ</a:t>
-            </a:r>
-          </a:p>
-          <a:p>
-            <a:pPr>
-              <a:spcAft>
-                <a:spcPts val="800"/>
-              </a:spcAft>
-              <a:defRPr sz="1800">
-                <a:solidFill>
-                  <a:srgbClr val="323A46"/>
-                </a:solidFill>
-                <a:latin typeface="Leelawadee UI"/>
-              </a:defRPr>
-            </a:pPr>
-            <a:r>
-              <a:t>ความท้าทาย 2: การสลับเลือกแขนซ้ายขวาบ่อยเกินไปทำให้การตีความ motion ไม่นิ่ง</a:t>
-            </a:r>
-          </a:p>
-          <a:p>
-            <a:pPr>
-              <a:spcAft>
-                <a:spcPts val="800"/>
-              </a:spcAft>
-              <a:defRPr sz="1800">
-                <a:solidFill>
-                  <a:srgbClr val="323A46"/>
-                </a:solidFill>
-                <a:latin typeface="Leelawadee UI"/>
-              </a:defRPr>
-            </a:pPr>
-            <a:r>
-              <a:t>ความท้าทาย 3: ต้องทำให้ feedback เข้าใจง่ายสำหรับผู้ใช้แบบ real-time</a:t>
-            </a:r>
-          </a:p>
-        </p:txBody>
-      </p:sp>
-      <p:sp>
-        <p:nvSpPr>
-          <p:cNvPr id="5" name="TextBox 4"/>
-          <p:cNvSpPr txBox="1"/>
-          <p:nvPr/>
-        </p:nvSpPr>
-        <p:spPr>
-          <a:xfrm>
-            <a:off x="6492240" y="1783080"/>
-            <a:ext cx="3200400" cy="274320"/>
-          </a:xfrm>
-          <a:prstGeom prst="rect">
-            <a:avLst/>
-          </a:prstGeom>
-          <a:noFill/>
-        </p:spPr>
-        <p:txBody>
-          <a:bodyPr wrap="square" anchor="t">
-            <a:spAutoFit/>
-          </a:bodyPr>
-          <a:lstStyle/>
-          <a:p>
-            <a:r>
-              <a:rPr sz="1800" b="1">
-                <a:solidFill>
-                  <a:srgbClr val="006D77"/>
-                </a:solidFill>
-                <a:latin typeface="Leelawadee UI"/>
-              </a:rPr>
-              <a:t>Motion Primitive ที่ใช้ benchmark</a:t>
-            </a:r>
-          </a:p>
-        </p:txBody>
-      </p:sp>
-      <p:sp>
-        <p:nvSpPr>
-          <p:cNvPr id="6" name="TextBox 5"/>
-          <p:cNvSpPr txBox="1"/>
-          <p:nvPr/>
-        </p:nvSpPr>
-        <p:spPr>
-          <a:xfrm>
-            <a:off x="6492240" y="2560319"/>
-            <a:ext cx="4663440" cy="1554480"/>
-          </a:xfrm>
-          <a:prstGeom prst="rect">
-            <a:avLst/>
-          </a:prstGeom>
-          <a:noFill/>
-        </p:spPr>
-        <p:txBody>
-          <a:bodyPr wrap="square" anchor="t">
-            <a:spAutoFit/>
-          </a:bodyPr>
-          <a:lstStyle/>
-          <a:p>
-            <a:r>
-              <a:rPr sz="1700" b="0" dirty="0" err="1">
-                <a:solidFill>
-                  <a:srgbClr val="323A46"/>
-                </a:solidFill>
-                <a:latin typeface="Leelawadee UI"/>
-              </a:rPr>
-              <a:t>ใช้ท่า</a:t>
-            </a:r>
-            <a:r>
-              <a:rPr sz="1700" b="0" dirty="0">
-                <a:solidFill>
-                  <a:srgbClr val="323A46"/>
-                </a:solidFill>
-                <a:latin typeface="Leelawadee UI"/>
-              </a:rPr>
-              <a:t> bicep curl </a:t>
-            </a:r>
-            <a:r>
-              <a:rPr sz="1700" b="0" dirty="0" err="1">
-                <a:solidFill>
-                  <a:srgbClr val="323A46"/>
-                </a:solidFill>
-                <a:latin typeface="Leelawadee UI"/>
-              </a:rPr>
-              <a:t>เป็นตัวแทนของ</a:t>
-            </a:r>
-            <a:r>
-              <a:rPr sz="1700" b="0" dirty="0">
-                <a:solidFill>
-                  <a:srgbClr val="323A46"/>
-                </a:solidFill>
-                <a:latin typeface="Leelawadee UI"/>
-              </a:rPr>
-              <a:t> articulated motion primitive </a:t>
-            </a:r>
-            <a:r>
-              <a:rPr sz="1700" b="0" dirty="0" err="1">
-                <a:solidFill>
-                  <a:srgbClr val="323A46"/>
-                </a:solidFill>
-                <a:latin typeface="Leelawadee UI"/>
-              </a:rPr>
-              <a:t>สำหรับวัด</a:t>
-            </a:r>
-            <a:r>
-              <a:rPr sz="1700" b="0" dirty="0">
-                <a:solidFill>
-                  <a:srgbClr val="323A46"/>
-                </a:solidFill>
-                <a:latin typeface="Leelawadee UI"/>
-              </a:rPr>
-              <a:t> baseline/proposed </a:t>
-            </a:r>
-            <a:r>
-              <a:rPr sz="1700" b="0" dirty="0" err="1">
-                <a:solidFill>
-                  <a:srgbClr val="323A46"/>
-                </a:solidFill>
-                <a:latin typeface="Leelawadee UI"/>
-              </a:rPr>
-              <a:t>อย่างยุติธรรม</a:t>
-            </a:r>
-            <a:r>
-              <a:rPr sz="1700" b="0" dirty="0">
-                <a:solidFill>
-                  <a:srgbClr val="323A46"/>
-                </a:solidFill>
-                <a:latin typeface="Leelawadee UI"/>
-              </a:rPr>
-              <a:t> </a:t>
-            </a:r>
-            <a:r>
-              <a:rPr sz="1700" b="0" dirty="0" err="1">
-                <a:solidFill>
-                  <a:srgbClr val="323A46"/>
-                </a:solidFill>
-                <a:latin typeface="Leelawadee UI"/>
-              </a:rPr>
-              <a:t>ส่วน</a:t>
-            </a:r>
-            <a:r>
-              <a:rPr sz="1700" b="0" dirty="0">
-                <a:solidFill>
-                  <a:srgbClr val="323A46"/>
-                </a:solidFill>
-                <a:latin typeface="Leelawadee UI"/>
-              </a:rPr>
-              <a:t> live app </a:t>
-            </a:r>
-            <a:r>
-              <a:rPr sz="1700" b="0" dirty="0" err="1">
-                <a:solidFill>
-                  <a:srgbClr val="323A46"/>
-                </a:solidFill>
-                <a:latin typeface="Leelawadee UI"/>
-              </a:rPr>
-              <a:t>ขยาย</a:t>
-            </a:r>
-            <a:r>
-              <a:rPr sz="1700" b="0" dirty="0">
-                <a:solidFill>
-                  <a:srgbClr val="323A46"/>
-                </a:solidFill>
-                <a:latin typeface="Leelawadee UI"/>
-              </a:rPr>
-              <a:t> framework </a:t>
-            </a:r>
-            <a:r>
-              <a:rPr sz="1700" b="0" dirty="0" err="1">
-                <a:solidFill>
-                  <a:srgbClr val="323A46"/>
-                </a:solidFill>
-                <a:latin typeface="Leelawadee UI"/>
-              </a:rPr>
-              <a:t>เดียวกันไปยัง</a:t>
-            </a:r>
-            <a:r>
-              <a:rPr sz="1700" b="0" dirty="0">
-                <a:solidFill>
-                  <a:srgbClr val="323A46"/>
-                </a:solidFill>
-                <a:latin typeface="Leelawadee UI"/>
-              </a:rPr>
-              <a:t> 6 </a:t>
-            </a:r>
-            <a:r>
-              <a:rPr sz="1700" b="0" dirty="0" err="1">
-                <a:solidFill>
-                  <a:srgbClr val="323A46"/>
-                </a:solidFill>
-                <a:latin typeface="Leelawadee UI"/>
-              </a:rPr>
-              <a:t>ท่าออกกำลังกาย</a:t>
-            </a:r>
-            <a:endParaRPr sz="1700" b="0" dirty="0">
-              <a:solidFill>
-                <a:srgbClr val="323A46"/>
-              </a:solidFill>
-              <a:latin typeface="Leelawadee UI"/>
-            </a:endParaRPr>
-          </a:p>
-        </p:txBody>
-      </p:sp>
-      <p:sp>
-        <p:nvSpPr>
-          <p:cNvPr id="7" name="TextBox 6"/>
-          <p:cNvSpPr txBox="1"/>
-          <p:nvPr/>
-        </p:nvSpPr>
-        <p:spPr>
-          <a:xfrm>
-            <a:off x="6492240" y="3977639"/>
-            <a:ext cx="2743200" cy="274320"/>
-          </a:xfrm>
-          <a:prstGeom prst="rect">
-            <a:avLst/>
-          </a:prstGeom>
-          <a:noFill/>
-        </p:spPr>
-        <p:txBody>
-          <a:bodyPr wrap="square" anchor="t">
-            <a:spAutoFit/>
-          </a:bodyPr>
-          <a:lstStyle/>
-          <a:p>
-            <a:r>
-              <a:rPr sz="1800" b="1">
-                <a:solidFill>
-                  <a:srgbClr val="006D77"/>
-                </a:solidFill>
-                <a:latin typeface="Leelawadee UI"/>
-              </a:rPr>
-              <a:t>Visualization ที่ส่งพร้อมงาน</a:t>
-            </a:r>
-          </a:p>
-        </p:txBody>
-      </p:sp>
-      <p:sp>
-        <p:nvSpPr>
-          <p:cNvPr id="8" name="TextBox 7"/>
-          <p:cNvSpPr txBox="1"/>
-          <p:nvPr/>
-        </p:nvSpPr>
-        <p:spPr>
-          <a:xfrm>
-            <a:off x="6537960" y="4297680"/>
-            <a:ext cx="4206240" cy="1645920"/>
-          </a:xfrm>
-          <a:prstGeom prst="rect">
-            <a:avLst/>
-          </a:prstGeom>
-          <a:noFill/>
-        </p:spPr>
-        <p:txBody>
-          <a:bodyPr wrap="square" lIns="0">
-            <a:spAutoFit/>
-          </a:bodyPr>
-          <a:lstStyle/>
-          <a:p>
-            <a:pPr>
-              <a:spcAft>
-                <a:spcPts val="800"/>
-              </a:spcAft>
-              <a:defRPr sz="1700">
-                <a:solidFill>
-                  <a:srgbClr val="323A46"/>
-                </a:solidFill>
-                <a:latin typeface="Leelawadee UI"/>
-              </a:defRPr>
-            </a:pPr>
-            <a:r>
-              <a:t>หน้าเว็บ Flask แบบ live</a:t>
-            </a:r>
-          </a:p>
-          <a:p>
-            <a:pPr>
-              <a:spcAft>
-                <a:spcPts val="800"/>
-              </a:spcAft>
-              <a:defRPr sz="1700">
-                <a:solidFill>
-                  <a:srgbClr val="323A46"/>
-                </a:solidFill>
-                <a:latin typeface="Leelawadee UI"/>
-              </a:defRPr>
-            </a:pPr>
-            <a:r>
-              <a:t>demo video แบบ side-by-side</a:t>
-            </a:r>
-          </a:p>
-          <a:p>
-            <a:pPr>
-              <a:spcAft>
-                <a:spcPts val="800"/>
-              </a:spcAft>
-              <a:defRPr sz="1700">
-                <a:solidFill>
-                  <a:srgbClr val="323A46"/>
-                </a:solidFill>
-                <a:latin typeface="Leelawadee UI"/>
-              </a:defRPr>
-            </a:pPr>
-            <a:r>
-              <a:t>plots สำหรับ runtime และ stability</a:t>
-            </a:r>
-          </a:p>
-        </p:txBody>
-      </p:sp>
-    </p:spTree>
-  </p:cSld>
-  <p:clrMapOvr>
-    <a:masterClrMapping/>
-  </p:clrMapOvr>
-</p:sld>
-</file>
-
-<file path=ppt/slides/slide4.xml><?xml version="1.0" encoding="utf-8"?>
-<p:sld xmlns:a="http://schemas.openxmlformats.org/drawingml/2006/main" xmlns:r="http://schemas.openxmlformats.org/officeDocument/2006/relationships" xmlns:p="http://schemas.openxmlformats.org/presentationml/2006/main">
-  <p:cSld>
-    <p:bg>
-      <p:bgPr>
-        <a:solidFill>
-          <a:srgbClr val="FFFFFF"/>
-        </a:solidFill>
-        <a:effectLst/>
-      </p:bgPr>
-    </p:bg>
-    <p:spTree>
-      <p:nvGrpSpPr>
-        <p:cNvPr id="1" name=""/>
-        <p:cNvGrpSpPr/>
-        <p:nvPr/>
-      </p:nvGrpSpPr>
-      <p:grpSpPr>
-        <a:xfrm>
-          <a:off x="0" y="0"/>
-          <a:ext cx="0" cy="0"/>
-          <a:chOff x="0" y="0"/>
-          <a:chExt cx="0" cy="0"/>
-        </a:xfrm>
-      </p:grpSpPr>
-      <p:sp>
-        <p:nvSpPr>
-          <p:cNvPr id="2" name="TextBox 1"/>
-          <p:cNvSpPr txBox="1"/>
-          <p:nvPr/>
-        </p:nvSpPr>
-        <p:spPr>
-          <a:xfrm>
-            <a:off x="548640" y="365760"/>
-            <a:ext cx="10972800" cy="731520"/>
-          </a:xfrm>
-          <a:prstGeom prst="rect">
-            <a:avLst/>
-          </a:prstGeom>
-          <a:noFill/>
-        </p:spPr>
-        <p:txBody>
-          <a:bodyPr wrap="none">
-            <a:spAutoFit/>
-          </a:bodyPr>
-          <a:lstStyle/>
-          <a:p>
-            <a:r>
-              <a:rPr sz="2400" b="1" dirty="0">
-                <a:solidFill>
-                  <a:srgbClr val="141820"/>
-                </a:solidFill>
-                <a:latin typeface="Leelawadee UI"/>
-              </a:rPr>
-              <a:t>Baseline, Proposed </a:t>
-            </a:r>
-            <a:r>
-              <a:rPr sz="2400" b="1" dirty="0" err="1">
-                <a:solidFill>
-                  <a:srgbClr val="141820"/>
-                </a:solidFill>
-                <a:latin typeface="Leelawadee UI"/>
-              </a:rPr>
-              <a:t>และบริบท</a:t>
-            </a:r>
-            <a:r>
-              <a:rPr sz="2400" b="1" dirty="0">
-                <a:solidFill>
-                  <a:srgbClr val="141820"/>
-                </a:solidFill>
-                <a:latin typeface="Leelawadee UI"/>
-              </a:rPr>
-              <a:t> SOTA</a:t>
-            </a:r>
-          </a:p>
-        </p:txBody>
-      </p:sp>
-      <p:sp>
-        <p:nvSpPr>
-          <p:cNvPr id="3" name="Rectangle 2"/>
-          <p:cNvSpPr/>
-          <p:nvPr/>
-        </p:nvSpPr>
-        <p:spPr>
-          <a:xfrm>
-            <a:off x="548640" y="1060704"/>
-            <a:ext cx="2103120" cy="54864"/>
-          </a:xfrm>
-          <a:prstGeom prst="rect">
-            <a:avLst/>
-          </a:prstGeom>
-          <a:solidFill>
-            <a:srgbClr val="006D77"/>
-          </a:solidFill>
-          <a:ln>
-            <a:noFill/>
-          </a:ln>
-        </p:spPr>
-        <p:style>
-          <a:lnRef idx="1">
-            <a:schemeClr val="accent1"/>
-          </a:lnRef>
-          <a:fillRef idx="3">
-            <a:schemeClr val="accent1"/>
-          </a:fillRef>
-          <a:effectRef idx="2">
-            <a:schemeClr val="accent1"/>
-          </a:effectRef>
-          <a:fontRef idx="minor">
-            <a:schemeClr val="lt1"/>
-          </a:fontRef>
-        </p:style>
-        <p:txBody>
-          <a:bodyPr rtlCol="0" anchor="ctr"/>
-          <a:lstStyle/>
-          <a:p>
-            <a:pPr algn="ctr"/>
-            <a:endParaRPr/>
-          </a:p>
-        </p:txBody>
-      </p:sp>
-      <p:graphicFrame>
-        <p:nvGraphicFramePr>
-          <p:cNvPr id="4" name="Table 3"/>
-          <p:cNvGraphicFramePr>
-            <a:graphicFrameLocks noGrp="1"/>
-          </p:cNvGraphicFramePr>
-          <p:nvPr/>
-        </p:nvGraphicFramePr>
-        <p:xfrm>
-          <a:off x="685800" y="1737360"/>
-          <a:ext cx="10881360" cy="2194560"/>
-        </p:xfrm>
-        <a:graphic>
-          <a:graphicData uri="http://schemas.openxmlformats.org/drawingml/2006/table">
-            <a:tbl>
-              <a:tblPr firstRow="1" bandRow="1">
-                <a:tableStyleId>{5C22544A-7EE6-4342-B048-85BDC9FD1C3A}</a:tableStyleId>
-              </a:tblPr>
-              <a:tblGrid>
-                <a:gridCol w="2720340">
-                  <a:extLst>
-                    <a:ext uri="{9D8B030D-6E8A-4147-A177-3AD203B41FA5}">
-                      <a16:colId xmlns:a16="http://schemas.microsoft.com/office/drawing/2014/main" val="20000"/>
-                    </a:ext>
-                  </a:extLst>
-                </a:gridCol>
-                <a:gridCol w="2720340">
-                  <a:extLst>
-                    <a:ext uri="{9D8B030D-6E8A-4147-A177-3AD203B41FA5}">
-                      <a16:colId xmlns:a16="http://schemas.microsoft.com/office/drawing/2014/main" val="20001"/>
-                    </a:ext>
-                  </a:extLst>
-                </a:gridCol>
-                <a:gridCol w="2720340">
-                  <a:extLst>
-                    <a:ext uri="{9D8B030D-6E8A-4147-A177-3AD203B41FA5}">
-                      <a16:colId xmlns:a16="http://schemas.microsoft.com/office/drawing/2014/main" val="20002"/>
-                    </a:ext>
-                  </a:extLst>
-                </a:gridCol>
-                <a:gridCol w="2720340">
-                  <a:extLst>
-                    <a:ext uri="{9D8B030D-6E8A-4147-A177-3AD203B41FA5}">
-                      <a16:colId xmlns:a16="http://schemas.microsoft.com/office/drawing/2014/main" val="20003"/>
-                    </a:ext>
-                  </a:extLst>
-                </a:gridCol>
-              </a:tblGrid>
-              <a:tr h="548640">
-                <a:tc>
-                  <a:txBody>
-                    <a:bodyPr/>
-                    <a:lstStyle/>
-                    <a:p>
-                      <a:pPr algn="ctr"/>
-                      <a:r>
-                        <a:rPr sz="1100" b="1">
-                          <a:solidFill>
-                            <a:srgbClr val="141820"/>
-                          </a:solidFill>
-                          <a:latin typeface="Leelawadee UI"/>
-                        </a:rPr>
-                        <a:t>วิธี</a:t>
-                      </a:r>
-                    </a:p>
-                  </a:txBody>
-                  <a:tcPr>
-                    <a:solidFill>
-                      <a:srgbClr val="E8F8F9"/>
-                    </a:solidFill>
-                  </a:tcPr>
-                </a:tc>
-                <a:tc>
-                  <a:txBody>
-                    <a:bodyPr/>
-                    <a:lstStyle/>
-                    <a:p>
-                      <a:pPr algn="ctr"/>
-                      <a:r>
-                        <a:rPr sz="1100" b="1">
-                          <a:solidFill>
-                            <a:srgbClr val="141820"/>
-                          </a:solidFill>
-                          <a:latin typeface="Leelawadee UI"/>
-                        </a:rPr>
-                        <a:t>แนวคิดหลัก</a:t>
-                      </a:r>
-                    </a:p>
-                  </a:txBody>
-                  <a:tcPr>
-                    <a:solidFill>
-                      <a:srgbClr val="E8F8F9"/>
-                    </a:solidFill>
-                  </a:tcPr>
-                </a:tc>
-                <a:tc>
-                  <a:txBody>
-                    <a:bodyPr/>
-                    <a:lstStyle/>
-                    <a:p>
-                      <a:pPr algn="ctr"/>
-                      <a:r>
-                        <a:rPr sz="1100" b="1">
-                          <a:solidFill>
-                            <a:srgbClr val="141820"/>
-                          </a:solidFill>
-                          <a:latin typeface="Leelawadee UI"/>
-                        </a:rPr>
-                        <a:t>จุดเด่น</a:t>
-                      </a:r>
-                    </a:p>
-                  </a:txBody>
-                  <a:tcPr>
-                    <a:solidFill>
-                      <a:srgbClr val="E8F8F9"/>
-                    </a:solidFill>
-                  </a:tcPr>
-                </a:tc>
-                <a:tc>
-                  <a:txBody>
-                    <a:bodyPr/>
-                    <a:lstStyle/>
-                    <a:p>
-                      <a:pPr algn="ctr"/>
-                      <a:r>
-                        <a:rPr sz="1100" b="1">
-                          <a:solidFill>
-                            <a:srgbClr val="141820"/>
-                          </a:solidFill>
-                          <a:latin typeface="Leelawadee UI"/>
-                        </a:rPr>
-                        <a:t>ข้อจำกัด</a:t>
-                      </a:r>
-                    </a:p>
-                  </a:txBody>
-                  <a:tcPr>
-                    <a:solidFill>
-                      <a:srgbClr val="E8F8F9"/>
-                    </a:solidFill>
-                  </a:tcPr>
-                </a:tc>
-                <a:extLst>
-                  <a:ext uri="{0D108BD9-81ED-4DB2-BD59-A6C34878D82A}">
-                    <a16:rowId xmlns:a16="http://schemas.microsoft.com/office/drawing/2014/main" val="10000"/>
-                  </a:ext>
-                </a:extLst>
-              </a:tr>
-              <a:tr h="548640">
-                <a:tc>
-                  <a:txBody>
-                    <a:bodyPr/>
-                    <a:lstStyle/>
-                    <a:p>
-                      <a:pPr algn="ctr"/>
-                      <a:r>
-                        <a:rPr sz="1100" b="0">
-                          <a:solidFill>
-                            <a:srgbClr val="323A46"/>
-                          </a:solidFill>
-                          <a:latin typeface="Leelawadee UI"/>
-                        </a:rPr>
-                        <a:t>Baseline</a:t>
-                      </a:r>
-                    </a:p>
-                  </a:txBody>
-                  <a:tcPr>
-                    <a:solidFill>
-                      <a:srgbClr val="FFFFFF"/>
-                    </a:solidFill>
-                  </a:tcPr>
-                </a:tc>
-                <a:tc>
-                  <a:txBody>
-                    <a:bodyPr/>
-                    <a:lstStyle/>
-                    <a:p>
-                      <a:pPr algn="ctr"/>
-                      <a:r>
-                        <a:rPr sz="1100" b="0">
-                          <a:solidFill>
-                            <a:srgbClr val="323A46"/>
-                          </a:solidFill>
-                          <a:latin typeface="Leelawadee UI"/>
-                        </a:rPr>
-                        <a:t>ใช้ elbow angle + threshold นับตรง ๆ</a:t>
-                      </a:r>
-                    </a:p>
-                  </a:txBody>
-                  <a:tcPr>
-                    <a:solidFill>
-                      <a:srgbClr val="FFFFFF"/>
-                    </a:solidFill>
-                  </a:tcPr>
-                </a:tc>
-                <a:tc>
-                  <a:txBody>
-                    <a:bodyPr/>
-                    <a:lstStyle/>
-                    <a:p>
-                      <a:pPr algn="ctr"/>
-                      <a:r>
-                        <a:rPr sz="1100" b="0">
-                          <a:solidFill>
-                            <a:srgbClr val="323A46"/>
-                          </a:solidFill>
-                          <a:latin typeface="Leelawadee UI"/>
-                        </a:rPr>
-                        <a:t>ง่ายและ deterministic</a:t>
-                      </a:r>
-                    </a:p>
-                  </a:txBody>
-                  <a:tcPr>
-                    <a:solidFill>
-                      <a:srgbClr val="FFFFFF"/>
-                    </a:solidFill>
-                  </a:tcPr>
-                </a:tc>
-                <a:tc>
-                  <a:txBody>
-                    <a:bodyPr/>
-                    <a:lstStyle/>
-                    <a:p>
-                      <a:pPr algn="ctr"/>
-                      <a:r>
-                        <a:rPr sz="1100" b="0">
-                          <a:solidFill>
-                            <a:srgbClr val="323A46"/>
-                          </a:solidFill>
-                          <a:latin typeface="Leelawadee UI"/>
-                        </a:rPr>
-                        <a:t>เปราะกับ jitter และ occlusion</a:t>
-                      </a:r>
-                    </a:p>
-                  </a:txBody>
-                  <a:tcPr>
-                    <a:solidFill>
-                      <a:srgbClr val="FFFFFF"/>
-                    </a:solidFill>
-                  </a:tcPr>
-                </a:tc>
-                <a:extLst>
-                  <a:ext uri="{0D108BD9-81ED-4DB2-BD59-A6C34878D82A}">
-                    <a16:rowId xmlns:a16="http://schemas.microsoft.com/office/drawing/2014/main" val="10001"/>
-                  </a:ext>
-                </a:extLst>
-              </a:tr>
-              <a:tr h="548640">
-                <a:tc>
-                  <a:txBody>
-                    <a:bodyPr/>
-                    <a:lstStyle/>
-                    <a:p>
-                      <a:pPr algn="ctr"/>
-                      <a:r>
-                        <a:rPr sz="1100" b="0">
-                          <a:solidFill>
-                            <a:srgbClr val="323A46"/>
-                          </a:solidFill>
-                          <a:latin typeface="Leelawadee UI"/>
-                        </a:rPr>
-                        <a:t>Proposed</a:t>
-                      </a:r>
-                    </a:p>
-                  </a:txBody>
-                  <a:tcPr>
-                    <a:solidFill>
-                      <a:srgbClr val="FFFFFF"/>
-                    </a:solidFill>
-                  </a:tcPr>
-                </a:tc>
-                <a:tc>
-                  <a:txBody>
-                    <a:bodyPr/>
-                    <a:lstStyle/>
-                    <a:p>
-                      <a:pPr algn="ctr"/>
-                      <a:r>
-                        <a:rPr sz="1100" b="0">
-                          <a:solidFill>
-                            <a:srgbClr val="323A46"/>
-                          </a:solidFill>
-                          <a:latin typeface="Leelawadee UI"/>
-                        </a:rPr>
-                        <a:t>เพิ่ม confidence-aware side lock + EMA smoothing</a:t>
-                      </a:r>
-                    </a:p>
-                  </a:txBody>
-                  <a:tcPr>
-                    <a:solidFill>
-                      <a:srgbClr val="FFFFFF"/>
-                    </a:solidFill>
-                  </a:tcPr>
-                </a:tc>
-                <a:tc>
-                  <a:txBody>
-                    <a:bodyPr/>
-                    <a:lstStyle/>
-                    <a:p>
-                      <a:pPr algn="ctr"/>
-                      <a:r>
-                        <a:rPr sz="1100" b="0">
-                          <a:solidFill>
-                            <a:srgbClr val="323A46"/>
-                          </a:solidFill>
-                          <a:latin typeface="Leelawadee UI"/>
-                        </a:rPr>
-                        <a:t>นิ่งขึ้นและ benchmark เร็วกว่า</a:t>
-                      </a:r>
-                    </a:p>
-                  </a:txBody>
-                  <a:tcPr>
-                    <a:solidFill>
-                      <a:srgbClr val="FFFFFF"/>
-                    </a:solidFill>
-                  </a:tcPr>
-                </a:tc>
-                <a:tc>
-                  <a:txBody>
-                    <a:bodyPr/>
-                    <a:lstStyle/>
-                    <a:p>
-                      <a:pPr algn="ctr"/>
-                      <a:r>
-                        <a:rPr sz="1100" b="0">
-                          <a:solidFill>
-                            <a:srgbClr val="323A46"/>
-                          </a:solidFill>
-                          <a:latin typeface="Leelawadee UI"/>
-                        </a:rPr>
-                        <a:t>ยังเป็น handcrafted method</a:t>
-                      </a:r>
-                    </a:p>
-                  </a:txBody>
-                  <a:tcPr>
-                    <a:solidFill>
-                      <a:srgbClr val="FFFFFF"/>
-                    </a:solidFill>
-                  </a:tcPr>
-                </a:tc>
-                <a:extLst>
-                  <a:ext uri="{0D108BD9-81ED-4DB2-BD59-A6C34878D82A}">
-                    <a16:rowId xmlns:a16="http://schemas.microsoft.com/office/drawing/2014/main" val="10002"/>
-                  </a:ext>
-                </a:extLst>
-              </a:tr>
-              <a:tr h="548640">
-                <a:tc>
-                  <a:txBody>
-                    <a:bodyPr/>
-                    <a:lstStyle/>
-                    <a:p>
-                      <a:pPr algn="ctr"/>
-                      <a:r>
-                        <a:rPr sz="1100" b="0">
-                          <a:solidFill>
-                            <a:srgbClr val="323A46"/>
-                          </a:solidFill>
-                          <a:latin typeface="Leelawadee UI"/>
-                        </a:rPr>
-                        <a:t>SOTA context</a:t>
-                      </a:r>
-                    </a:p>
-                  </a:txBody>
-                  <a:tcPr>
-                    <a:solidFill>
-                      <a:srgbClr val="FFFFFF"/>
-                    </a:solidFill>
-                  </a:tcPr>
-                </a:tc>
-                <a:tc>
-                  <a:txBody>
-                    <a:bodyPr/>
-                    <a:lstStyle/>
-                    <a:p>
-                      <a:pPr algn="ctr"/>
-                      <a:r>
-                        <a:rPr sz="1100" b="0">
-                          <a:solidFill>
-                            <a:srgbClr val="323A46"/>
-                          </a:solidFill>
-                          <a:latin typeface="Leelawadee UI"/>
-                        </a:rPr>
-                        <a:t>โมเดล temporal neural / action model</a:t>
-                      </a:r>
-                    </a:p>
-                  </a:txBody>
-                  <a:tcPr>
-                    <a:solidFill>
-                      <a:srgbClr val="FFFFFF"/>
-                    </a:solidFill>
-                  </a:tcPr>
-                </a:tc>
-                <a:tc>
-                  <a:txBody>
-                    <a:bodyPr/>
-                    <a:lstStyle/>
-                    <a:p>
-                      <a:pPr algn="ctr"/>
-                      <a:r>
-                        <a:rPr sz="1100" b="0">
-                          <a:solidFill>
-                            <a:srgbClr val="323A46"/>
-                          </a:solidFill>
-                          <a:latin typeface="Leelawadee UI"/>
-                        </a:rPr>
-                        <a:t>จับ sequence context ได้มากกว่า</a:t>
-                      </a:r>
-                    </a:p>
-                  </a:txBody>
-                  <a:tcPr>
-                    <a:solidFill>
-                      <a:srgbClr val="FFFFFF"/>
-                    </a:solidFill>
-                  </a:tcPr>
-                </a:tc>
-                <a:tc>
-                  <a:txBody>
-                    <a:bodyPr/>
-                    <a:lstStyle/>
-                    <a:p>
-                      <a:pPr algn="ctr"/>
-                      <a:r>
-                        <a:rPr sz="1100" b="0" dirty="0" err="1">
-                          <a:solidFill>
-                            <a:srgbClr val="323A46"/>
-                          </a:solidFill>
-                          <a:latin typeface="Leelawadee UI"/>
-                        </a:rPr>
-                        <a:t>ใช้</a:t>
-                      </a:r>
-                      <a:r>
-                        <a:rPr sz="1100" b="0" dirty="0">
-                          <a:solidFill>
-                            <a:srgbClr val="323A46"/>
-                          </a:solidFill>
-                          <a:latin typeface="Leelawadee UI"/>
-                        </a:rPr>
-                        <a:t> compute </a:t>
-                      </a:r>
-                      <a:r>
-                        <a:rPr sz="1100" b="0" dirty="0" err="1">
-                          <a:solidFill>
-                            <a:srgbClr val="323A46"/>
-                          </a:solidFill>
-                          <a:latin typeface="Leelawadee UI"/>
-                        </a:rPr>
-                        <a:t>สูงและอธิบายยากกว่า</a:t>
-                      </a:r>
-                      <a:endParaRPr sz="1100" b="0" dirty="0">
-                        <a:solidFill>
-                          <a:srgbClr val="323A46"/>
-                        </a:solidFill>
-                        <a:latin typeface="Leelawadee UI"/>
-                      </a:endParaRPr>
-                    </a:p>
-                  </a:txBody>
-                  <a:tcPr>
-                    <a:solidFill>
-                      <a:srgbClr val="FFFFFF"/>
-                    </a:solidFill>
-                  </a:tcPr>
-                </a:tc>
-                <a:extLst>
-                  <a:ext uri="{0D108BD9-81ED-4DB2-BD59-A6C34878D82A}">
-                    <a16:rowId xmlns:a16="http://schemas.microsoft.com/office/drawing/2014/main" val="10003"/>
-                  </a:ext>
-                </a:extLst>
-              </a:tr>
-            </a:tbl>
-          </a:graphicData>
-        </a:graphic>
-      </p:graphicFrame>
-      <p:sp>
-        <p:nvSpPr>
-          <p:cNvPr id="5" name="TextBox 4"/>
-          <p:cNvSpPr txBox="1"/>
-          <p:nvPr/>
-        </p:nvSpPr>
-        <p:spPr>
-          <a:xfrm>
-            <a:off x="822960" y="4343400"/>
-            <a:ext cx="10058400" cy="1645920"/>
-          </a:xfrm>
-          <a:prstGeom prst="rect">
-            <a:avLst/>
-          </a:prstGeom>
-          <a:noFill/>
-        </p:spPr>
-        <p:txBody>
-          <a:bodyPr wrap="square" lIns="0">
-            <a:spAutoFit/>
-          </a:bodyPr>
-          <a:lstStyle/>
-          <a:p>
-            <a:pPr>
-              <a:spcAft>
-                <a:spcPts val="800"/>
-              </a:spcAft>
-              <a:defRPr sz="1700">
-                <a:solidFill>
-                  <a:srgbClr val="323A46"/>
-                </a:solidFill>
-                <a:latin typeface="Leelawadee UI"/>
-              </a:defRPr>
-            </a:pPr>
-            <a:r>
-              <a:t>ทั้ง baseline และ proposed ใช้ input/output แบบเดียวกัน จึงเปรียบเทียบกันได้ยุติธรรม</a:t>
-            </a:r>
-          </a:p>
-          <a:p>
-            <a:pPr>
-              <a:spcAft>
-                <a:spcPts val="800"/>
-              </a:spcAft>
-              <a:defRPr sz="1700">
-                <a:solidFill>
-                  <a:srgbClr val="323A46"/>
-                </a:solidFill>
-                <a:latin typeface="Leelawadee UI"/>
-              </a:defRPr>
-            </a:pPr>
-            <a:r>
-              <a:t>งานนี้ไม่ได้อ้างว่าเหนือกว่า SOTA แต่แสดง improvement ที่วัดซ้ำได้จริงเหนือ baseline</a:t>
-            </a:r>
-          </a:p>
-          <a:p>
-            <a:pPr>
-              <a:spcAft>
-                <a:spcPts val="800"/>
-              </a:spcAft>
-              <a:defRPr sz="1700">
-                <a:solidFill>
-                  <a:srgbClr val="323A46"/>
-                </a:solidFill>
-                <a:latin typeface="Leelawadee UI"/>
-              </a:defRPr>
-            </a:pPr>
-            <a:r>
-              <a:t>จุดเน้นของ proposed คือคุณค่าทางวิศวกรรม: เสถียรขึ้นโดยยังอธิบายการทำงานได้ง่าย</a:t>
-            </a:r>
-          </a:p>
-        </p:txBody>
-      </p:sp>
-    </p:spTree>
-  </p:cSld>
-  <p:clrMapOvr>
-    <a:masterClrMapping/>
-  </p:clrMapOvr>
-</p:sld>
-</file>
-
-<file path=ppt/slides/slide5.xml><?xml version="1.0" encoding="utf-8"?>
-<p:sld xmlns:a="http://schemas.openxmlformats.org/drawingml/2006/main" xmlns:r="http://schemas.openxmlformats.org/officeDocument/2006/relationships" xmlns:p="http://schemas.openxmlformats.org/presentationml/2006/main">
-  <p:cSld>
-    <p:bg>
-      <p:bgPr>
-        <a:solidFill>
-          <a:srgbClr val="FFFFFF"/>
-        </a:solidFill>
-        <a:effectLst/>
-      </p:bgPr>
-    </p:bg>
-    <p:spTree>
-      <p:nvGrpSpPr>
-        <p:cNvPr id="1" name=""/>
-        <p:cNvGrpSpPr/>
-        <p:nvPr/>
-      </p:nvGrpSpPr>
-      <p:grpSpPr>
-        <a:xfrm>
-          <a:off x="0" y="0"/>
-          <a:ext cx="0" cy="0"/>
-          <a:chOff x="0" y="0"/>
-          <a:chExt cx="0" cy="0"/>
-        </a:xfrm>
-      </p:grpSpPr>
-      <p:sp>
-        <p:nvSpPr>
-          <p:cNvPr id="2" name="TextBox 1"/>
-          <p:cNvSpPr txBox="1"/>
-          <p:nvPr/>
-        </p:nvSpPr>
-        <p:spPr>
-          <a:xfrm>
-            <a:off x="548640" y="365760"/>
-            <a:ext cx="10972800" cy="731520"/>
-          </a:xfrm>
-          <a:prstGeom prst="rect">
-            <a:avLst/>
-          </a:prstGeom>
-          <a:noFill/>
-        </p:spPr>
-        <p:txBody>
-          <a:bodyPr wrap="none">
-            <a:spAutoFit/>
-          </a:bodyPr>
-          <a:lstStyle/>
-          <a:p>
-            <a:r>
-              <a:rPr sz="2400" b="1">
-                <a:solidFill>
-                  <a:srgbClr val="141820"/>
-                </a:solidFill>
-                <a:latin typeface="Leelawadee UI"/>
-              </a:rPr>
-              <a:t>แนวคิดของวิธี Proposed และ Workflow</a:t>
-            </a:r>
-          </a:p>
-        </p:txBody>
-      </p:sp>
-      <p:sp>
-        <p:nvSpPr>
-          <p:cNvPr id="3" name="Rectangle 2"/>
-          <p:cNvSpPr/>
-          <p:nvPr/>
-        </p:nvSpPr>
-        <p:spPr>
-          <a:xfrm>
-            <a:off x="548640" y="1060704"/>
-            <a:ext cx="2103120" cy="54864"/>
-          </a:xfrm>
-          <a:prstGeom prst="rect">
-            <a:avLst/>
-          </a:prstGeom>
-          <a:solidFill>
-            <a:srgbClr val="006D77"/>
-          </a:solidFill>
-          <a:ln>
-            <a:noFill/>
-          </a:ln>
-        </p:spPr>
-        <p:style>
-          <a:lnRef idx="1">
-            <a:schemeClr val="accent1"/>
-          </a:lnRef>
-          <a:fillRef idx="3">
-            <a:schemeClr val="accent1"/>
-          </a:fillRef>
-          <a:effectRef idx="2">
-            <a:schemeClr val="accent1"/>
-          </a:effectRef>
-          <a:fontRef idx="minor">
-            <a:schemeClr val="lt1"/>
-          </a:fontRef>
-        </p:style>
-        <p:txBody>
-          <a:bodyPr rtlCol="0" anchor="ctr"/>
-          <a:lstStyle/>
-          <a:p>
-            <a:pPr algn="ctr"/>
-            <a:endParaRPr/>
-          </a:p>
-        </p:txBody>
-      </p:sp>
-      <p:sp>
-        <p:nvSpPr>
-          <p:cNvPr id="5" name="TextBox 4"/>
-          <p:cNvSpPr txBox="1"/>
-          <p:nvPr/>
-        </p:nvSpPr>
-        <p:spPr>
-          <a:xfrm>
-            <a:off x="777240" y="1783080"/>
-            <a:ext cx="5029200" cy="3291840"/>
-          </a:xfrm>
-          <a:prstGeom prst="rect">
-            <a:avLst/>
-          </a:prstGeom>
-          <a:noFill/>
-        </p:spPr>
-        <p:txBody>
-          <a:bodyPr wrap="square" lIns="0">
-            <a:spAutoFit/>
-          </a:bodyPr>
-          <a:lstStyle/>
-          <a:p>
-            <a:pPr>
-              <a:spcAft>
-                <a:spcPts val="800"/>
-              </a:spcAft>
-              <a:defRPr sz="1800">
-                <a:solidFill>
-                  <a:srgbClr val="323A46"/>
-                </a:solidFill>
-                <a:latin typeface="Leelawadee UI"/>
-              </a:defRPr>
-            </a:pPr>
-            <a:r>
-              <a:rPr dirty="0" err="1"/>
-              <a:t>คำนวณ</a:t>
-            </a:r>
-            <a:r>
-              <a:rPr dirty="0"/>
-              <a:t> confidence </a:t>
-            </a:r>
-            <a:r>
-              <a:rPr dirty="0" err="1"/>
-              <a:t>ของแขนซ้าย</a:t>
-            </a:r>
-            <a:r>
-              <a:rPr dirty="0"/>
-              <a:t>/</a:t>
-            </a:r>
-            <a:r>
-              <a:rPr dirty="0" err="1"/>
-              <a:t>ขวาจาก</a:t>
-            </a:r>
-            <a:r>
-              <a:rPr dirty="0"/>
-              <a:t> visibility </a:t>
-            </a:r>
-            <a:r>
-              <a:rPr dirty="0" err="1"/>
-              <a:t>และตำแหน่งบนหน้าจอ</a:t>
-            </a:r>
-            <a:endParaRPr dirty="0"/>
-          </a:p>
-          <a:p>
-            <a:pPr>
-              <a:spcAft>
-                <a:spcPts val="800"/>
-              </a:spcAft>
-              <a:defRPr sz="1800">
-                <a:solidFill>
-                  <a:srgbClr val="323A46"/>
-                </a:solidFill>
-                <a:latin typeface="Leelawadee UI"/>
-              </a:defRPr>
-            </a:pPr>
-            <a:r>
-              <a:rPr dirty="0" err="1"/>
-              <a:t>ถ้าแขนที่</a:t>
-            </a:r>
-            <a:r>
-              <a:rPr dirty="0"/>
-              <a:t> lock </a:t>
-            </a:r>
-            <a:r>
-              <a:rPr dirty="0" err="1"/>
-              <a:t>ไว้ยังน่าเชื่อถือ</a:t>
-            </a:r>
-            <a:r>
-              <a:rPr dirty="0"/>
-              <a:t> </a:t>
-            </a:r>
-            <a:r>
-              <a:rPr dirty="0" err="1"/>
-              <a:t>ให้ใช้แขนนั้นต่อเพื่อลด</a:t>
-            </a:r>
-            <a:r>
-              <a:rPr dirty="0"/>
-              <a:t> arm flapping</a:t>
-            </a:r>
-          </a:p>
-          <a:p>
-            <a:pPr>
-              <a:spcAft>
-                <a:spcPts val="800"/>
-              </a:spcAft>
-              <a:defRPr sz="1800">
-                <a:solidFill>
-                  <a:srgbClr val="323A46"/>
-                </a:solidFill>
-                <a:latin typeface="Leelawadee UI"/>
-              </a:defRPr>
-            </a:pPr>
-            <a:r>
-              <a:rPr dirty="0" err="1"/>
-              <a:t>ใช้</a:t>
-            </a:r>
-            <a:r>
-              <a:rPr dirty="0"/>
-              <a:t> exponential moving average </a:t>
-            </a:r>
-            <a:r>
-              <a:rPr dirty="0" err="1"/>
-              <a:t>เพื่อลด</a:t>
-            </a:r>
-            <a:r>
-              <a:rPr dirty="0"/>
-              <a:t> noise </a:t>
-            </a:r>
-            <a:r>
-              <a:rPr dirty="0" err="1"/>
-              <a:t>ของ</a:t>
-            </a:r>
-            <a:r>
-              <a:rPr dirty="0"/>
-              <a:t> elbow angle</a:t>
-            </a:r>
-          </a:p>
-          <a:p>
-            <a:pPr>
-              <a:spcAft>
-                <a:spcPts val="800"/>
-              </a:spcAft>
-              <a:defRPr sz="1800">
-                <a:solidFill>
-                  <a:srgbClr val="323A46"/>
-                </a:solidFill>
-                <a:latin typeface="Leelawadee UI"/>
-              </a:defRPr>
-            </a:pPr>
-            <a:r>
-              <a:rPr dirty="0" err="1"/>
-              <a:t>ใช้</a:t>
-            </a:r>
-            <a:r>
-              <a:rPr dirty="0"/>
-              <a:t> hysteresis thresholds </a:t>
-            </a:r>
-            <a:r>
-              <a:rPr dirty="0" err="1"/>
-              <a:t>เพื่อตัดสิน</a:t>
-            </a:r>
-            <a:r>
-              <a:rPr dirty="0"/>
-              <a:t> stage </a:t>
-            </a:r>
-            <a:r>
-              <a:rPr dirty="0" err="1"/>
-              <a:t>และนับ</a:t>
-            </a:r>
-            <a:r>
-              <a:rPr dirty="0"/>
-              <a:t> repetition</a:t>
-            </a:r>
-          </a:p>
-          <a:p>
-            <a:pPr>
-              <a:spcAft>
-                <a:spcPts val="800"/>
-              </a:spcAft>
-              <a:defRPr sz="1800">
-                <a:solidFill>
-                  <a:srgbClr val="323A46"/>
-                </a:solidFill>
-                <a:latin typeface="Leelawadee UI"/>
-              </a:defRPr>
-            </a:pPr>
-            <a:r>
-              <a:rPr dirty="0" err="1"/>
-              <a:t>ให้</a:t>
-            </a:r>
-            <a:r>
-              <a:rPr dirty="0"/>
-              <a:t> output </a:t>
-            </a:r>
-            <a:r>
-              <a:rPr dirty="0" err="1"/>
-              <a:t>แบบเดียวกับ</a:t>
-            </a:r>
-            <a:r>
-              <a:rPr dirty="0"/>
-              <a:t> baseline: count, stage, angle </a:t>
-            </a:r>
-            <a:r>
-              <a:rPr dirty="0" err="1"/>
-              <a:t>และ</a:t>
-            </a:r>
-            <a:r>
-              <a:rPr dirty="0"/>
-              <a:t> progress</a:t>
-            </a:r>
-          </a:p>
-        </p:txBody>
-      </p:sp>
-      <p:sp>
-        <p:nvSpPr>
-          <p:cNvPr id="6" name="TextBox 5"/>
-          <p:cNvSpPr txBox="1"/>
-          <p:nvPr/>
-        </p:nvSpPr>
-        <p:spPr>
-          <a:xfrm>
-            <a:off x="777240" y="5349240"/>
-            <a:ext cx="10698480" cy="548640"/>
-          </a:xfrm>
-          <a:prstGeom prst="rect">
-            <a:avLst/>
-          </a:prstGeom>
-          <a:noFill/>
-        </p:spPr>
-        <p:txBody>
-          <a:bodyPr wrap="square" anchor="t">
-            <a:spAutoFit/>
-          </a:bodyPr>
-          <a:lstStyle/>
-          <a:p>
-            <a:r>
-              <a:rPr sz="1600" b="0">
-                <a:solidFill>
-                  <a:srgbClr val="687484"/>
-                </a:solidFill>
-                <a:latin typeface="Leelawadee UI"/>
-              </a:rPr>
-              <a:t>Complexity: ทั้ง baseline และ proposed เป็น O(1) time และ O(1) memory ต่อเฟรม ความต่างอยู่ที่การจัดการ state ให้เสถียรกว่าเดิม</a:t>
-            </a:r>
-          </a:p>
-        </p:txBody>
-      </p:sp>
-    </p:spTree>
-  </p:cSld>
-  <p:clrMapOvr>
-    <a:masterClrMapping/>
-  </p:clrMapOvr>
-</p:sld>
-</file>
-
-<file path=ppt/slides/slide6.xml><?xml version="1.0" encoding="utf-8"?>
-<p:sld xmlns:a="http://schemas.openxmlformats.org/drawingml/2006/main" xmlns:r="http://schemas.openxmlformats.org/officeDocument/2006/relationships" xmlns:p="http://schemas.openxmlformats.org/presentationml/2006/main">
-  <p:cSld>
-    <p:spTree>
-      <p:nvGrpSpPr>
-        <p:cNvPr id="1" name=""/>
-        <p:cNvGrpSpPr/>
-        <p:nvPr/>
-      </p:nvGrpSpPr>
-      <p:grpSpPr>
-        <a:xfrm>
-          <a:off x="0" y="0"/>
-          <a:ext cx="0" cy="0"/>
-          <a:chOff x="0" y="0"/>
-          <a:chExt cx="0" cy="0"/>
-        </a:xfrm>
-      </p:grpSpPr>
-      <p:pic>
-        <p:nvPicPr>
-          <p:cNvPr id="4" name="Picture 3" descr="workflow.png"/>
-          <p:cNvPicPr>
-            <a:picLocks noChangeAspect="1"/>
-          </p:cNvPicPr>
-          <p:nvPr/>
-        </p:nvPicPr>
-        <p:blipFill>
-          <a:blip r:embed="rId2"/>
-          <a:stretch>
-            <a:fillRect/>
-          </a:stretch>
-        </p:blipFill>
-        <p:spPr>
-          <a:xfrm>
-            <a:off x="555170" y="1600200"/>
-            <a:ext cx="10966270" cy="2670048"/>
-          </a:xfrm>
-          <a:prstGeom prst="rect">
-            <a:avLst/>
-          </a:prstGeom>
-        </p:spPr>
-      </p:pic>
-    </p:spTree>
-    <p:extLst>
-      <p:ext uri="{BB962C8B-B14F-4D97-AF65-F5344CB8AC3E}">
-        <p14:creationId xmlns:p14="http://schemas.microsoft.com/office/powerpoint/2010/main" val="2798971267"/>
-      </p:ext>
-    </p:extLst>
-  </p:cSld>
-  <p:clrMapOvr>
-    <a:masterClrMapping/>
-  </p:clrMapOvr>
-</p:sld>
-</file>
-
-<file path=ppt/slides/slide7.xml><?xml version="1.0" encoding="utf-8"?>
-<p:sld xmlns:a="http://schemas.openxmlformats.org/drawingml/2006/main" xmlns:r="http://schemas.openxmlformats.org/officeDocument/2006/relationships" xmlns:p="http://schemas.openxmlformats.org/presentationml/2006/main">
-  <p:cSld>
-    <p:bg>
-      <p:bgPr>
-        <a:solidFill>
-          <a:srgbClr val="FFFFFF"/>
-        </a:solidFill>
-        <a:effectLst/>
-      </p:bgPr>
-    </p:bg>
-    <p:spTree>
-      <p:nvGrpSpPr>
-        <p:cNvPr id="1" name=""/>
-        <p:cNvGrpSpPr/>
-        <p:nvPr/>
-      </p:nvGrpSpPr>
-      <p:grpSpPr>
-        <a:xfrm>
-          <a:off x="0" y="0"/>
-          <a:ext cx="0" cy="0"/>
-          <a:chOff x="0" y="0"/>
-          <a:chExt cx="0" cy="0"/>
-        </a:xfrm>
-      </p:grpSpPr>
-      <p:sp>
-        <p:nvSpPr>
-          <p:cNvPr id="2" name="TextBox 1"/>
-          <p:cNvSpPr txBox="1"/>
-          <p:nvPr/>
-        </p:nvSpPr>
-        <p:spPr>
-          <a:xfrm>
-            <a:off x="548640" y="365760"/>
-            <a:ext cx="10972800" cy="731520"/>
-          </a:xfrm>
-          <a:prstGeom prst="rect">
-            <a:avLst/>
-          </a:prstGeom>
-          <a:noFill/>
-        </p:spPr>
-        <p:txBody>
-          <a:bodyPr wrap="none">
-            <a:spAutoFit/>
-          </a:bodyPr>
-          <a:lstStyle/>
-          <a:p>
-            <a:r>
-              <a:rPr sz="2400" b="1">
-                <a:solidFill>
-                  <a:srgbClr val="141820"/>
-                </a:solidFill>
-                <a:latin typeface="Leelawadee UI"/>
-              </a:rPr>
-              <a:t>รายละเอียดการพัฒนา</a:t>
-            </a:r>
-          </a:p>
-        </p:txBody>
-      </p:sp>
-      <p:sp>
-        <p:nvSpPr>
-          <p:cNvPr id="3" name="Rectangle 2"/>
-          <p:cNvSpPr/>
-          <p:nvPr/>
-        </p:nvSpPr>
-        <p:spPr>
-          <a:xfrm>
-            <a:off x="548640" y="1060704"/>
-            <a:ext cx="2103120" cy="54864"/>
-          </a:xfrm>
-          <a:prstGeom prst="rect">
-            <a:avLst/>
-          </a:prstGeom>
-          <a:solidFill>
-            <a:srgbClr val="006D77"/>
-          </a:solidFill>
-          <a:ln>
-            <a:noFill/>
-          </a:ln>
-        </p:spPr>
-        <p:style>
-          <a:lnRef idx="1">
-            <a:schemeClr val="accent1"/>
-          </a:lnRef>
-          <a:fillRef idx="3">
-            <a:schemeClr val="accent1"/>
-          </a:fillRef>
-          <a:effectRef idx="2">
-            <a:schemeClr val="accent1"/>
-          </a:effectRef>
-          <a:fontRef idx="minor">
-            <a:schemeClr val="lt1"/>
-          </a:fontRef>
-        </p:style>
-        <p:txBody>
-          <a:bodyPr rtlCol="0" anchor="ctr"/>
-          <a:lstStyle/>
-          <a:p>
-            <a:pPr algn="ctr"/>
-            <a:endParaRPr/>
-          </a:p>
-        </p:txBody>
-      </p:sp>
-      <p:sp>
-        <p:nvSpPr>
-          <p:cNvPr id="4" name="TextBox 3"/>
-          <p:cNvSpPr txBox="1"/>
-          <p:nvPr/>
-        </p:nvSpPr>
-        <p:spPr>
-          <a:xfrm>
-            <a:off x="777240" y="1737360"/>
-            <a:ext cx="5486400" cy="2339102"/>
-          </a:xfrm>
-          <a:prstGeom prst="rect">
-            <a:avLst/>
-          </a:prstGeom>
-          <a:noFill/>
-        </p:spPr>
-        <p:txBody>
-          <a:bodyPr wrap="square" lIns="0">
-            <a:spAutoFit/>
-          </a:bodyPr>
-          <a:lstStyle/>
-          <a:p>
-            <a:pPr>
-              <a:spcAft>
-                <a:spcPts val="800"/>
-              </a:spcAft>
-              <a:defRPr sz="1800">
-                <a:solidFill>
-                  <a:srgbClr val="323A46"/>
-                </a:solidFill>
-                <a:latin typeface="Leelawadee UI"/>
-              </a:defRPr>
-            </a:pPr>
-            <a:r>
-              <a:rPr dirty="0" err="1"/>
-              <a:t>ระบบ</a:t>
-            </a:r>
-            <a:r>
-              <a:rPr dirty="0"/>
-              <a:t> live </a:t>
-            </a:r>
-            <a:r>
-              <a:rPr dirty="0" err="1"/>
-              <a:t>ใช้</a:t>
-            </a:r>
-            <a:r>
-              <a:rPr dirty="0"/>
-              <a:t> Flask + OpenCV + </a:t>
-            </a:r>
-            <a:r>
-              <a:rPr dirty="0" err="1"/>
-              <a:t>MediaPipe</a:t>
-            </a:r>
-            <a:r>
-              <a:rPr dirty="0"/>
-              <a:t> + NumPy</a:t>
-            </a:r>
-          </a:p>
-          <a:p>
-            <a:pPr>
-              <a:spcAft>
-                <a:spcPts val="800"/>
-              </a:spcAft>
-              <a:defRPr sz="1800">
-                <a:solidFill>
-                  <a:srgbClr val="323A46"/>
-                </a:solidFill>
-                <a:latin typeface="Leelawadee UI"/>
-              </a:defRPr>
-            </a:pPr>
-            <a:r>
-              <a:rPr dirty="0" err="1"/>
-              <a:t>ส่วน</a:t>
-            </a:r>
-            <a:r>
-              <a:rPr dirty="0"/>
-              <a:t> benchmark </a:t>
-            </a:r>
-            <a:r>
-              <a:rPr dirty="0" err="1"/>
-              <a:t>แยกไว้ใน</a:t>
-            </a:r>
-            <a:r>
-              <a:rPr dirty="0"/>
-              <a:t> `</a:t>
-            </a:r>
-            <a:r>
-              <a:rPr dirty="0" err="1"/>
-              <a:t>src</a:t>
-            </a:r>
-            <a:r>
-              <a:rPr dirty="0"/>
-              <a:t>/algorithms/` </a:t>
-            </a:r>
-            <a:r>
-              <a:rPr dirty="0" err="1"/>
-              <a:t>เพื่อวัด</a:t>
-            </a:r>
-            <a:r>
-              <a:rPr dirty="0"/>
-              <a:t> baseline/proposed </a:t>
-            </a:r>
-            <a:r>
-              <a:rPr dirty="0" err="1"/>
-              <a:t>โดยไม่ต้องเปิดกล้อง</a:t>
-            </a:r>
-            <a:endParaRPr dirty="0"/>
-          </a:p>
-          <a:p>
-            <a:pPr>
-              <a:spcAft>
-                <a:spcPts val="800"/>
-              </a:spcAft>
-              <a:defRPr sz="1800">
-                <a:solidFill>
-                  <a:srgbClr val="323A46"/>
-                </a:solidFill>
-                <a:latin typeface="Leelawadee UI"/>
-              </a:defRPr>
-            </a:pPr>
-            <a:r>
-              <a:rPr dirty="0"/>
-              <a:t>state </a:t>
-            </a:r>
-            <a:r>
-              <a:rPr dirty="0" err="1"/>
-              <a:t>ที่ใช้มี</a:t>
-            </a:r>
-            <a:r>
-              <a:rPr dirty="0"/>
-              <a:t> counter, stage, active side, </a:t>
-            </a:r>
-            <a:r>
-              <a:rPr dirty="0" err="1"/>
-              <a:t>ค่า</a:t>
-            </a:r>
-            <a:r>
-              <a:rPr dirty="0"/>
-              <a:t> EMA </a:t>
-            </a:r>
-            <a:r>
-              <a:rPr dirty="0" err="1"/>
-              <a:t>และ</a:t>
-            </a:r>
-            <a:r>
-              <a:rPr dirty="0"/>
-              <a:t> side-lock timer</a:t>
-            </a:r>
-          </a:p>
-          <a:p>
-            <a:pPr>
-              <a:spcAft>
-                <a:spcPts val="800"/>
-              </a:spcAft>
-              <a:defRPr sz="1800">
-                <a:solidFill>
-                  <a:srgbClr val="323A46"/>
-                </a:solidFill>
-                <a:latin typeface="Leelawadee UI"/>
-              </a:defRPr>
-            </a:pPr>
-            <a:r>
-              <a:rPr dirty="0" err="1"/>
-              <a:t>เพิ่ม</a:t>
-            </a:r>
-            <a:r>
-              <a:rPr dirty="0"/>
-              <a:t> pipeline </a:t>
-            </a:r>
-            <a:r>
-              <a:rPr dirty="0" err="1"/>
-              <a:t>ข้อมูลจริงด้วย</a:t>
-            </a:r>
-            <a:r>
-              <a:rPr dirty="0"/>
-              <a:t> `tools/collect_mocap.py` </a:t>
-            </a:r>
-            <a:r>
-              <a:rPr dirty="0" err="1"/>
-              <a:t>และ</a:t>
-            </a:r>
-            <a:r>
-              <a:rPr dirty="0"/>
-              <a:t> `experiments/evaluate_recorded_sequence.py`</a:t>
-            </a:r>
-          </a:p>
-        </p:txBody>
-      </p:sp>
-      <p:sp>
-        <p:nvSpPr>
-          <p:cNvPr id="5" name="TextBox 4"/>
-          <p:cNvSpPr txBox="1"/>
-          <p:nvPr/>
-        </p:nvSpPr>
-        <p:spPr>
-          <a:xfrm>
-            <a:off x="6446520" y="1737360"/>
-            <a:ext cx="3017520" cy="274320"/>
-          </a:xfrm>
-          <a:prstGeom prst="rect">
-            <a:avLst/>
-          </a:prstGeom>
-          <a:noFill/>
-        </p:spPr>
-        <p:txBody>
-          <a:bodyPr wrap="square" anchor="t">
-            <a:spAutoFit/>
-          </a:bodyPr>
-          <a:lstStyle/>
-          <a:p>
-            <a:r>
-              <a:rPr sz="1800" b="1">
-                <a:solidFill>
-                  <a:srgbClr val="006D77"/>
-                </a:solidFill>
-                <a:latin typeface="Leelawadee UI"/>
-              </a:rPr>
-              <a:t>โครงสร้างไฟล์สำคัญ</a:t>
-            </a:r>
-          </a:p>
-        </p:txBody>
-      </p:sp>
-      <p:sp>
-        <p:nvSpPr>
-          <p:cNvPr id="6" name="TextBox 5"/>
-          <p:cNvSpPr txBox="1"/>
-          <p:nvPr/>
-        </p:nvSpPr>
-        <p:spPr>
-          <a:xfrm>
-            <a:off x="6492240" y="2057400"/>
-            <a:ext cx="4572000" cy="3291840"/>
-          </a:xfrm>
-          <a:prstGeom prst="rect">
-            <a:avLst/>
-          </a:prstGeom>
-          <a:noFill/>
-        </p:spPr>
-        <p:txBody>
-          <a:bodyPr wrap="square" lIns="0">
-            <a:spAutoFit/>
-          </a:bodyPr>
-          <a:lstStyle/>
-          <a:p>
-            <a:pPr>
-              <a:spcAft>
-                <a:spcPts val="800"/>
-              </a:spcAft>
-              <a:defRPr sz="1700">
-                <a:solidFill>
-                  <a:srgbClr val="323A46"/>
-                </a:solidFill>
-                <a:latin typeface="Leelawadee UI"/>
-              </a:defRPr>
-            </a:pPr>
-            <a:r>
-              <a:t>`app.py`, `camera.py`, `exercises/`</a:t>
-            </a:r>
-          </a:p>
-          <a:p>
-            <a:pPr>
-              <a:spcAft>
-                <a:spcPts val="800"/>
-              </a:spcAft>
-              <a:defRPr sz="1700">
-                <a:solidFill>
-                  <a:srgbClr val="323A46"/>
-                </a:solidFill>
-                <a:latin typeface="Leelawadee UI"/>
-              </a:defRPr>
-            </a:pPr>
-            <a:r>
-              <a:t>`src/algorithms/baseline.py`</a:t>
-            </a:r>
-          </a:p>
-          <a:p>
-            <a:pPr>
-              <a:spcAft>
-                <a:spcPts val="800"/>
-              </a:spcAft>
-              <a:defRPr sz="1700">
-                <a:solidFill>
-                  <a:srgbClr val="323A46"/>
-                </a:solidFill>
-                <a:latin typeface="Leelawadee UI"/>
-              </a:defRPr>
-            </a:pPr>
-            <a:r>
-              <a:t>`src/algorithms/proposed.py`</a:t>
-            </a:r>
-          </a:p>
-          <a:p>
-            <a:pPr>
-              <a:spcAft>
-                <a:spcPts val="800"/>
-              </a:spcAft>
-              <a:defRPr sz="1700">
-                <a:solidFill>
-                  <a:srgbClr val="323A46"/>
-                </a:solidFill>
-                <a:latin typeface="Leelawadee UI"/>
-              </a:defRPr>
-            </a:pPr>
-            <a:r>
-              <a:t>`experiments/benchmark.py`</a:t>
-            </a:r>
-          </a:p>
-          <a:p>
-            <a:pPr>
-              <a:spcAft>
-                <a:spcPts val="800"/>
-              </a:spcAft>
-              <a:defRPr sz="1700">
-                <a:solidFill>
-                  <a:srgbClr val="323A46"/>
-                </a:solidFill>
-                <a:latin typeface="Leelawadee UI"/>
-              </a:defRPr>
-            </a:pPr>
-            <a:r>
-              <a:t>`visualization/animate_results.py`</a:t>
-            </a:r>
-          </a:p>
-          <a:p>
-            <a:pPr>
-              <a:spcAft>
-                <a:spcPts val="800"/>
-              </a:spcAft>
-              <a:defRPr sz="1700">
-                <a:solidFill>
-                  <a:srgbClr val="323A46"/>
-                </a:solidFill>
-                <a:latin typeface="Leelawadee UI"/>
-              </a:defRPr>
-            </a:pPr>
-            <a:r>
-              <a:t>`tests/test_simulation.py`</a:t>
-            </a:r>
-          </a:p>
-        </p:txBody>
-      </p:sp>
-    </p:spTree>
-  </p:cSld>
-  <p:clrMapOvr>
-    <a:masterClrMapping/>
-  </p:clrMapOvr>
-</p:sld>
-</file>
-
-<file path=ppt/slides/slide8.xml><?xml version="1.0" encoding="utf-8"?>
-<p:sld xmlns:a="http://schemas.openxmlformats.org/drawingml/2006/main" xmlns:r="http://schemas.openxmlformats.org/officeDocument/2006/relationships" xmlns:p="http://schemas.openxmlformats.org/presentationml/2006/main">
-  <p:cSld>
-    <p:bg>
-      <p:bgPr>
-        <a:solidFill>
-          <a:srgbClr val="FFFFFF"/>
-        </a:solidFill>
-        <a:effectLst/>
-      </p:bgPr>
-    </p:bg>
-    <p:spTree>
-      <p:nvGrpSpPr>
-        <p:cNvPr id="1" name=""/>
-        <p:cNvGrpSpPr/>
-        <p:nvPr/>
-      </p:nvGrpSpPr>
-      <p:grpSpPr>
-        <a:xfrm>
-          <a:off x="0" y="0"/>
-          <a:ext cx="0" cy="0"/>
-          <a:chOff x="0" y="0"/>
-          <a:chExt cx="0" cy="0"/>
-        </a:xfrm>
-      </p:grpSpPr>
-      <p:sp>
-        <p:nvSpPr>
-          <p:cNvPr id="2" name="TextBox 1"/>
-          <p:cNvSpPr txBox="1"/>
-          <p:nvPr/>
-        </p:nvSpPr>
-        <p:spPr>
-          <a:xfrm>
-            <a:off x="548640" y="365760"/>
-            <a:ext cx="10972800" cy="731520"/>
-          </a:xfrm>
-          <a:prstGeom prst="rect">
-            <a:avLst/>
-          </a:prstGeom>
-          <a:noFill/>
-        </p:spPr>
-        <p:txBody>
-          <a:bodyPr wrap="none">
-            <a:spAutoFit/>
-          </a:bodyPr>
-          <a:lstStyle/>
-          <a:p>
-            <a:r>
-              <a:rPr sz="2400" b="1">
-                <a:solidFill>
-                  <a:srgbClr val="141820"/>
-                </a:solidFill>
-                <a:latin typeface="Leelawadee UI"/>
-              </a:rPr>
-              <a:t>Experimental Setup</a:t>
-            </a:r>
-          </a:p>
-        </p:txBody>
-      </p:sp>
-      <p:sp>
-        <p:nvSpPr>
-          <p:cNvPr id="3" name="Rectangle 2"/>
-          <p:cNvSpPr/>
-          <p:nvPr/>
-        </p:nvSpPr>
-        <p:spPr>
-          <a:xfrm>
-            <a:off x="548640" y="1060704"/>
-            <a:ext cx="2103120" cy="54864"/>
-          </a:xfrm>
-          <a:prstGeom prst="rect">
-            <a:avLst/>
-          </a:prstGeom>
-          <a:solidFill>
-            <a:srgbClr val="006D77"/>
-          </a:solidFill>
-          <a:ln>
-            <a:noFill/>
-          </a:ln>
-        </p:spPr>
-        <p:style>
-          <a:lnRef idx="1">
-            <a:schemeClr val="accent1"/>
-          </a:lnRef>
-          <a:fillRef idx="3">
-            <a:schemeClr val="accent1"/>
-          </a:fillRef>
-          <a:effectRef idx="2">
-            <a:schemeClr val="accent1"/>
-          </a:effectRef>
-          <a:fontRef idx="minor">
-            <a:schemeClr val="lt1"/>
-          </a:fontRef>
-        </p:style>
-        <p:txBody>
-          <a:bodyPr rtlCol="0" anchor="ctr"/>
-          <a:lstStyle/>
-          <a:p>
-            <a:pPr algn="ctr"/>
-            <a:endParaRPr/>
-          </a:p>
-        </p:txBody>
-      </p:sp>
-      <p:sp>
-        <p:nvSpPr>
-          <p:cNvPr id="4" name="TextBox 3"/>
-          <p:cNvSpPr txBox="1"/>
-          <p:nvPr/>
-        </p:nvSpPr>
-        <p:spPr>
-          <a:xfrm>
-            <a:off x="777240" y="1783080"/>
-            <a:ext cx="5577840" cy="4206240"/>
-          </a:xfrm>
-          <a:prstGeom prst="rect">
-            <a:avLst/>
-          </a:prstGeom>
-          <a:noFill/>
-        </p:spPr>
-        <p:txBody>
-          <a:bodyPr wrap="square" lIns="0">
-            <a:spAutoFit/>
-          </a:bodyPr>
-          <a:lstStyle/>
-          <a:p>
-            <a:pPr>
-              <a:spcAft>
-                <a:spcPts val="800"/>
-              </a:spcAft>
-              <a:defRPr sz="1800">
-                <a:solidFill>
-                  <a:srgbClr val="323A46"/>
-                </a:solidFill>
-                <a:latin typeface="Leelawadee UI"/>
-              </a:defRPr>
-            </a:pPr>
-            <a:r>
-              <a:rPr dirty="0"/>
-              <a:t>Scaling benchmark </a:t>
-            </a:r>
-            <a:r>
-              <a:rPr dirty="0" err="1"/>
-              <a:t>ใช้ข้อมูลสังเคราะห์</a:t>
-            </a:r>
-            <a:r>
-              <a:rPr dirty="0"/>
-              <a:t> 3 </a:t>
-            </a:r>
-            <a:r>
-              <a:rPr dirty="0" err="1"/>
-              <a:t>ขนาด</a:t>
-            </a:r>
-            <a:r>
-              <a:rPr dirty="0"/>
-              <a:t>: 1k, 10k </a:t>
-            </a:r>
-            <a:r>
-              <a:rPr dirty="0" err="1"/>
-              <a:t>และ</a:t>
-            </a:r>
-            <a:r>
-              <a:rPr dirty="0"/>
-              <a:t> 100k frames</a:t>
-            </a:r>
-          </a:p>
-          <a:p>
-            <a:pPr>
-              <a:spcAft>
-                <a:spcPts val="800"/>
-              </a:spcAft>
-              <a:defRPr sz="1800">
-                <a:solidFill>
-                  <a:srgbClr val="323A46"/>
-                </a:solidFill>
-                <a:latin typeface="Leelawadee UI"/>
-              </a:defRPr>
-            </a:pPr>
-            <a:r>
-              <a:rPr dirty="0" err="1"/>
-              <a:t>ตัวสร้างข้อมูลเพิ่มทั้ง</a:t>
-            </a:r>
-            <a:r>
-              <a:rPr dirty="0"/>
-              <a:t> angle noise </a:t>
-            </a:r>
-            <a:r>
-              <a:rPr dirty="0" err="1"/>
-              <a:t>และ</a:t>
-            </a:r>
-            <a:r>
-              <a:rPr dirty="0"/>
-              <a:t> visibility dropout </a:t>
-            </a:r>
-            <a:r>
-              <a:rPr dirty="0" err="1"/>
-              <a:t>เพื่อทดสอบ</a:t>
-            </a:r>
-            <a:r>
-              <a:rPr dirty="0"/>
-              <a:t> temporal robustness</a:t>
-            </a:r>
-          </a:p>
-          <a:p>
-            <a:pPr>
-              <a:spcAft>
-                <a:spcPts val="800"/>
-              </a:spcAft>
-              <a:defRPr sz="1800">
-                <a:solidFill>
-                  <a:srgbClr val="323A46"/>
-                </a:solidFill>
-                <a:latin typeface="Leelawadee UI"/>
-              </a:defRPr>
-            </a:pPr>
-            <a:r>
-              <a:rPr dirty="0" err="1"/>
-              <a:t>ข้อมูลจริงรองรับผ่านการอัด</a:t>
-            </a:r>
-            <a:r>
-              <a:rPr dirty="0"/>
-              <a:t> landmark CSV </a:t>
-            </a:r>
-            <a:r>
-              <a:rPr dirty="0" err="1"/>
-              <a:t>จาก</a:t>
-            </a:r>
-            <a:r>
-              <a:rPr dirty="0"/>
-              <a:t> webcam </a:t>
-            </a:r>
-            <a:r>
-              <a:rPr dirty="0" err="1"/>
-              <a:t>แล้ว</a:t>
-            </a:r>
-            <a:r>
-              <a:rPr dirty="0"/>
-              <a:t> replay </a:t>
-            </a:r>
-            <a:r>
-              <a:rPr dirty="0" err="1"/>
-              <a:t>เพื่อประเมินซ้ำ</a:t>
-            </a:r>
-            <a:endParaRPr dirty="0"/>
-          </a:p>
-          <a:p>
-            <a:pPr>
-              <a:spcAft>
-                <a:spcPts val="800"/>
-              </a:spcAft>
-              <a:defRPr sz="1800">
-                <a:solidFill>
-                  <a:srgbClr val="323A46"/>
-                </a:solidFill>
-                <a:latin typeface="Leelawadee UI"/>
-              </a:defRPr>
-            </a:pPr>
-            <a:r>
-              <a:rPr dirty="0"/>
-              <a:t>Metrics </a:t>
-            </a:r>
-            <a:r>
-              <a:rPr dirty="0" err="1"/>
-              <a:t>ที่ใช้</a:t>
-            </a:r>
-            <a:r>
-              <a:rPr dirty="0"/>
-              <a:t>: total runtime, </a:t>
-            </a:r>
-            <a:r>
-              <a:rPr dirty="0" err="1"/>
-              <a:t>ms</a:t>
-            </a:r>
-            <a:r>
-              <a:rPr dirty="0"/>
-              <a:t>/frame, peak traced memory, repetition count error </a:t>
-            </a:r>
-            <a:r>
-              <a:rPr dirty="0" err="1"/>
-              <a:t>และ</a:t>
-            </a:r>
-            <a:r>
-              <a:rPr dirty="0"/>
-              <a:t> side-switch jitter</a:t>
-            </a:r>
-          </a:p>
-          <a:p>
-            <a:pPr>
-              <a:spcAft>
-                <a:spcPts val="800"/>
-              </a:spcAft>
-              <a:defRPr sz="1800">
-                <a:solidFill>
-                  <a:srgbClr val="323A46"/>
-                </a:solidFill>
-                <a:latin typeface="Leelawadee UI"/>
-              </a:defRPr>
-            </a:pPr>
-            <a:r>
-              <a:rPr dirty="0" err="1"/>
-              <a:t>การตรวจสอบความถูกต้อง</a:t>
-            </a:r>
-            <a:r>
-              <a:rPr dirty="0"/>
-              <a:t>: `python -m </a:t>
-            </a:r>
-            <a:r>
-              <a:rPr dirty="0" err="1"/>
-              <a:t>unittest</a:t>
-            </a:r>
-            <a:r>
-              <a:rPr dirty="0"/>
-              <a:t> </a:t>
-            </a:r>
-            <a:r>
-              <a:rPr dirty="0" err="1"/>
-              <a:t>tests.test_simulation</a:t>
-            </a:r>
-            <a:r>
-              <a:rPr dirty="0"/>
-              <a:t>` </a:t>
-            </a:r>
-            <a:r>
-              <a:rPr dirty="0" err="1"/>
-              <a:t>ผ่าน</a:t>
-            </a:r>
-            <a:endParaRPr dirty="0"/>
-          </a:p>
-        </p:txBody>
-      </p:sp>
-      <p:sp>
-        <p:nvSpPr>
-          <p:cNvPr id="5" name="Rounded Rectangle 4"/>
-          <p:cNvSpPr/>
-          <p:nvPr/>
-        </p:nvSpPr>
-        <p:spPr>
-          <a:xfrm>
-            <a:off x="8138160" y="1828800"/>
-            <a:ext cx="2377440" cy="1005840"/>
-          </a:xfrm>
-          <a:prstGeom prst="roundRect">
-            <a:avLst/>
-          </a:prstGeom>
-          <a:solidFill>
-            <a:srgbClr val="E8F8F9"/>
-          </a:solidFill>
-          <a:ln w="19050">
-            <a:solidFill>
-              <a:srgbClr val="006D77"/>
-            </a:solidFill>
-          </a:ln>
-        </p:spPr>
-        <p:style>
-          <a:lnRef idx="1">
-            <a:schemeClr val="accent1"/>
-          </a:lnRef>
-          <a:fillRef idx="3">
-            <a:schemeClr val="accent1"/>
-          </a:fillRef>
-          <a:effectRef idx="2">
-            <a:schemeClr val="accent1"/>
-          </a:effectRef>
-          <a:fontRef idx="minor">
-            <a:schemeClr val="lt1"/>
-          </a:fontRef>
-        </p:style>
-        <p:txBody>
-          <a:bodyPr rtlCol="0" anchor="ctr"/>
-          <a:lstStyle/>
-          <a:p>
-            <a:pPr algn="ctr"/>
-            <a:r>
-              <a:rPr sz="1100" b="1" dirty="0">
-                <a:solidFill>
-                  <a:srgbClr val="006D77"/>
-                </a:solidFill>
-                <a:latin typeface="Leelawadee UI"/>
-              </a:rPr>
-              <a:t>Synthetic Sizes</a:t>
-            </a:r>
-          </a:p>
-          <a:p>
-            <a:pPr algn="ctr"/>
-            <a:r>
-              <a:rPr sz="1700" b="1" dirty="0">
-                <a:solidFill>
-                  <a:srgbClr val="141820"/>
-                </a:solidFill>
-                <a:latin typeface="Leelawadee UI"/>
-              </a:rPr>
-              <a:t>1k / 10k / 100k</a:t>
-            </a:r>
-          </a:p>
-        </p:txBody>
-      </p:sp>
-      <p:sp>
-        <p:nvSpPr>
-          <p:cNvPr id="7" name="Rounded Rectangle 6"/>
-          <p:cNvSpPr/>
-          <p:nvPr/>
-        </p:nvSpPr>
-        <p:spPr>
-          <a:xfrm>
-            <a:off x="6766560" y="3154680"/>
-            <a:ext cx="2377440" cy="1005840"/>
-          </a:xfrm>
-          <a:prstGeom prst="roundRect">
-            <a:avLst/>
-          </a:prstGeom>
-          <a:solidFill>
-            <a:srgbClr val="E8F8F9"/>
-          </a:solidFill>
-          <a:ln w="19050">
-            <a:solidFill>
-              <a:srgbClr val="006D77"/>
-            </a:solidFill>
-          </a:ln>
-        </p:spPr>
-        <p:style>
-          <a:lnRef idx="1">
-            <a:schemeClr val="accent1"/>
-          </a:lnRef>
-          <a:fillRef idx="3">
-            <a:schemeClr val="accent1"/>
-          </a:fillRef>
-          <a:effectRef idx="2">
-            <a:schemeClr val="accent1"/>
-          </a:effectRef>
-          <a:fontRef idx="minor">
-            <a:schemeClr val="lt1"/>
-          </a:fontRef>
-        </p:style>
-        <p:txBody>
-          <a:bodyPr rtlCol="0" anchor="ctr"/>
-          <a:lstStyle/>
-          <a:p>
-            <a:pPr algn="ctr"/>
-            <a:r>
-              <a:rPr sz="1100" b="1">
-                <a:solidFill>
-                  <a:srgbClr val="006D77"/>
-                </a:solidFill>
-                <a:latin typeface="Leelawadee UI"/>
-              </a:rPr>
-              <a:t>Real-data Path</a:t>
-            </a:r>
-          </a:p>
-          <a:p>
-            <a:pPr algn="ctr"/>
-            <a:r>
-              <a:rPr sz="1700" b="1">
-                <a:solidFill>
-                  <a:srgbClr val="141820"/>
-                </a:solidFill>
-                <a:latin typeface="Leelawadee UI"/>
-              </a:rPr>
-              <a:t>Capture + Replay</a:t>
-            </a:r>
-          </a:p>
-        </p:txBody>
-      </p:sp>
-      <p:sp>
-        <p:nvSpPr>
-          <p:cNvPr id="8" name="Rounded Rectangle 7"/>
-          <p:cNvSpPr/>
-          <p:nvPr/>
-        </p:nvSpPr>
-        <p:spPr>
-          <a:xfrm>
-            <a:off x="9326880" y="3154680"/>
-            <a:ext cx="2103120" cy="1005840"/>
-          </a:xfrm>
-          <a:prstGeom prst="roundRect">
-            <a:avLst/>
-          </a:prstGeom>
-          <a:solidFill>
-            <a:srgbClr val="E8F8F9"/>
-          </a:solidFill>
-          <a:ln w="19050">
-            <a:solidFill>
-              <a:srgbClr val="006D77"/>
-            </a:solidFill>
-          </a:ln>
-        </p:spPr>
-        <p:style>
-          <a:lnRef idx="1">
-            <a:schemeClr val="accent1"/>
-          </a:lnRef>
-          <a:fillRef idx="3">
-            <a:schemeClr val="accent1"/>
-          </a:fillRef>
-          <a:effectRef idx="2">
-            <a:schemeClr val="accent1"/>
-          </a:effectRef>
-          <a:fontRef idx="minor">
-            <a:schemeClr val="lt1"/>
-          </a:fontRef>
-        </p:style>
-        <p:txBody>
-          <a:bodyPr rtlCol="0" anchor="ctr"/>
-          <a:lstStyle/>
-          <a:p>
-            <a:pPr algn="ctr"/>
-            <a:r>
-              <a:rPr sz="1100" b="1">
-                <a:solidFill>
-                  <a:srgbClr val="006D77"/>
-                </a:solidFill>
-                <a:latin typeface="Leelawadee UI"/>
-              </a:rPr>
-              <a:t>Visualization</a:t>
-            </a:r>
-          </a:p>
-          <a:p>
-            <a:pPr algn="ctr"/>
-            <a:r>
-              <a:rPr sz="1700" b="1">
-                <a:solidFill>
-                  <a:srgbClr val="141820"/>
-                </a:solidFill>
-                <a:latin typeface="Leelawadee UI"/>
-              </a:rPr>
-              <a:t>Plots + Demo</a:t>
-            </a:r>
-          </a:p>
-        </p:txBody>
-      </p:sp>
-    </p:spTree>
-  </p:cSld>
-  <p:clrMapOvr>
-    <a:masterClrMapping/>
-  </p:clrMapOvr>
-</p:sld>
-</file>
-
-<file path=ppt/slides/slide9.xml><?xml version="1.0" encoding="utf-8"?>
 <p:sld xmlns:a="http://schemas.openxmlformats.org/drawingml/2006/main" xmlns:r="http://schemas.openxmlformats.org/officeDocument/2006/relationships" xmlns:p="http://schemas.openxmlformats.org/presentationml/2006/main">
   <p:cSld>
     <p:bg>
@@ -8772,6 +4625,4969 @@
 </p:sld>
 </file>
 
+<file path=ppt/slides/slide11.xml><?xml version="1.0" encoding="utf-8"?>
+<p:sld xmlns:a="http://schemas.openxmlformats.org/drawingml/2006/main" xmlns:r="http://schemas.openxmlformats.org/officeDocument/2006/relationships" xmlns:p="http://schemas.openxmlformats.org/presentationml/2006/main">
+  <p:cSld>
+    <p:bg>
+      <p:bgPr>
+        <a:solidFill>
+          <a:srgbClr val="FFFFFF"/>
+        </a:solidFill>
+        <a:effectLst/>
+      </p:bgPr>
+    </p:bg>
+    <p:spTree>
+      <p:nvGrpSpPr>
+        <p:cNvPr id="1" name=""/>
+        <p:cNvGrpSpPr/>
+        <p:nvPr/>
+      </p:nvGrpSpPr>
+      <p:grpSpPr>
+        <a:xfrm>
+          <a:off x="0" y="0"/>
+          <a:ext cx="0" cy="0"/>
+          <a:chOff x="0" y="0"/>
+          <a:chExt cx="0" cy="0"/>
+        </a:xfrm>
+      </p:grpSpPr>
+      <p:sp>
+        <p:nvSpPr>
+          <p:cNvPr id="2" name="TextBox 1"/>
+          <p:cNvSpPr txBox="1"/>
+          <p:nvPr/>
+        </p:nvSpPr>
+        <p:spPr>
+          <a:xfrm>
+            <a:off x="548640" y="365760"/>
+            <a:ext cx="10972800" cy="731520"/>
+          </a:xfrm>
+          <a:prstGeom prst="rect">
+            <a:avLst/>
+          </a:prstGeom>
+          <a:noFill/>
+        </p:spPr>
+        <p:txBody>
+          <a:bodyPr wrap="none">
+            <a:spAutoFit/>
+          </a:bodyPr>
+          <a:lstStyle/>
+          <a:p>
+            <a:r>
+              <a:rPr sz="2400" b="1">
+                <a:solidFill>
+                  <a:srgbClr val="141820"/>
+                </a:solidFill>
+                <a:latin typeface="Leelawadee UI"/>
+              </a:rPr>
+              <a:t>ผลเชิงภาพและ Visualization</a:t>
+            </a:r>
+          </a:p>
+        </p:txBody>
+      </p:sp>
+      <p:sp>
+        <p:nvSpPr>
+          <p:cNvPr id="3" name="Rectangle 2"/>
+          <p:cNvSpPr/>
+          <p:nvPr/>
+        </p:nvSpPr>
+        <p:spPr>
+          <a:xfrm>
+            <a:off x="548640" y="1060704"/>
+            <a:ext cx="2103120" cy="54864"/>
+          </a:xfrm>
+          <a:prstGeom prst="rect">
+            <a:avLst/>
+          </a:prstGeom>
+          <a:solidFill>
+            <a:srgbClr val="006D77"/>
+          </a:solidFill>
+          <a:ln>
+            <a:noFill/>
+          </a:ln>
+        </p:spPr>
+        <p:style>
+          <a:lnRef idx="1">
+            <a:schemeClr val="accent1"/>
+          </a:lnRef>
+          <a:fillRef idx="3">
+            <a:schemeClr val="accent1"/>
+          </a:fillRef>
+          <a:effectRef idx="2">
+            <a:schemeClr val="accent1"/>
+          </a:effectRef>
+          <a:fontRef idx="minor">
+            <a:schemeClr val="lt1"/>
+          </a:fontRef>
+        </p:style>
+        <p:txBody>
+          <a:bodyPr rtlCol="0" anchor="ctr"/>
+          <a:lstStyle/>
+          <a:p>
+            <a:pPr algn="ctr"/>
+            <a:endParaRPr/>
+          </a:p>
+        </p:txBody>
+      </p:sp>
+      <p:pic>
+        <p:nvPicPr>
+          <p:cNvPr id="8" name="Picture 7">
+            <a:extLst>
+              <a:ext uri="{FF2B5EF4-FFF2-40B4-BE49-F238E27FC236}">
+                <a16:creationId xmlns:a16="http://schemas.microsoft.com/office/drawing/2014/main" id="{83AFEA5E-370C-A89D-089B-8CA714274405}"/>
+              </a:ext>
+            </a:extLst>
+          </p:cNvPr>
+          <p:cNvPicPr>
+            <a:picLocks noChangeAspect="1"/>
+          </p:cNvPicPr>
+          <p:nvPr/>
+        </p:nvPicPr>
+        <p:blipFill>
+          <a:blip r:embed="rId2"/>
+          <a:stretch>
+            <a:fillRect/>
+          </a:stretch>
+        </p:blipFill>
+        <p:spPr>
+          <a:xfrm>
+            <a:off x="2807592" y="1627632"/>
+            <a:ext cx="6723119" cy="4032210"/>
+          </a:xfrm>
+          <a:prstGeom prst="rect">
+            <a:avLst/>
+          </a:prstGeom>
+        </p:spPr>
+      </p:pic>
+    </p:spTree>
+  </p:cSld>
+  <p:clrMapOvr>
+    <a:masterClrMapping/>
+  </p:clrMapOvr>
+</p:sld>
+</file>
+
+<file path=ppt/slides/slide12.xml><?xml version="1.0" encoding="utf-8"?>
+<p:sld xmlns:a="http://schemas.openxmlformats.org/drawingml/2006/main" xmlns:r="http://schemas.openxmlformats.org/officeDocument/2006/relationships" xmlns:p="http://schemas.openxmlformats.org/presentationml/2006/main">
+  <p:cSld>
+    <p:bg>
+      <p:bgPr>
+        <a:solidFill>
+          <a:srgbClr val="FFFFFF"/>
+        </a:solidFill>
+        <a:effectLst/>
+      </p:bgPr>
+    </p:bg>
+    <p:spTree>
+      <p:nvGrpSpPr>
+        <p:cNvPr id="1" name=""/>
+        <p:cNvGrpSpPr/>
+        <p:nvPr/>
+      </p:nvGrpSpPr>
+      <p:grpSpPr>
+        <a:xfrm>
+          <a:off x="0" y="0"/>
+          <a:ext cx="0" cy="0"/>
+          <a:chOff x="0" y="0"/>
+          <a:chExt cx="0" cy="0"/>
+        </a:xfrm>
+      </p:grpSpPr>
+      <p:sp>
+        <p:nvSpPr>
+          <p:cNvPr id="2" name="TextBox 1"/>
+          <p:cNvSpPr txBox="1"/>
+          <p:nvPr/>
+        </p:nvSpPr>
+        <p:spPr>
+          <a:xfrm>
+            <a:off x="548640" y="365760"/>
+            <a:ext cx="10972800" cy="731520"/>
+          </a:xfrm>
+          <a:prstGeom prst="rect">
+            <a:avLst/>
+          </a:prstGeom>
+          <a:noFill/>
+        </p:spPr>
+        <p:txBody>
+          <a:bodyPr wrap="none">
+            <a:spAutoFit/>
+          </a:bodyPr>
+          <a:lstStyle/>
+          <a:p>
+            <a:r>
+              <a:rPr sz="2400" b="1">
+                <a:solidFill>
+                  <a:srgbClr val="141820"/>
+                </a:solidFill>
+                <a:latin typeface="Leelawadee UI"/>
+              </a:rPr>
+              <a:t>อภิปรายผล ข้อจำกัด และงานต่อยอด</a:t>
+            </a:r>
+          </a:p>
+        </p:txBody>
+      </p:sp>
+      <p:sp>
+        <p:nvSpPr>
+          <p:cNvPr id="3" name="Rectangle 2"/>
+          <p:cNvSpPr/>
+          <p:nvPr/>
+        </p:nvSpPr>
+        <p:spPr>
+          <a:xfrm>
+            <a:off x="548640" y="1060704"/>
+            <a:ext cx="2103120" cy="54864"/>
+          </a:xfrm>
+          <a:prstGeom prst="rect">
+            <a:avLst/>
+          </a:prstGeom>
+          <a:solidFill>
+            <a:srgbClr val="006D77"/>
+          </a:solidFill>
+          <a:ln>
+            <a:noFill/>
+          </a:ln>
+        </p:spPr>
+        <p:style>
+          <a:lnRef idx="1">
+            <a:schemeClr val="accent1"/>
+          </a:lnRef>
+          <a:fillRef idx="3">
+            <a:schemeClr val="accent1"/>
+          </a:fillRef>
+          <a:effectRef idx="2">
+            <a:schemeClr val="accent1"/>
+          </a:effectRef>
+          <a:fontRef idx="minor">
+            <a:schemeClr val="lt1"/>
+          </a:fontRef>
+        </p:style>
+        <p:txBody>
+          <a:bodyPr rtlCol="0" anchor="ctr"/>
+          <a:lstStyle/>
+          <a:p>
+            <a:pPr algn="ctr"/>
+            <a:endParaRPr/>
+          </a:p>
+        </p:txBody>
+      </p:sp>
+      <p:sp>
+        <p:nvSpPr>
+          <p:cNvPr id="4" name="TextBox 3"/>
+          <p:cNvSpPr txBox="1"/>
+          <p:nvPr/>
+        </p:nvSpPr>
+        <p:spPr>
+          <a:xfrm>
+            <a:off x="777240" y="1783080"/>
+            <a:ext cx="10332720" cy="1887696"/>
+          </a:xfrm>
+          <a:prstGeom prst="rect">
+            <a:avLst/>
+          </a:prstGeom>
+          <a:noFill/>
+        </p:spPr>
+        <p:txBody>
+          <a:bodyPr wrap="square" lIns="0">
+            <a:spAutoFit/>
+          </a:bodyPr>
+          <a:lstStyle/>
+          <a:p>
+            <a:pPr marL="285750" indent="-285750">
+              <a:spcAft>
+                <a:spcPts val="800"/>
+              </a:spcAft>
+              <a:buFont typeface="Arial" panose="020B0604020202020204" pitchFamily="34" charset="0"/>
+              <a:buChar char="•"/>
+              <a:defRPr sz="1800">
+                <a:solidFill>
+                  <a:srgbClr val="323A46"/>
+                </a:solidFill>
+                <a:latin typeface="Leelawadee UI"/>
+              </a:defRPr>
+            </a:pPr>
+            <a:r>
+              <a:rPr dirty="0" err="1"/>
+              <a:t>จุดแข็ง</a:t>
+            </a:r>
+            <a:r>
+              <a:rPr dirty="0"/>
+              <a:t>: proposed </a:t>
+            </a:r>
+            <a:r>
+              <a:rPr dirty="0" err="1"/>
+              <a:t>ลด</a:t>
+            </a:r>
+            <a:r>
+              <a:rPr dirty="0"/>
+              <a:t> temporal jitter </a:t>
+            </a:r>
+            <a:r>
+              <a:rPr dirty="0" err="1"/>
+              <a:t>ได้โดยไม่เปลี่ยน</a:t>
+            </a:r>
+            <a:r>
+              <a:rPr dirty="0"/>
+              <a:t> interface </a:t>
+            </a:r>
+            <a:r>
+              <a:rPr dirty="0" err="1"/>
+              <a:t>และไม่ต้องพึ่ง</a:t>
+            </a:r>
+            <a:r>
+              <a:rPr dirty="0"/>
+              <a:t> learned weights</a:t>
+            </a:r>
+          </a:p>
+          <a:p>
+            <a:pPr marL="285750" indent="-285750">
+              <a:spcAft>
+                <a:spcPts val="800"/>
+              </a:spcAft>
+              <a:buFont typeface="Arial" panose="020B0604020202020204" pitchFamily="34" charset="0"/>
+              <a:buChar char="•"/>
+              <a:defRPr sz="1800">
+                <a:solidFill>
+                  <a:srgbClr val="323A46"/>
+                </a:solidFill>
+                <a:latin typeface="Leelawadee UI"/>
+              </a:defRPr>
+            </a:pPr>
+            <a:r>
+              <a:rPr dirty="0" err="1"/>
+              <a:t>จุดแข็ง</a:t>
+            </a:r>
+            <a:r>
+              <a:rPr dirty="0"/>
+              <a:t>: repository </a:t>
+            </a:r>
+            <a:r>
+              <a:rPr dirty="0" err="1"/>
+              <a:t>มี</a:t>
+            </a:r>
+            <a:r>
+              <a:rPr dirty="0"/>
+              <a:t> benchmark, tests, plots, demo video </a:t>
+            </a:r>
+            <a:r>
+              <a:rPr dirty="0" err="1"/>
+              <a:t>และ</a:t>
+            </a:r>
+            <a:r>
+              <a:rPr dirty="0"/>
+              <a:t> pipeline </a:t>
+            </a:r>
+            <a:r>
+              <a:rPr dirty="0" err="1"/>
+              <a:t>สำหรับข้อมูลจริงครบ</a:t>
+            </a:r>
+            <a:endParaRPr dirty="0"/>
+          </a:p>
+          <a:p>
+            <a:pPr marL="285750" indent="-285750">
+              <a:spcAft>
+                <a:spcPts val="800"/>
+              </a:spcAft>
+              <a:buFont typeface="Arial" panose="020B0604020202020204" pitchFamily="34" charset="0"/>
+              <a:buChar char="•"/>
+              <a:defRPr sz="1800">
+                <a:solidFill>
+                  <a:srgbClr val="323A46"/>
+                </a:solidFill>
+                <a:latin typeface="Leelawadee UI"/>
+              </a:defRPr>
+            </a:pPr>
+            <a:r>
+              <a:rPr dirty="0" err="1"/>
+              <a:t>ข้อจำกัด</a:t>
+            </a:r>
+            <a:r>
+              <a:rPr dirty="0"/>
+              <a:t>: benchmark </a:t>
+            </a:r>
+            <a:r>
+              <a:rPr dirty="0" err="1"/>
+              <a:t>เชิงปริมาณยังโฟกัสที่</a:t>
+            </a:r>
+            <a:r>
+              <a:rPr dirty="0"/>
+              <a:t> motion primitive </a:t>
+            </a:r>
+            <a:r>
+              <a:rPr dirty="0" err="1"/>
+              <a:t>หลักเพียงชนิดเดียว</a:t>
+            </a:r>
+            <a:endParaRPr dirty="0"/>
+          </a:p>
+          <a:p>
+            <a:pPr marL="285750" indent="-285750">
+              <a:spcAft>
+                <a:spcPts val="800"/>
+              </a:spcAft>
+              <a:buFont typeface="Arial" panose="020B0604020202020204" pitchFamily="34" charset="0"/>
+              <a:buChar char="•"/>
+              <a:defRPr sz="1800">
+                <a:solidFill>
+                  <a:srgbClr val="323A46"/>
+                </a:solidFill>
+                <a:latin typeface="Leelawadee UI"/>
+              </a:defRPr>
+            </a:pPr>
+            <a:r>
+              <a:rPr lang="th-TH" dirty="0"/>
+              <a:t>ข้อจำกัด</a:t>
+            </a:r>
+            <a:r>
+              <a:rPr lang="en-US" dirty="0"/>
+              <a:t>: </a:t>
+            </a:r>
+            <a:r>
+              <a:rPr lang="th-TH" dirty="0"/>
+              <a:t>ถ้า </a:t>
+            </a:r>
+            <a:r>
+              <a:rPr lang="en-US" dirty="0"/>
+              <a:t>camera </a:t>
+            </a:r>
+            <a:r>
+              <a:rPr lang="th-TH" dirty="0"/>
+              <a:t>ใกล้จะเห็นแค่ครึ่งตัวทำให้มีการ </a:t>
+            </a:r>
+            <a:r>
+              <a:rPr lang="en-US" dirty="0"/>
+              <a:t>track </a:t>
+            </a:r>
+            <a:r>
+              <a:rPr lang="th-TH" dirty="0"/>
+              <a:t>ผิดพลาด ในอนาคตอาจจะแก้ให้ให้ดีขึ้นได้</a:t>
+            </a:r>
+            <a:endParaRPr dirty="0"/>
+          </a:p>
+          <a:p>
+            <a:pPr marL="285750" indent="-285750">
+              <a:spcAft>
+                <a:spcPts val="800"/>
+              </a:spcAft>
+              <a:buFont typeface="Arial" panose="020B0604020202020204" pitchFamily="34" charset="0"/>
+              <a:buChar char="•"/>
+              <a:defRPr sz="1800">
+                <a:solidFill>
+                  <a:srgbClr val="323A46"/>
+                </a:solidFill>
+                <a:latin typeface="Leelawadee UI"/>
+              </a:defRPr>
+            </a:pPr>
+            <a:r>
+              <a:rPr dirty="0" err="1"/>
+              <a:t>งานต่อยอด</a:t>
+            </a:r>
+            <a:r>
+              <a:rPr dirty="0"/>
+              <a:t>: </a:t>
+            </a:r>
+            <a:r>
+              <a:rPr dirty="0" err="1"/>
+              <a:t>เชื่อม</a:t>
+            </a:r>
+            <a:r>
+              <a:rPr dirty="0"/>
+              <a:t> skeleton </a:t>
+            </a:r>
+            <a:r>
+              <a:rPr dirty="0" err="1"/>
+              <a:t>เข้ากับ</a:t>
+            </a:r>
+            <a:r>
+              <a:rPr dirty="0"/>
+              <a:t> animated avatar, </a:t>
+            </a:r>
+            <a:r>
+              <a:rPr dirty="0" err="1"/>
+              <a:t>เพิ่ม</a:t>
+            </a:r>
+            <a:r>
+              <a:rPr dirty="0"/>
+              <a:t> motion curves </a:t>
+            </a:r>
+            <a:r>
+              <a:rPr dirty="0" err="1"/>
+              <a:t>และขยาย</a:t>
+            </a:r>
+            <a:r>
+              <a:rPr dirty="0"/>
+              <a:t> benchmark </a:t>
+            </a:r>
+            <a:r>
+              <a:rPr dirty="0" err="1"/>
+              <a:t>ไปทุก</a:t>
+            </a:r>
+            <a:r>
+              <a:rPr dirty="0"/>
+              <a:t> exercise mode</a:t>
+            </a:r>
+          </a:p>
+        </p:txBody>
+      </p:sp>
+    </p:spTree>
+  </p:cSld>
+  <p:clrMapOvr>
+    <a:masterClrMapping/>
+  </p:clrMapOvr>
+</p:sld>
+</file>
+
+<file path=ppt/slides/slide13.xml><?xml version="1.0" encoding="utf-8"?>
+<p:sld xmlns:a="http://schemas.openxmlformats.org/drawingml/2006/main" xmlns:r="http://schemas.openxmlformats.org/officeDocument/2006/relationships" xmlns:p="http://schemas.openxmlformats.org/presentationml/2006/main">
+  <p:cSld>
+    <p:bg>
+      <p:bgPr>
+        <a:solidFill>
+          <a:srgbClr val="FFFFFF"/>
+        </a:solidFill>
+        <a:effectLst/>
+      </p:bgPr>
+    </p:bg>
+    <p:spTree>
+      <p:nvGrpSpPr>
+        <p:cNvPr id="1" name=""/>
+        <p:cNvGrpSpPr/>
+        <p:nvPr/>
+      </p:nvGrpSpPr>
+      <p:grpSpPr>
+        <a:xfrm>
+          <a:off x="0" y="0"/>
+          <a:ext cx="0" cy="0"/>
+          <a:chOff x="0" y="0"/>
+          <a:chExt cx="0" cy="0"/>
+        </a:xfrm>
+      </p:grpSpPr>
+      <p:sp>
+        <p:nvSpPr>
+          <p:cNvPr id="2" name="TextBox 1"/>
+          <p:cNvSpPr txBox="1"/>
+          <p:nvPr/>
+        </p:nvSpPr>
+        <p:spPr>
+          <a:xfrm>
+            <a:off x="548640" y="365760"/>
+            <a:ext cx="10972800" cy="731520"/>
+          </a:xfrm>
+          <a:prstGeom prst="rect">
+            <a:avLst/>
+          </a:prstGeom>
+          <a:noFill/>
+        </p:spPr>
+        <p:txBody>
+          <a:bodyPr wrap="none">
+            <a:spAutoFit/>
+          </a:bodyPr>
+          <a:lstStyle/>
+          <a:p>
+            <a:r>
+              <a:rPr sz="2400" b="1">
+                <a:solidFill>
+                  <a:srgbClr val="141820"/>
+                </a:solidFill>
+                <a:latin typeface="Leelawadee UI"/>
+              </a:rPr>
+              <a:t>สรุปและการทำซ้ำงาน</a:t>
+            </a:r>
+          </a:p>
+        </p:txBody>
+      </p:sp>
+      <p:sp>
+        <p:nvSpPr>
+          <p:cNvPr id="3" name="Rectangle 2"/>
+          <p:cNvSpPr/>
+          <p:nvPr/>
+        </p:nvSpPr>
+        <p:spPr>
+          <a:xfrm>
+            <a:off x="548640" y="1060704"/>
+            <a:ext cx="2103120" cy="54864"/>
+          </a:xfrm>
+          <a:prstGeom prst="rect">
+            <a:avLst/>
+          </a:prstGeom>
+          <a:solidFill>
+            <a:srgbClr val="006D77"/>
+          </a:solidFill>
+          <a:ln>
+            <a:noFill/>
+          </a:ln>
+        </p:spPr>
+        <p:style>
+          <a:lnRef idx="1">
+            <a:schemeClr val="accent1"/>
+          </a:lnRef>
+          <a:fillRef idx="3">
+            <a:schemeClr val="accent1"/>
+          </a:fillRef>
+          <a:effectRef idx="2">
+            <a:schemeClr val="accent1"/>
+          </a:effectRef>
+          <a:fontRef idx="minor">
+            <a:schemeClr val="lt1"/>
+          </a:fontRef>
+        </p:style>
+        <p:txBody>
+          <a:bodyPr rtlCol="0" anchor="ctr"/>
+          <a:lstStyle/>
+          <a:p>
+            <a:pPr algn="ctr"/>
+            <a:endParaRPr/>
+          </a:p>
+        </p:txBody>
+      </p:sp>
+      <p:sp>
+        <p:nvSpPr>
+          <p:cNvPr id="4" name="TextBox 3"/>
+          <p:cNvSpPr txBox="1"/>
+          <p:nvPr/>
+        </p:nvSpPr>
+        <p:spPr>
+          <a:xfrm>
+            <a:off x="777240" y="1783080"/>
+            <a:ext cx="10332720" cy="2718693"/>
+          </a:xfrm>
+          <a:prstGeom prst="rect">
+            <a:avLst/>
+          </a:prstGeom>
+          <a:noFill/>
+        </p:spPr>
+        <p:txBody>
+          <a:bodyPr wrap="square" lIns="0">
+            <a:spAutoFit/>
+          </a:bodyPr>
+          <a:lstStyle/>
+          <a:p>
+            <a:pPr marL="285750" indent="-285750">
+              <a:spcAft>
+                <a:spcPts val="800"/>
+              </a:spcAft>
+              <a:buFont typeface="Arial" panose="020B0604020202020204" pitchFamily="34" charset="0"/>
+              <a:buChar char="•"/>
+              <a:defRPr sz="1800">
+                <a:solidFill>
+                  <a:srgbClr val="323A46"/>
+                </a:solidFill>
+                <a:latin typeface="Leelawadee UI"/>
+              </a:defRPr>
+            </a:pPr>
+            <a:r>
+              <a:rPr dirty="0" err="1"/>
+              <a:t>โปรเจกต์นี้มีองค์ประกอบครบตาม</a:t>
+            </a:r>
+            <a:r>
+              <a:rPr dirty="0"/>
+              <a:t> rubric: baseline comparison, scaling test </a:t>
+            </a:r>
+            <a:r>
+              <a:rPr dirty="0" err="1"/>
+              <a:t>และ</a:t>
+            </a:r>
+            <a:r>
+              <a:rPr dirty="0"/>
+              <a:t> visualization</a:t>
+            </a:r>
+          </a:p>
+          <a:p>
+            <a:pPr marL="285750" indent="-285750">
+              <a:spcAft>
+                <a:spcPts val="800"/>
+              </a:spcAft>
+              <a:buFont typeface="Arial" panose="020B0604020202020204" pitchFamily="34" charset="0"/>
+              <a:buChar char="•"/>
+              <a:defRPr sz="1800">
+                <a:solidFill>
+                  <a:srgbClr val="323A46"/>
+                </a:solidFill>
+                <a:latin typeface="Leelawadee UI"/>
+              </a:defRPr>
+            </a:pPr>
+            <a:r>
+              <a:rPr dirty="0" err="1"/>
+              <a:t>แกนหลักของงานคือการตีความ</a:t>
+            </a:r>
+            <a:r>
+              <a:rPr dirty="0"/>
+              <a:t> pose tracking </a:t>
+            </a:r>
+            <a:r>
+              <a:rPr dirty="0" err="1"/>
+              <a:t>ผ่านแนวคิดด้าน</a:t>
+            </a:r>
+            <a:r>
+              <a:rPr dirty="0"/>
+              <a:t> skeleton, key poses, interpolation </a:t>
+            </a:r>
+            <a:r>
+              <a:rPr dirty="0" err="1"/>
+              <a:t>และ</a:t>
+            </a:r>
+            <a:r>
+              <a:rPr dirty="0"/>
+              <a:t> temporal continuity</a:t>
+            </a:r>
+          </a:p>
+          <a:p>
+            <a:pPr marL="285750" indent="-285750">
+              <a:spcAft>
+                <a:spcPts val="800"/>
+              </a:spcAft>
+              <a:buFont typeface="Arial" panose="020B0604020202020204" pitchFamily="34" charset="0"/>
+              <a:buChar char="•"/>
+              <a:defRPr sz="1800">
+                <a:solidFill>
+                  <a:srgbClr val="323A46"/>
+                </a:solidFill>
+                <a:latin typeface="Leelawadee UI"/>
+              </a:defRPr>
+            </a:pPr>
+            <a:r>
+              <a:rPr dirty="0" err="1"/>
+              <a:t>คำสั่งหลัก</a:t>
+            </a:r>
+            <a:r>
+              <a:rPr dirty="0"/>
+              <a:t>: `python src/main.py --mode web`, `python src/main.py --mode benchmark`, `python src/main.py --mode demo`</a:t>
+            </a:r>
+          </a:p>
+          <a:p>
+            <a:pPr marL="285750" indent="-285750">
+              <a:spcAft>
+                <a:spcPts val="800"/>
+              </a:spcAft>
+              <a:buFont typeface="Arial" panose="020B0604020202020204" pitchFamily="34" charset="0"/>
+              <a:buChar char="•"/>
+              <a:defRPr sz="1800">
+                <a:solidFill>
+                  <a:srgbClr val="323A46"/>
+                </a:solidFill>
+                <a:latin typeface="Leelawadee UI"/>
+              </a:defRPr>
+            </a:pPr>
+            <a:r>
+              <a:rPr dirty="0" err="1"/>
+              <a:t>คำสั่งเสริมสำหรับข้อมูลจริง</a:t>
+            </a:r>
+            <a:r>
+              <a:rPr dirty="0"/>
+              <a:t>: `python tools/collect_mocap.py` </a:t>
+            </a:r>
+            <a:r>
+              <a:rPr dirty="0" err="1"/>
+              <a:t>และ</a:t>
+            </a:r>
+            <a:r>
+              <a:rPr dirty="0"/>
+              <a:t> `python experiments/evaluate_recorded_sequence.py`</a:t>
+            </a:r>
+          </a:p>
+          <a:p>
+            <a:pPr marL="285750" indent="-285750">
+              <a:spcAft>
+                <a:spcPts val="800"/>
+              </a:spcAft>
+              <a:buFont typeface="Arial" panose="020B0604020202020204" pitchFamily="34" charset="0"/>
+              <a:buChar char="•"/>
+              <a:defRPr sz="1800">
+                <a:solidFill>
+                  <a:srgbClr val="323A46"/>
+                </a:solidFill>
+                <a:latin typeface="Leelawadee UI"/>
+              </a:defRPr>
+            </a:pPr>
+            <a:r>
+              <a:rPr dirty="0"/>
+              <a:t>artifact </a:t>
+            </a:r>
+            <a:r>
+              <a:rPr dirty="0" err="1"/>
+              <a:t>ที่ส่งมีรายงาน</a:t>
+            </a:r>
+            <a:r>
+              <a:rPr dirty="0"/>
+              <a:t> Word, </a:t>
+            </a:r>
+            <a:r>
+              <a:rPr dirty="0" err="1"/>
+              <a:t>สไลด์ไทย</a:t>
+            </a:r>
+            <a:r>
+              <a:rPr dirty="0"/>
+              <a:t>/</a:t>
+            </a:r>
+            <a:r>
+              <a:rPr dirty="0" err="1"/>
+              <a:t>อังกฤษ</a:t>
+            </a:r>
+            <a:r>
+              <a:rPr dirty="0"/>
+              <a:t>, benchmark CSV/plot, demo video, tests </a:t>
+            </a:r>
+            <a:r>
+              <a:rPr dirty="0" err="1"/>
+              <a:t>และ</a:t>
+            </a:r>
+            <a:r>
+              <a:rPr dirty="0"/>
+              <a:t> source code </a:t>
+            </a:r>
+            <a:r>
+              <a:rPr dirty="0" err="1"/>
+              <a:t>ที่ทำซ้ำได้</a:t>
+            </a:r>
+            <a:endParaRPr dirty="0"/>
+          </a:p>
+        </p:txBody>
+      </p:sp>
+    </p:spTree>
+  </p:cSld>
+  <p:clrMapOvr>
+    <a:masterClrMapping/>
+  </p:clrMapOvr>
+</p:sld>
+</file>
+
+<file path=ppt/slides/slide14.xml><?xml version="1.0" encoding="utf-8"?>
+<p:sld xmlns:a="http://schemas.openxmlformats.org/drawingml/2006/main" xmlns:r="http://schemas.openxmlformats.org/officeDocument/2006/relationships" xmlns:p="http://schemas.openxmlformats.org/presentationml/2006/main">
+  <p:cSld>
+    <p:bg>
+      <p:bgPr>
+        <a:solidFill>
+          <a:srgbClr val="FFFFFF"/>
+        </a:solidFill>
+        <a:effectLst/>
+      </p:bgPr>
+    </p:bg>
+    <p:spTree>
+      <p:nvGrpSpPr>
+        <p:cNvPr id="1" name=""/>
+        <p:cNvGrpSpPr/>
+        <p:nvPr/>
+      </p:nvGrpSpPr>
+      <p:grpSpPr>
+        <a:xfrm>
+          <a:off x="0" y="0"/>
+          <a:ext cx="0" cy="0"/>
+          <a:chOff x="0" y="0"/>
+          <a:chExt cx="0" cy="0"/>
+        </a:xfrm>
+      </p:grpSpPr>
+      <p:sp>
+        <p:nvSpPr>
+          <p:cNvPr id="2" name="TextBox 1"/>
+          <p:cNvSpPr txBox="1"/>
+          <p:nvPr/>
+        </p:nvSpPr>
+        <p:spPr>
+          <a:xfrm>
+            <a:off x="548640" y="365760"/>
+            <a:ext cx="10972800" cy="731520"/>
+          </a:xfrm>
+          <a:prstGeom prst="rect">
+            <a:avLst/>
+          </a:prstGeom>
+          <a:noFill/>
+        </p:spPr>
+        <p:txBody>
+          <a:bodyPr wrap="none">
+            <a:spAutoFit/>
+          </a:bodyPr>
+          <a:lstStyle/>
+          <a:p>
+            <a:r>
+              <a:rPr sz="2400" b="1">
+                <a:solidFill>
+                  <a:srgbClr val="141820"/>
+                </a:solidFill>
+                <a:latin typeface="Leelawadee UI"/>
+              </a:rPr>
+              <a:t>เอกสารอ้างอิง</a:t>
+            </a:r>
+          </a:p>
+        </p:txBody>
+      </p:sp>
+      <p:sp>
+        <p:nvSpPr>
+          <p:cNvPr id="3" name="Rectangle 2"/>
+          <p:cNvSpPr/>
+          <p:nvPr/>
+        </p:nvSpPr>
+        <p:spPr>
+          <a:xfrm>
+            <a:off x="548640" y="1060704"/>
+            <a:ext cx="2103120" cy="54864"/>
+          </a:xfrm>
+          <a:prstGeom prst="rect">
+            <a:avLst/>
+          </a:prstGeom>
+          <a:solidFill>
+            <a:srgbClr val="006D77"/>
+          </a:solidFill>
+          <a:ln>
+            <a:noFill/>
+          </a:ln>
+        </p:spPr>
+        <p:style>
+          <a:lnRef idx="1">
+            <a:schemeClr val="accent1"/>
+          </a:lnRef>
+          <a:fillRef idx="3">
+            <a:schemeClr val="accent1"/>
+          </a:fillRef>
+          <a:effectRef idx="2">
+            <a:schemeClr val="accent1"/>
+          </a:effectRef>
+          <a:fontRef idx="minor">
+            <a:schemeClr val="lt1"/>
+          </a:fontRef>
+        </p:style>
+        <p:txBody>
+          <a:bodyPr rtlCol="0" anchor="ctr"/>
+          <a:lstStyle/>
+          <a:p>
+            <a:pPr algn="ctr"/>
+            <a:endParaRPr/>
+          </a:p>
+        </p:txBody>
+      </p:sp>
+      <p:sp>
+        <p:nvSpPr>
+          <p:cNvPr id="4" name="TextBox 3"/>
+          <p:cNvSpPr txBox="1"/>
+          <p:nvPr/>
+        </p:nvSpPr>
+        <p:spPr>
+          <a:xfrm>
+            <a:off x="777240" y="1783080"/>
+            <a:ext cx="10241280" cy="4389120"/>
+          </a:xfrm>
+          <a:prstGeom prst="rect">
+            <a:avLst/>
+          </a:prstGeom>
+          <a:noFill/>
+        </p:spPr>
+        <p:txBody>
+          <a:bodyPr wrap="square" lIns="0">
+            <a:spAutoFit/>
+          </a:bodyPr>
+          <a:lstStyle/>
+          <a:p>
+            <a:pPr>
+              <a:spcAft>
+                <a:spcPts val="800"/>
+              </a:spcAft>
+              <a:defRPr sz="1700">
+                <a:solidFill>
+                  <a:srgbClr val="323A46"/>
+                </a:solidFill>
+                <a:latin typeface="Leelawadee UI"/>
+              </a:defRPr>
+            </a:pPr>
+            <a:r>
+              <a:t>Bradski, G. The OpenCV Library. Dr. Dobb's Journal of Software Tools, 2000.</a:t>
+            </a:r>
+          </a:p>
+          <a:p>
+            <a:pPr>
+              <a:spcAft>
+                <a:spcPts val="800"/>
+              </a:spcAft>
+              <a:defRPr sz="1700">
+                <a:solidFill>
+                  <a:srgbClr val="323A46"/>
+                </a:solidFill>
+                <a:latin typeface="Leelawadee UI"/>
+              </a:defRPr>
+            </a:pPr>
+            <a:r>
+              <a:t>Bazarevsky, V. et al. BlazePose: On-device Real-time Body Pose tracking. arXiv, 2020.</a:t>
+            </a:r>
+          </a:p>
+          <a:p>
+            <a:pPr>
+              <a:spcAft>
+                <a:spcPts val="800"/>
+              </a:spcAft>
+              <a:defRPr sz="1700">
+                <a:solidFill>
+                  <a:srgbClr val="323A46"/>
+                </a:solidFill>
+                <a:latin typeface="Leelawadee UI"/>
+              </a:defRPr>
+            </a:pPr>
+            <a:r>
+              <a:t>Google MediaPipe Team. MediaPipe Pose documentation.</a:t>
+            </a:r>
+          </a:p>
+          <a:p>
+            <a:pPr>
+              <a:spcAft>
+                <a:spcPts val="800"/>
+              </a:spcAft>
+              <a:defRPr sz="1700">
+                <a:solidFill>
+                  <a:srgbClr val="323A46"/>
+                </a:solidFill>
+                <a:latin typeface="Leelawadee UI"/>
+              </a:defRPr>
+            </a:pPr>
+            <a:r>
+              <a:t>Casiez, G., Roussel, N., and Vogel, D. 1 Euro Filter. CHI 2012.</a:t>
+            </a:r>
+          </a:p>
+          <a:p>
+            <a:pPr>
+              <a:spcAft>
+                <a:spcPts val="800"/>
+              </a:spcAft>
+              <a:defRPr sz="1700">
+                <a:solidFill>
+                  <a:srgbClr val="323A46"/>
+                </a:solidFill>
+                <a:latin typeface="Leelawadee UI"/>
+              </a:defRPr>
+            </a:pPr>
+            <a:r>
+              <a:t>Parent, R. Computer Animation: Algorithms and Techniques. Morgan Kaufmann, 2012.</a:t>
+            </a:r>
+          </a:p>
+          <a:p>
+            <a:pPr>
+              <a:spcAft>
+                <a:spcPts val="800"/>
+              </a:spcAft>
+              <a:defRPr sz="1700">
+                <a:solidFill>
+                  <a:srgbClr val="323A46"/>
+                </a:solidFill>
+                <a:latin typeface="Leelawadee UI"/>
+              </a:defRPr>
+            </a:pPr>
+            <a:r>
+              <a:t>Menache, A. Understanding Motion Capture for Computer Animation and Video Games. Morgan Kaufmann, 2010.</a:t>
+            </a:r>
+          </a:p>
+        </p:txBody>
+      </p:sp>
+    </p:spTree>
+  </p:cSld>
+  <p:clrMapOvr>
+    <a:masterClrMapping/>
+  </p:clrMapOvr>
+</p:sld>
+</file>
+
+<file path=ppt/slides/slide2.xml><?xml version="1.0" encoding="utf-8"?>
+<p:sld xmlns:a="http://schemas.openxmlformats.org/drawingml/2006/main" xmlns:r="http://schemas.openxmlformats.org/officeDocument/2006/relationships" xmlns:p="http://schemas.openxmlformats.org/presentationml/2006/main">
+  <p:cSld>
+    <p:bg>
+      <p:bgPr>
+        <a:solidFill>
+          <a:srgbClr val="FFFFFF"/>
+        </a:solidFill>
+        <a:effectLst/>
+      </p:bgPr>
+    </p:bg>
+    <p:spTree>
+      <p:nvGrpSpPr>
+        <p:cNvPr id="1" name=""/>
+        <p:cNvGrpSpPr/>
+        <p:nvPr/>
+      </p:nvGrpSpPr>
+      <p:grpSpPr>
+        <a:xfrm>
+          <a:off x="0" y="0"/>
+          <a:ext cx="0" cy="0"/>
+          <a:chOff x="0" y="0"/>
+          <a:chExt cx="0" cy="0"/>
+        </a:xfrm>
+      </p:grpSpPr>
+      <p:sp>
+        <p:nvSpPr>
+          <p:cNvPr id="2" name="TextBox 1"/>
+          <p:cNvSpPr txBox="1"/>
+          <p:nvPr/>
+        </p:nvSpPr>
+        <p:spPr>
+          <a:xfrm>
+            <a:off x="548640" y="365760"/>
+            <a:ext cx="10972800" cy="731520"/>
+          </a:xfrm>
+          <a:prstGeom prst="rect">
+            <a:avLst/>
+          </a:prstGeom>
+          <a:noFill/>
+        </p:spPr>
+        <p:txBody>
+          <a:bodyPr wrap="none">
+            <a:spAutoFit/>
+          </a:bodyPr>
+          <a:lstStyle/>
+          <a:p>
+            <a:r>
+              <a:rPr sz="2400" b="1" dirty="0" err="1">
+                <a:solidFill>
+                  <a:srgbClr val="141820"/>
+                </a:solidFill>
+                <a:latin typeface="Leelawadee UI"/>
+              </a:rPr>
+              <a:t>นิยามปัญหาและวัตถุประสงค์</a:t>
+            </a:r>
+            <a:endParaRPr sz="2400" b="1" dirty="0">
+              <a:solidFill>
+                <a:srgbClr val="141820"/>
+              </a:solidFill>
+              <a:latin typeface="Leelawadee UI"/>
+            </a:endParaRPr>
+          </a:p>
+        </p:txBody>
+      </p:sp>
+      <p:sp>
+        <p:nvSpPr>
+          <p:cNvPr id="3" name="Rectangle 2"/>
+          <p:cNvSpPr/>
+          <p:nvPr/>
+        </p:nvSpPr>
+        <p:spPr>
+          <a:xfrm>
+            <a:off x="548640" y="1060704"/>
+            <a:ext cx="2103120" cy="54864"/>
+          </a:xfrm>
+          <a:prstGeom prst="rect">
+            <a:avLst/>
+          </a:prstGeom>
+          <a:solidFill>
+            <a:srgbClr val="006D77"/>
+          </a:solidFill>
+          <a:ln>
+            <a:noFill/>
+          </a:ln>
+        </p:spPr>
+        <p:style>
+          <a:lnRef idx="1">
+            <a:schemeClr val="accent1"/>
+          </a:lnRef>
+          <a:fillRef idx="3">
+            <a:schemeClr val="accent1"/>
+          </a:fillRef>
+          <a:effectRef idx="2">
+            <a:schemeClr val="accent1"/>
+          </a:effectRef>
+          <a:fontRef idx="minor">
+            <a:schemeClr val="lt1"/>
+          </a:fontRef>
+        </p:style>
+        <p:txBody>
+          <a:bodyPr rtlCol="0" anchor="ctr"/>
+          <a:lstStyle/>
+          <a:p>
+            <a:pPr algn="ctr"/>
+            <a:endParaRPr/>
+          </a:p>
+        </p:txBody>
+      </p:sp>
+      <p:sp>
+        <p:nvSpPr>
+          <p:cNvPr id="4" name="TextBox 3"/>
+          <p:cNvSpPr txBox="1"/>
+          <p:nvPr/>
+        </p:nvSpPr>
+        <p:spPr>
+          <a:xfrm>
+            <a:off x="548640" y="1170432"/>
+            <a:ext cx="10972800" cy="411480"/>
+          </a:xfrm>
+          <a:prstGeom prst="rect">
+            <a:avLst/>
+          </a:prstGeom>
+          <a:noFill/>
+        </p:spPr>
+        <p:txBody>
+          <a:bodyPr wrap="none">
+            <a:spAutoFit/>
+          </a:bodyPr>
+          <a:lstStyle/>
+          <a:p>
+            <a:r>
+              <a:rPr sz="1100">
+                <a:solidFill>
+                  <a:srgbClr val="687484"/>
+                </a:solidFill>
+                <a:latin typeface="Leelawadee UI"/>
+              </a:rPr>
+              <a:t>ครอบคลุม rubric ส่วน problem definition, baseline/proposed และเป้าหมายเชิงวิศวกรรม</a:t>
+            </a:r>
+          </a:p>
+        </p:txBody>
+      </p:sp>
+      <p:sp>
+        <p:nvSpPr>
+          <p:cNvPr id="5" name="TextBox 4"/>
+          <p:cNvSpPr txBox="1"/>
+          <p:nvPr/>
+        </p:nvSpPr>
+        <p:spPr>
+          <a:xfrm>
+            <a:off x="731520" y="1737360"/>
+            <a:ext cx="5577840" cy="3549690"/>
+          </a:xfrm>
+          <a:prstGeom prst="rect">
+            <a:avLst/>
+          </a:prstGeom>
+          <a:noFill/>
+        </p:spPr>
+        <p:txBody>
+          <a:bodyPr wrap="square" lIns="0">
+            <a:spAutoFit/>
+          </a:bodyPr>
+          <a:lstStyle/>
+          <a:p>
+            <a:pPr marL="285750" indent="-285750">
+              <a:spcAft>
+                <a:spcPts val="800"/>
+              </a:spcAft>
+              <a:buFont typeface="Arial" panose="020B0604020202020204" pitchFamily="34" charset="0"/>
+              <a:buChar char="•"/>
+              <a:defRPr sz="1800">
+                <a:solidFill>
+                  <a:srgbClr val="323A46"/>
+                </a:solidFill>
+                <a:latin typeface="Leelawadee UI"/>
+              </a:defRPr>
+            </a:pPr>
+            <a:r>
+              <a:rPr dirty="0" err="1"/>
+              <a:t>ศึกษาโจทย์การติดตามท่าออกกำลังกายแบบเรียลไทม์ในมุมมองของ</a:t>
+            </a:r>
+            <a:r>
+              <a:rPr dirty="0"/>
+              <a:t> Computer Animation </a:t>
+            </a:r>
+            <a:r>
+              <a:rPr dirty="0" err="1"/>
+              <a:t>ไม่ใช่แค่การจำแนกภาพจากกล้อง</a:t>
+            </a:r>
+            <a:endParaRPr dirty="0"/>
+          </a:p>
+          <a:p>
+            <a:pPr marL="285750" indent="-285750">
+              <a:spcAft>
+                <a:spcPts val="800"/>
+              </a:spcAft>
+              <a:buFont typeface="Arial" panose="020B0604020202020204" pitchFamily="34" charset="0"/>
+              <a:buChar char="•"/>
+              <a:defRPr sz="1800">
+                <a:solidFill>
+                  <a:srgbClr val="323A46"/>
+                </a:solidFill>
+                <a:latin typeface="Leelawadee UI"/>
+              </a:defRPr>
+            </a:pPr>
+            <a:r>
+              <a:rPr dirty="0" err="1"/>
+              <a:t>ใช้</a:t>
+            </a:r>
+            <a:r>
+              <a:rPr dirty="0"/>
+              <a:t> pose landmark </a:t>
+            </a:r>
+            <a:r>
+              <a:rPr dirty="0" err="1"/>
+              <a:t>เป็นโครงกระดูกแบบย่อ</a:t>
+            </a:r>
+            <a:r>
+              <a:rPr dirty="0"/>
+              <a:t> </a:t>
+            </a:r>
+            <a:r>
+              <a:rPr dirty="0" err="1"/>
+              <a:t>และตีความท่าออกกำลังกายเป็นการเปลี่ยนผ่านระหว่าง</a:t>
+            </a:r>
+            <a:r>
+              <a:rPr dirty="0"/>
+              <a:t> key poses</a:t>
+            </a:r>
+          </a:p>
+          <a:p>
+            <a:pPr marL="285750" indent="-285750">
+              <a:spcAft>
+                <a:spcPts val="800"/>
+              </a:spcAft>
+              <a:buFont typeface="Arial" panose="020B0604020202020204" pitchFamily="34" charset="0"/>
+              <a:buChar char="•"/>
+              <a:defRPr sz="1800">
+                <a:solidFill>
+                  <a:srgbClr val="323A46"/>
+                </a:solidFill>
+                <a:latin typeface="Leelawadee UI"/>
+              </a:defRPr>
+            </a:pPr>
+            <a:r>
+              <a:rPr dirty="0" err="1"/>
+              <a:t>เปรียบเทียบวิธี</a:t>
+            </a:r>
+            <a:r>
+              <a:rPr dirty="0"/>
+              <a:t> baseline </a:t>
+            </a:r>
+            <a:r>
+              <a:rPr dirty="0" err="1"/>
+              <a:t>แบบ</a:t>
+            </a:r>
+            <a:r>
+              <a:rPr dirty="0"/>
+              <a:t> threshold </a:t>
+            </a:r>
+            <a:r>
+              <a:rPr dirty="0" err="1"/>
+              <a:t>ตรง</a:t>
+            </a:r>
+            <a:r>
+              <a:rPr dirty="0"/>
+              <a:t> ๆ </a:t>
+            </a:r>
+            <a:r>
+              <a:rPr dirty="0" err="1"/>
+              <a:t>กับวิธี</a:t>
+            </a:r>
+            <a:r>
+              <a:rPr dirty="0"/>
+              <a:t> proposed </a:t>
+            </a:r>
+            <a:r>
+              <a:rPr dirty="0" err="1"/>
+              <a:t>ที่เพิ่ม</a:t>
+            </a:r>
+            <a:r>
+              <a:rPr dirty="0"/>
+              <a:t> confidence-aware side lock </a:t>
+            </a:r>
+            <a:r>
+              <a:rPr dirty="0" err="1"/>
+              <a:t>และ</a:t>
+            </a:r>
+            <a:r>
+              <a:rPr dirty="0"/>
+              <a:t> temporal filtering</a:t>
+            </a:r>
+          </a:p>
+          <a:p>
+            <a:pPr marL="285750" indent="-285750">
+              <a:spcAft>
+                <a:spcPts val="800"/>
+              </a:spcAft>
+              <a:buFont typeface="Arial" panose="020B0604020202020204" pitchFamily="34" charset="0"/>
+              <a:buChar char="•"/>
+              <a:defRPr sz="1800">
+                <a:solidFill>
+                  <a:srgbClr val="323A46"/>
+                </a:solidFill>
+                <a:latin typeface="Leelawadee UI"/>
+              </a:defRPr>
+            </a:pPr>
+            <a:r>
+              <a:rPr dirty="0" err="1"/>
+              <a:t>วัดผลด้วย</a:t>
+            </a:r>
+            <a:r>
+              <a:rPr dirty="0"/>
+              <a:t> runtime, memory, repetition-count accuracy </a:t>
+            </a:r>
+            <a:r>
+              <a:rPr dirty="0" err="1"/>
+              <a:t>และ</a:t>
+            </a:r>
+            <a:r>
+              <a:rPr dirty="0"/>
+              <a:t> temporal stability</a:t>
+            </a:r>
+          </a:p>
+          <a:p>
+            <a:pPr marL="285750" indent="-285750">
+              <a:spcAft>
+                <a:spcPts val="800"/>
+              </a:spcAft>
+              <a:buFont typeface="Arial" panose="020B0604020202020204" pitchFamily="34" charset="0"/>
+              <a:buChar char="•"/>
+              <a:defRPr sz="1800">
+                <a:solidFill>
+                  <a:srgbClr val="323A46"/>
+                </a:solidFill>
+                <a:latin typeface="Leelawadee UI"/>
+              </a:defRPr>
+            </a:pPr>
+            <a:r>
+              <a:rPr dirty="0" err="1"/>
+              <a:t>จัดทำ</a:t>
+            </a:r>
+            <a:r>
+              <a:rPr dirty="0"/>
+              <a:t> artifact </a:t>
+            </a:r>
+            <a:r>
+              <a:rPr dirty="0" err="1"/>
+              <a:t>ที่ทำซ้ำได้จริง</a:t>
+            </a:r>
+            <a:r>
+              <a:rPr dirty="0"/>
+              <a:t> </a:t>
+            </a:r>
+            <a:r>
+              <a:rPr dirty="0" err="1"/>
+              <a:t>พร้อม</a:t>
+            </a:r>
+            <a:r>
+              <a:rPr dirty="0"/>
+              <a:t> live demo, benchmark, tests </a:t>
+            </a:r>
+            <a:r>
+              <a:rPr dirty="0" err="1"/>
+              <a:t>และเอกสารส่งงาน</a:t>
+            </a:r>
+            <a:endParaRPr dirty="0"/>
+          </a:p>
+        </p:txBody>
+      </p:sp>
+    </p:spTree>
+  </p:cSld>
+  <p:clrMapOvr>
+    <a:masterClrMapping/>
+  </p:clrMapOvr>
+</p:sld>
+</file>
+
+<file path=ppt/slides/slide3.xml><?xml version="1.0" encoding="utf-8"?>
+<p:sld xmlns:a="http://schemas.openxmlformats.org/drawingml/2006/main" xmlns:r="http://schemas.openxmlformats.org/officeDocument/2006/relationships" xmlns:p="http://schemas.openxmlformats.org/presentationml/2006/main">
+  <p:cSld>
+    <p:bg>
+      <p:bgPr>
+        <a:solidFill>
+          <a:srgbClr val="FFFFFF"/>
+        </a:solidFill>
+        <a:effectLst/>
+      </p:bgPr>
+    </p:bg>
+    <p:spTree>
+      <p:nvGrpSpPr>
+        <p:cNvPr id="1" name="">
+          <a:extLst>
+            <a:ext uri="{FF2B5EF4-FFF2-40B4-BE49-F238E27FC236}">
+              <a16:creationId xmlns:a16="http://schemas.microsoft.com/office/drawing/2014/main" id="{BD60E0F1-F9B6-985B-2FEE-9DD5E57CA647}"/>
+            </a:ext>
+          </a:extLst>
+        </p:cNvPr>
+        <p:cNvGrpSpPr/>
+        <p:nvPr/>
+      </p:nvGrpSpPr>
+      <p:grpSpPr>
+        <a:xfrm>
+          <a:off x="0" y="0"/>
+          <a:ext cx="0" cy="0"/>
+          <a:chOff x="0" y="0"/>
+          <a:chExt cx="0" cy="0"/>
+        </a:xfrm>
+      </p:grpSpPr>
+      <p:sp>
+        <p:nvSpPr>
+          <p:cNvPr id="2" name="TextBox 1">
+            <a:extLst>
+              <a:ext uri="{FF2B5EF4-FFF2-40B4-BE49-F238E27FC236}">
+                <a16:creationId xmlns:a16="http://schemas.microsoft.com/office/drawing/2014/main" id="{5049D6CE-E4DF-74D9-5B8D-4EC52BA2D3FF}"/>
+              </a:ext>
+            </a:extLst>
+          </p:cNvPr>
+          <p:cNvSpPr txBox="1"/>
+          <p:nvPr/>
+        </p:nvSpPr>
+        <p:spPr>
+          <a:xfrm>
+            <a:off x="548640" y="365760"/>
+            <a:ext cx="10972800" cy="731520"/>
+          </a:xfrm>
+          <a:prstGeom prst="rect">
+            <a:avLst/>
+          </a:prstGeom>
+          <a:noFill/>
+        </p:spPr>
+        <p:txBody>
+          <a:bodyPr wrap="none">
+            <a:spAutoFit/>
+          </a:bodyPr>
+          <a:lstStyle/>
+          <a:p>
+            <a:r>
+              <a:rPr sz="2400" b="1">
+                <a:solidFill>
+                  <a:srgbClr val="141820"/>
+                </a:solidFill>
+                <a:latin typeface="Leelawadee UI"/>
+              </a:rPr>
+              <a:t>นิยามปัญหาและวัตถุประสงค์</a:t>
+            </a:r>
+          </a:p>
+        </p:txBody>
+      </p:sp>
+      <p:sp>
+        <p:nvSpPr>
+          <p:cNvPr id="3" name="Rectangle 2">
+            <a:extLst>
+              <a:ext uri="{FF2B5EF4-FFF2-40B4-BE49-F238E27FC236}">
+                <a16:creationId xmlns:a16="http://schemas.microsoft.com/office/drawing/2014/main" id="{D7A04608-93EA-5AC8-C89C-4F5BCE1AB400}"/>
+              </a:ext>
+            </a:extLst>
+          </p:cNvPr>
+          <p:cNvSpPr/>
+          <p:nvPr/>
+        </p:nvSpPr>
+        <p:spPr>
+          <a:xfrm>
+            <a:off x="548640" y="1060704"/>
+            <a:ext cx="2103120" cy="54864"/>
+          </a:xfrm>
+          <a:prstGeom prst="rect">
+            <a:avLst/>
+          </a:prstGeom>
+          <a:solidFill>
+            <a:srgbClr val="006D77"/>
+          </a:solidFill>
+          <a:ln>
+            <a:noFill/>
+          </a:ln>
+        </p:spPr>
+        <p:style>
+          <a:lnRef idx="1">
+            <a:schemeClr val="accent1"/>
+          </a:lnRef>
+          <a:fillRef idx="3">
+            <a:schemeClr val="accent1"/>
+          </a:fillRef>
+          <a:effectRef idx="2">
+            <a:schemeClr val="accent1"/>
+          </a:effectRef>
+          <a:fontRef idx="minor">
+            <a:schemeClr val="lt1"/>
+          </a:fontRef>
+        </p:style>
+        <p:txBody>
+          <a:bodyPr rtlCol="0" anchor="ctr"/>
+          <a:lstStyle/>
+          <a:p>
+            <a:pPr algn="ctr"/>
+            <a:endParaRPr/>
+          </a:p>
+        </p:txBody>
+      </p:sp>
+      <p:sp>
+        <p:nvSpPr>
+          <p:cNvPr id="4" name="TextBox 3">
+            <a:extLst>
+              <a:ext uri="{FF2B5EF4-FFF2-40B4-BE49-F238E27FC236}">
+                <a16:creationId xmlns:a16="http://schemas.microsoft.com/office/drawing/2014/main" id="{BC425000-EC5B-F211-3EF7-817EE9A2BC18}"/>
+              </a:ext>
+            </a:extLst>
+          </p:cNvPr>
+          <p:cNvSpPr txBox="1"/>
+          <p:nvPr/>
+        </p:nvSpPr>
+        <p:spPr>
+          <a:xfrm>
+            <a:off x="548640" y="1170432"/>
+            <a:ext cx="10972800" cy="411480"/>
+          </a:xfrm>
+          <a:prstGeom prst="rect">
+            <a:avLst/>
+          </a:prstGeom>
+          <a:noFill/>
+        </p:spPr>
+        <p:txBody>
+          <a:bodyPr wrap="none">
+            <a:spAutoFit/>
+          </a:bodyPr>
+          <a:lstStyle/>
+          <a:p>
+            <a:r>
+              <a:rPr sz="1100">
+                <a:solidFill>
+                  <a:srgbClr val="687484"/>
+                </a:solidFill>
+                <a:latin typeface="Leelawadee UI"/>
+              </a:rPr>
+              <a:t>ครอบคลุม rubric ส่วน problem definition, baseline/proposed และเป้าหมายเชิงวิศวกรรม</a:t>
+            </a:r>
+          </a:p>
+        </p:txBody>
+      </p:sp>
+      <p:sp>
+        <p:nvSpPr>
+          <p:cNvPr id="6" name="TextBox 5">
+            <a:extLst>
+              <a:ext uri="{FF2B5EF4-FFF2-40B4-BE49-F238E27FC236}">
+                <a16:creationId xmlns:a16="http://schemas.microsoft.com/office/drawing/2014/main" id="{5B31B9FE-D93C-3B00-8D47-297D2D977F0B}"/>
+              </a:ext>
+            </a:extLst>
+          </p:cNvPr>
+          <p:cNvSpPr txBox="1"/>
+          <p:nvPr/>
+        </p:nvSpPr>
+        <p:spPr>
+          <a:xfrm>
+            <a:off x="457200" y="1581912"/>
+            <a:ext cx="3749039" cy="646331"/>
+          </a:xfrm>
+          <a:prstGeom prst="rect">
+            <a:avLst/>
+          </a:prstGeom>
+          <a:noFill/>
+        </p:spPr>
+        <p:txBody>
+          <a:bodyPr wrap="square" anchor="t">
+            <a:spAutoFit/>
+          </a:bodyPr>
+          <a:lstStyle/>
+          <a:p>
+            <a:r>
+              <a:rPr lang="th-TH" b="1" dirty="0">
+                <a:solidFill>
+                  <a:srgbClr val="006D77"/>
+                </a:solidFill>
+                <a:latin typeface="Leelawadee UI"/>
+              </a:rPr>
+              <a:t>เกี่ยวข้องกับ </a:t>
+            </a:r>
+            <a:r>
+              <a:rPr lang="en-US" sz="1800" b="1" dirty="0">
+                <a:solidFill>
+                  <a:srgbClr val="006D77"/>
+                </a:solidFill>
+                <a:latin typeface="Leelawadee UI"/>
+              </a:rPr>
+              <a:t>Computer Animation</a:t>
+            </a:r>
+            <a:r>
+              <a:rPr lang="th-TH" sz="1800" b="1" dirty="0">
+                <a:solidFill>
+                  <a:srgbClr val="006D77"/>
+                </a:solidFill>
+                <a:latin typeface="Leelawadee UI"/>
+              </a:rPr>
+              <a:t> อย่างไร</a:t>
+            </a:r>
+            <a:endParaRPr sz="1800" b="1" dirty="0">
+              <a:solidFill>
+                <a:srgbClr val="006D77"/>
+              </a:solidFill>
+              <a:latin typeface="Leelawadee UI"/>
+            </a:endParaRPr>
+          </a:p>
+        </p:txBody>
+      </p:sp>
+      <p:sp>
+        <p:nvSpPr>
+          <p:cNvPr id="11" name="TextBox 10">
+            <a:extLst>
+              <a:ext uri="{FF2B5EF4-FFF2-40B4-BE49-F238E27FC236}">
+                <a16:creationId xmlns:a16="http://schemas.microsoft.com/office/drawing/2014/main" id="{96F21A76-057F-716E-8022-7797B8E67B3A}"/>
+              </a:ext>
+            </a:extLst>
+          </p:cNvPr>
+          <p:cNvSpPr txBox="1"/>
+          <p:nvPr/>
+        </p:nvSpPr>
+        <p:spPr>
+          <a:xfrm>
+            <a:off x="548640" y="2341295"/>
+            <a:ext cx="10552176" cy="3303468"/>
+          </a:xfrm>
+          <a:prstGeom prst="rect">
+            <a:avLst/>
+          </a:prstGeom>
+          <a:noFill/>
+        </p:spPr>
+        <p:txBody>
+          <a:bodyPr wrap="square">
+            <a:spAutoFit/>
+          </a:bodyPr>
+          <a:lstStyle/>
+          <a:p>
+            <a:pPr marL="285750" indent="-285750">
+              <a:spcAft>
+                <a:spcPts val="800"/>
+              </a:spcAft>
+              <a:buFont typeface="Arial" panose="020B0604020202020204" pitchFamily="34" charset="0"/>
+              <a:buChar char="•"/>
+              <a:defRPr sz="1800">
+                <a:solidFill>
+                  <a:srgbClr val="323A46"/>
+                </a:solidFill>
+                <a:latin typeface="Leelawadee UI"/>
+              </a:defRPr>
+            </a:pPr>
+            <a:r>
+              <a:rPr lang="th-TH" dirty="0"/>
+              <a:t>มองร่างกายผู้ใช้เป็นโครงสร้างแบบ </a:t>
+            </a:r>
+            <a:r>
+              <a:rPr lang="en-US" dirty="0"/>
+              <a:t>skeleton </a:t>
+            </a:r>
+            <a:r>
+              <a:rPr lang="th-TH" dirty="0"/>
+              <a:t>ที่มีข้อต่อสำคัญ เช่น ไหล่ ศอก และข้อมือ</a:t>
+            </a:r>
+          </a:p>
+          <a:p>
+            <a:pPr marL="285750" indent="-285750">
+              <a:spcAft>
+                <a:spcPts val="800"/>
+              </a:spcAft>
+              <a:buFont typeface="Arial" panose="020B0604020202020204" pitchFamily="34" charset="0"/>
+              <a:buChar char="•"/>
+              <a:defRPr sz="1800">
+                <a:solidFill>
+                  <a:srgbClr val="323A46"/>
+                </a:solidFill>
+                <a:latin typeface="Leelawadee UI"/>
+              </a:defRPr>
+            </a:pPr>
+            <a:r>
+              <a:rPr lang="th-TH" dirty="0"/>
+              <a:t>ติดตามการเปลี่ยนของ </a:t>
+            </a:r>
+            <a:r>
+              <a:rPr lang="en-US" dirty="0"/>
+              <a:t>pose </a:t>
+            </a:r>
+            <a:r>
+              <a:rPr lang="th-TH" dirty="0"/>
+              <a:t>ตามเวลา เหมือนงาน </a:t>
+            </a:r>
+            <a:r>
+              <a:rPr lang="en-US" dirty="0"/>
+              <a:t>motion analysis</a:t>
+            </a:r>
+          </a:p>
+          <a:p>
+            <a:pPr marL="285750" indent="-285750">
+              <a:spcAft>
+                <a:spcPts val="800"/>
+              </a:spcAft>
+              <a:buFont typeface="Arial" panose="020B0604020202020204" pitchFamily="34" charset="0"/>
+              <a:buChar char="•"/>
+              <a:defRPr sz="1800">
+                <a:solidFill>
+                  <a:srgbClr val="323A46"/>
+                </a:solidFill>
+                <a:latin typeface="Leelawadee UI"/>
+              </a:defRPr>
+            </a:pPr>
+            <a:r>
+              <a:rPr lang="th-TH" dirty="0"/>
+              <a:t>แปลงการเคลื่อนไหวเป็น </a:t>
+            </a:r>
+            <a:r>
+              <a:rPr lang="en-US" dirty="0"/>
+              <a:t>key poses, stage transitions </a:t>
+            </a:r>
+            <a:r>
+              <a:rPr lang="th-TH" dirty="0"/>
+              <a:t>และ </a:t>
+            </a:r>
+            <a:r>
+              <a:rPr lang="en-US" dirty="0"/>
+              <a:t>progress </a:t>
+            </a:r>
+            <a:r>
+              <a:rPr lang="th-TH" dirty="0"/>
+              <a:t>ของท่า</a:t>
+            </a:r>
+          </a:p>
+          <a:p>
+            <a:pPr marL="285750" indent="-285750">
+              <a:spcAft>
+                <a:spcPts val="800"/>
+              </a:spcAft>
+              <a:buFont typeface="Arial" panose="020B0604020202020204" pitchFamily="34" charset="0"/>
+              <a:buChar char="•"/>
+              <a:defRPr sz="1800">
+                <a:solidFill>
+                  <a:srgbClr val="323A46"/>
+                </a:solidFill>
+                <a:latin typeface="Leelawadee UI"/>
+              </a:defRPr>
+            </a:pPr>
+            <a:r>
+              <a:rPr lang="th-TH" dirty="0"/>
+              <a:t>เชื่อมโยงกับ </a:t>
+            </a:r>
+            <a:r>
+              <a:rPr lang="en-US" dirty="0" err="1"/>
+              <a:t>markerless</a:t>
+            </a:r>
+            <a:r>
+              <a:rPr lang="en-US" dirty="0"/>
+              <a:t> motion capture </a:t>
+            </a:r>
+            <a:r>
+              <a:rPr lang="th-TH" dirty="0"/>
+              <a:t>เพราะใช้กล้องและ </a:t>
+            </a:r>
+            <a:r>
+              <a:rPr lang="en-US" dirty="0"/>
+              <a:t>pose landmarks </a:t>
+            </a:r>
+            <a:r>
+              <a:rPr lang="th-TH" dirty="0"/>
+              <a:t>แทน </a:t>
+            </a:r>
+            <a:r>
+              <a:rPr lang="en-US" dirty="0"/>
+              <a:t>marker </a:t>
+            </a:r>
+            <a:r>
+              <a:rPr lang="th-TH" dirty="0"/>
+              <a:t>จริง</a:t>
+            </a:r>
+          </a:p>
+          <a:p>
+            <a:pPr marL="285750" indent="-285750">
+              <a:spcAft>
+                <a:spcPts val="800"/>
+              </a:spcAft>
+              <a:buFont typeface="Arial" panose="020B0604020202020204" pitchFamily="34" charset="0"/>
+              <a:buChar char="•"/>
+              <a:defRPr sz="1800">
+                <a:solidFill>
+                  <a:srgbClr val="323A46"/>
+                </a:solidFill>
+                <a:latin typeface="Leelawadee UI"/>
+              </a:defRPr>
+            </a:pPr>
+            <a:r>
+              <a:rPr lang="th-TH" dirty="0"/>
+              <a:t>ให้ความสำคัญกับ </a:t>
+            </a:r>
+            <a:r>
+              <a:rPr lang="en-US" dirty="0"/>
+              <a:t>temporal stability </a:t>
+            </a:r>
+            <a:r>
+              <a:rPr lang="th-TH" dirty="0"/>
+              <a:t>และ </a:t>
+            </a:r>
+            <a:r>
+              <a:rPr lang="en-US" dirty="0"/>
+              <a:t>jitter reduction </a:t>
+            </a:r>
+            <a:r>
+              <a:rPr lang="th-TH" dirty="0"/>
+              <a:t>เพื่อให้ </a:t>
+            </a:r>
+            <a:r>
+              <a:rPr lang="en-US" dirty="0"/>
+              <a:t>motion tracking </a:t>
+            </a:r>
+            <a:r>
+              <a:rPr lang="th-TH" dirty="0"/>
+              <a:t>นิ่งขึ้น</a:t>
+            </a:r>
+          </a:p>
+          <a:p>
+            <a:pPr marL="285750" indent="-285750">
+              <a:spcAft>
+                <a:spcPts val="800"/>
+              </a:spcAft>
+              <a:buFont typeface="Arial" panose="020B0604020202020204" pitchFamily="34" charset="0"/>
+              <a:buChar char="•"/>
+              <a:defRPr sz="1800">
+                <a:solidFill>
+                  <a:srgbClr val="323A46"/>
+                </a:solidFill>
+                <a:latin typeface="Leelawadee UI"/>
+              </a:defRPr>
+            </a:pPr>
+            <a:r>
+              <a:rPr lang="th-TH" dirty="0"/>
+              <a:t>มีการเปรียบเทียบ </a:t>
+            </a:r>
+            <a:r>
+              <a:rPr lang="en-US" dirty="0"/>
+              <a:t>baseline </a:t>
+            </a:r>
+            <a:r>
+              <a:rPr lang="th-TH" dirty="0"/>
+              <a:t>กับ </a:t>
+            </a:r>
+            <a:r>
+              <a:rPr lang="en-US" dirty="0"/>
+              <a:t>proposed </a:t>
+            </a:r>
+            <a:r>
+              <a:rPr lang="th-TH" dirty="0"/>
+              <a:t>แบบงาน </a:t>
+            </a:r>
+            <a:r>
+              <a:rPr lang="en-US" dirty="0"/>
+              <a:t>animation systems </a:t>
+            </a:r>
+            <a:r>
+              <a:rPr lang="th-TH" dirty="0"/>
+              <a:t>และ </a:t>
+            </a:r>
+            <a:r>
+              <a:rPr lang="en-US" dirty="0"/>
+              <a:t>engineering experiment</a:t>
+            </a:r>
+          </a:p>
+          <a:p>
+            <a:pPr marL="285750" indent="-285750">
+              <a:spcAft>
+                <a:spcPts val="800"/>
+              </a:spcAft>
+              <a:buFont typeface="Arial" panose="020B0604020202020204" pitchFamily="34" charset="0"/>
+              <a:buChar char="•"/>
+              <a:defRPr sz="1800">
+                <a:solidFill>
+                  <a:srgbClr val="323A46"/>
+                </a:solidFill>
+                <a:latin typeface="Leelawadee UI"/>
+              </a:defRPr>
+            </a:pPr>
+            <a:r>
+              <a:rPr lang="th-TH" dirty="0"/>
+              <a:t>ดังนั้นแม้จะเป็นเว็บออกกำลังกาย แต่แก่นของ</a:t>
+            </a:r>
+            <a:r>
+              <a:rPr lang="th-TH" dirty="0" err="1"/>
+              <a:t>โปรเจกต์</a:t>
+            </a:r>
+            <a:r>
+              <a:rPr lang="th-TH" dirty="0"/>
+              <a:t>คือ </a:t>
+            </a:r>
+            <a:r>
+              <a:rPr lang="en-US" dirty="0"/>
+              <a:t>real-time motion interpretation </a:t>
+            </a:r>
+            <a:r>
+              <a:rPr lang="th-TH" dirty="0"/>
+              <a:t>ซึ่งอยู่ในสาย </a:t>
+            </a:r>
+            <a:r>
+              <a:rPr lang="en-US" dirty="0"/>
+              <a:t>Computer Animation </a:t>
+            </a:r>
+            <a:r>
+              <a:rPr lang="th-TH" dirty="0"/>
+              <a:t>โดยตรง</a:t>
+            </a:r>
+          </a:p>
+          <a:p>
+            <a:pPr marL="285750" indent="-285750">
+              <a:spcAft>
+                <a:spcPts val="800"/>
+              </a:spcAft>
+              <a:buFont typeface="Arial" panose="020B0604020202020204" pitchFamily="34" charset="0"/>
+              <a:buChar char="•"/>
+              <a:defRPr sz="1800">
+                <a:solidFill>
+                  <a:srgbClr val="323A46"/>
+                </a:solidFill>
+                <a:latin typeface="Leelawadee UI"/>
+              </a:defRPr>
+            </a:pPr>
+            <a:endParaRPr lang="th-TH" dirty="0"/>
+          </a:p>
+        </p:txBody>
+      </p:sp>
+    </p:spTree>
+    <p:extLst>
+      <p:ext uri="{BB962C8B-B14F-4D97-AF65-F5344CB8AC3E}">
+        <p14:creationId xmlns:p14="http://schemas.microsoft.com/office/powerpoint/2010/main" val="3018895889"/>
+      </p:ext>
+    </p:extLst>
+  </p:cSld>
+  <p:clrMapOvr>
+    <a:masterClrMapping/>
+  </p:clrMapOvr>
+</p:sld>
+</file>
+
+<file path=ppt/slides/slide4.xml><?xml version="1.0" encoding="utf-8"?>
+<p:sld xmlns:a="http://schemas.openxmlformats.org/drawingml/2006/main" xmlns:r="http://schemas.openxmlformats.org/officeDocument/2006/relationships" xmlns:p="http://schemas.openxmlformats.org/presentationml/2006/main">
+  <p:cSld>
+    <p:bg>
+      <p:bgPr>
+        <a:solidFill>
+          <a:srgbClr val="FFFFFF"/>
+        </a:solidFill>
+        <a:effectLst/>
+      </p:bgPr>
+    </p:bg>
+    <p:spTree>
+      <p:nvGrpSpPr>
+        <p:cNvPr id="1" name=""/>
+        <p:cNvGrpSpPr/>
+        <p:nvPr/>
+      </p:nvGrpSpPr>
+      <p:grpSpPr>
+        <a:xfrm>
+          <a:off x="0" y="0"/>
+          <a:ext cx="0" cy="0"/>
+          <a:chOff x="0" y="0"/>
+          <a:chExt cx="0" cy="0"/>
+        </a:xfrm>
+      </p:grpSpPr>
+      <p:sp>
+        <p:nvSpPr>
+          <p:cNvPr id="2" name="TextBox 1"/>
+          <p:cNvSpPr txBox="1"/>
+          <p:nvPr/>
+        </p:nvSpPr>
+        <p:spPr>
+          <a:xfrm>
+            <a:off x="548640" y="365760"/>
+            <a:ext cx="10972800" cy="731520"/>
+          </a:xfrm>
+          <a:prstGeom prst="rect">
+            <a:avLst/>
+          </a:prstGeom>
+          <a:noFill/>
+        </p:spPr>
+        <p:txBody>
+          <a:bodyPr wrap="none">
+            <a:spAutoFit/>
+          </a:bodyPr>
+          <a:lstStyle/>
+          <a:p>
+            <a:r>
+              <a:rPr sz="2400" b="1">
+                <a:solidFill>
+                  <a:srgbClr val="141820"/>
+                </a:solidFill>
+                <a:latin typeface="Leelawadee UI"/>
+              </a:rPr>
+              <a:t>นิยามปัญหาเชิงรูปนัย</a:t>
+            </a:r>
+          </a:p>
+        </p:txBody>
+      </p:sp>
+      <p:sp>
+        <p:nvSpPr>
+          <p:cNvPr id="3" name="Rectangle 2"/>
+          <p:cNvSpPr/>
+          <p:nvPr/>
+        </p:nvSpPr>
+        <p:spPr>
+          <a:xfrm>
+            <a:off x="548640" y="1060704"/>
+            <a:ext cx="2103120" cy="54864"/>
+          </a:xfrm>
+          <a:prstGeom prst="rect">
+            <a:avLst/>
+          </a:prstGeom>
+          <a:solidFill>
+            <a:srgbClr val="006D77"/>
+          </a:solidFill>
+          <a:ln>
+            <a:noFill/>
+          </a:ln>
+        </p:spPr>
+        <p:style>
+          <a:lnRef idx="1">
+            <a:schemeClr val="accent1"/>
+          </a:lnRef>
+          <a:fillRef idx="3">
+            <a:schemeClr val="accent1"/>
+          </a:fillRef>
+          <a:effectRef idx="2">
+            <a:schemeClr val="accent1"/>
+          </a:effectRef>
+          <a:fontRef idx="minor">
+            <a:schemeClr val="lt1"/>
+          </a:fontRef>
+        </p:style>
+        <p:txBody>
+          <a:bodyPr rtlCol="0" anchor="ctr"/>
+          <a:lstStyle/>
+          <a:p>
+            <a:pPr algn="ctr"/>
+            <a:endParaRPr/>
+          </a:p>
+        </p:txBody>
+      </p:sp>
+      <p:sp>
+        <p:nvSpPr>
+          <p:cNvPr id="4" name="TextBox 3"/>
+          <p:cNvSpPr txBox="1"/>
+          <p:nvPr/>
+        </p:nvSpPr>
+        <p:spPr>
+          <a:xfrm>
+            <a:off x="609600" y="1737360"/>
+            <a:ext cx="5928360" cy="3098284"/>
+          </a:xfrm>
+          <a:prstGeom prst="rect">
+            <a:avLst/>
+          </a:prstGeom>
+          <a:noFill/>
+        </p:spPr>
+        <p:txBody>
+          <a:bodyPr wrap="square" lIns="0">
+            <a:spAutoFit/>
+          </a:bodyPr>
+          <a:lstStyle/>
+          <a:p>
+            <a:pPr marL="285750" indent="-285750">
+              <a:spcAft>
+                <a:spcPts val="800"/>
+              </a:spcAft>
+              <a:buFont typeface="Arial" panose="020B0604020202020204" pitchFamily="34" charset="0"/>
+              <a:buChar char="•"/>
+              <a:defRPr sz="1800">
+                <a:solidFill>
+                  <a:srgbClr val="323A46"/>
+                </a:solidFill>
+                <a:latin typeface="Leelawadee UI"/>
+              </a:defRPr>
+            </a:pPr>
+            <a:r>
+              <a:rPr dirty="0"/>
+              <a:t>Input: </a:t>
+            </a:r>
+            <a:r>
+              <a:rPr lang="th-TH" dirty="0"/>
+              <a:t>รับภาพจากกล้อง</a:t>
+            </a:r>
+            <a:r>
+              <a:rPr lang="en-US" dirty="0"/>
+              <a:t> -&gt; </a:t>
+            </a:r>
+            <a:r>
+              <a:rPr lang="th-TH" dirty="0"/>
+              <a:t>ใช้ </a:t>
+            </a:r>
+            <a:r>
+              <a:rPr lang="en-US" dirty="0"/>
+              <a:t>pose estimation </a:t>
+            </a:r>
+            <a:r>
+              <a:rPr lang="th-TH" dirty="0"/>
+              <a:t>หา </a:t>
+            </a:r>
+            <a:r>
+              <a:rPr lang="en-US" dirty="0"/>
+              <a:t>landmark </a:t>
+            </a:r>
+            <a:r>
+              <a:rPr lang="th-TH" dirty="0"/>
+              <a:t>ของข้อต่อ</a:t>
+            </a:r>
+            <a:r>
+              <a:rPr lang="en-US" dirty="0"/>
+              <a:t>, </a:t>
+            </a:r>
+            <a:r>
+              <a:rPr lang="th-TH" dirty="0"/>
+              <a:t>คำนวณมุมและติดตาม </a:t>
+            </a:r>
+            <a:r>
+              <a:rPr lang="en-US" dirty="0"/>
+              <a:t>motion over time</a:t>
+            </a:r>
+          </a:p>
+          <a:p>
+            <a:pPr marL="285750" indent="-285750">
+              <a:spcAft>
+                <a:spcPts val="800"/>
+              </a:spcAft>
+              <a:buFont typeface="Arial" panose="020B0604020202020204" pitchFamily="34" charset="0"/>
+              <a:buChar char="•"/>
+              <a:defRPr sz="1800">
+                <a:solidFill>
+                  <a:srgbClr val="323A46"/>
+                </a:solidFill>
+                <a:latin typeface="Leelawadee UI"/>
+              </a:defRPr>
+            </a:pPr>
+            <a:r>
+              <a:rPr dirty="0"/>
+              <a:t>Output: </a:t>
+            </a:r>
+            <a:r>
+              <a:rPr dirty="0" err="1"/>
+              <a:t>จำนวนครั้ง</a:t>
+            </a:r>
+            <a:r>
+              <a:rPr dirty="0"/>
+              <a:t>, stage </a:t>
+            </a:r>
+            <a:r>
+              <a:rPr dirty="0" err="1"/>
+              <a:t>ปัจจุบัน</a:t>
+            </a:r>
+            <a:r>
+              <a:rPr dirty="0"/>
+              <a:t>, progress percentage </a:t>
+            </a:r>
+            <a:r>
+              <a:rPr dirty="0" err="1"/>
+              <a:t>และภาพ</a:t>
+            </a:r>
+            <a:r>
+              <a:rPr dirty="0"/>
+              <a:t> visualization</a:t>
+            </a:r>
+          </a:p>
+          <a:p>
+            <a:pPr marL="285750" indent="-285750">
+              <a:spcAft>
+                <a:spcPts val="800"/>
+              </a:spcAft>
+              <a:buFont typeface="Arial" panose="020B0604020202020204" pitchFamily="34" charset="0"/>
+              <a:buChar char="•"/>
+              <a:defRPr sz="1800">
+                <a:solidFill>
+                  <a:srgbClr val="323A46"/>
+                </a:solidFill>
+                <a:latin typeface="Leelawadee UI"/>
+              </a:defRPr>
+            </a:pPr>
+            <a:r>
+              <a:rPr dirty="0"/>
+              <a:t>Constraints: </a:t>
+            </a:r>
+            <a:r>
+              <a:rPr dirty="0" err="1"/>
+              <a:t>ต้องตอบสนองแบบ</a:t>
+            </a:r>
+            <a:r>
+              <a:rPr dirty="0"/>
+              <a:t> interactive, </a:t>
+            </a:r>
+            <a:r>
+              <a:rPr dirty="0" err="1"/>
+              <a:t>ทนต่อ</a:t>
+            </a:r>
+            <a:r>
+              <a:rPr dirty="0"/>
+              <a:t> occlusion, </a:t>
+            </a:r>
+            <a:r>
+              <a:rPr dirty="0" err="1"/>
+              <a:t>ลด</a:t>
+            </a:r>
+            <a:r>
+              <a:rPr dirty="0"/>
+              <a:t> threshold chatter </a:t>
+            </a:r>
+            <a:r>
+              <a:rPr dirty="0" err="1"/>
+              <a:t>และทำงานได้แบบ</a:t>
+            </a:r>
+            <a:r>
+              <a:rPr dirty="0"/>
+              <a:t> deterministic</a:t>
+            </a:r>
+          </a:p>
+          <a:p>
+            <a:pPr marL="285750" indent="-285750">
+              <a:spcAft>
+                <a:spcPts val="800"/>
+              </a:spcAft>
+              <a:buFont typeface="Arial" panose="020B0604020202020204" pitchFamily="34" charset="0"/>
+              <a:buChar char="•"/>
+              <a:defRPr sz="1800">
+                <a:solidFill>
+                  <a:srgbClr val="323A46"/>
+                </a:solidFill>
+                <a:latin typeface="Leelawadee UI"/>
+              </a:defRPr>
+            </a:pPr>
+            <a:r>
+              <a:rPr dirty="0" err="1"/>
+              <a:t>ความท้าทาย</a:t>
+            </a:r>
+            <a:r>
+              <a:rPr dirty="0"/>
+              <a:t> 1: </a:t>
+            </a:r>
+            <a:r>
+              <a:rPr dirty="0" err="1"/>
+              <a:t>จุดกลับตัวของท่ามี</a:t>
+            </a:r>
+            <a:r>
+              <a:rPr dirty="0"/>
+              <a:t> noise </a:t>
+            </a:r>
+            <a:r>
+              <a:rPr dirty="0" err="1"/>
+              <a:t>ทำให้เกิดนับซ้ำหรือหลุดนับ</a:t>
+            </a:r>
+            <a:endParaRPr dirty="0"/>
+          </a:p>
+          <a:p>
+            <a:pPr marL="285750" indent="-285750">
+              <a:spcAft>
+                <a:spcPts val="800"/>
+              </a:spcAft>
+              <a:buFont typeface="Arial" panose="020B0604020202020204" pitchFamily="34" charset="0"/>
+              <a:buChar char="•"/>
+              <a:defRPr sz="1800">
+                <a:solidFill>
+                  <a:srgbClr val="323A46"/>
+                </a:solidFill>
+                <a:latin typeface="Leelawadee UI"/>
+              </a:defRPr>
+            </a:pPr>
+            <a:r>
+              <a:rPr dirty="0" err="1"/>
+              <a:t>ความท้าทาย</a:t>
+            </a:r>
+            <a:r>
+              <a:rPr dirty="0"/>
+              <a:t> 2: </a:t>
+            </a:r>
+            <a:r>
+              <a:rPr dirty="0" err="1"/>
+              <a:t>การสลับเลือกแขนซ้ายขวาบ่อยเกินไปทำให้การตีความ</a:t>
+            </a:r>
+            <a:r>
+              <a:rPr dirty="0"/>
+              <a:t> motion </a:t>
+            </a:r>
+            <a:r>
+              <a:rPr dirty="0" err="1"/>
+              <a:t>ไม่นิ่ง</a:t>
+            </a:r>
+            <a:endParaRPr dirty="0"/>
+          </a:p>
+          <a:p>
+            <a:pPr marL="285750" indent="-285750">
+              <a:spcAft>
+                <a:spcPts val="800"/>
+              </a:spcAft>
+              <a:buFont typeface="Arial" panose="020B0604020202020204" pitchFamily="34" charset="0"/>
+              <a:buChar char="•"/>
+              <a:defRPr sz="1800">
+                <a:solidFill>
+                  <a:srgbClr val="323A46"/>
+                </a:solidFill>
+                <a:latin typeface="Leelawadee UI"/>
+              </a:defRPr>
+            </a:pPr>
+            <a:r>
+              <a:rPr dirty="0" err="1"/>
+              <a:t>ความท้าทาย</a:t>
+            </a:r>
+            <a:r>
+              <a:rPr dirty="0"/>
+              <a:t> 3: </a:t>
+            </a:r>
+            <a:r>
+              <a:rPr dirty="0" err="1"/>
+              <a:t>ต้องทำให้</a:t>
+            </a:r>
+            <a:r>
+              <a:rPr dirty="0"/>
+              <a:t> feedback </a:t>
+            </a:r>
+            <a:r>
+              <a:rPr dirty="0" err="1"/>
+              <a:t>เข้าใจง่ายสำหรับผู้ใช้แบบ</a:t>
+            </a:r>
+            <a:r>
+              <a:rPr dirty="0"/>
+              <a:t> real-time</a:t>
+            </a:r>
+          </a:p>
+        </p:txBody>
+      </p:sp>
+      <p:sp>
+        <p:nvSpPr>
+          <p:cNvPr id="5" name="TextBox 4"/>
+          <p:cNvSpPr txBox="1"/>
+          <p:nvPr/>
+        </p:nvSpPr>
+        <p:spPr>
+          <a:xfrm>
+            <a:off x="6922008" y="1714499"/>
+            <a:ext cx="3200400" cy="274320"/>
+          </a:xfrm>
+          <a:prstGeom prst="rect">
+            <a:avLst/>
+          </a:prstGeom>
+          <a:noFill/>
+        </p:spPr>
+        <p:txBody>
+          <a:bodyPr wrap="square" anchor="t">
+            <a:spAutoFit/>
+          </a:bodyPr>
+          <a:lstStyle/>
+          <a:p>
+            <a:r>
+              <a:rPr sz="1800" b="1" dirty="0">
+                <a:solidFill>
+                  <a:srgbClr val="006D77"/>
+                </a:solidFill>
+                <a:latin typeface="Leelawadee UI"/>
+              </a:rPr>
+              <a:t>Motion Primitive </a:t>
+            </a:r>
+            <a:r>
+              <a:rPr sz="1800" b="1" dirty="0" err="1">
+                <a:solidFill>
+                  <a:srgbClr val="006D77"/>
+                </a:solidFill>
+                <a:latin typeface="Leelawadee UI"/>
+              </a:rPr>
+              <a:t>ที่ใช้</a:t>
+            </a:r>
+            <a:r>
+              <a:rPr sz="1800" b="1" dirty="0">
+                <a:solidFill>
+                  <a:srgbClr val="006D77"/>
+                </a:solidFill>
+                <a:latin typeface="Leelawadee UI"/>
+              </a:rPr>
+              <a:t> benchmark</a:t>
+            </a:r>
+          </a:p>
+        </p:txBody>
+      </p:sp>
+      <p:sp>
+        <p:nvSpPr>
+          <p:cNvPr id="6" name="TextBox 5"/>
+          <p:cNvSpPr txBox="1"/>
+          <p:nvPr/>
+        </p:nvSpPr>
+        <p:spPr>
+          <a:xfrm>
+            <a:off x="6922008" y="2450590"/>
+            <a:ext cx="4663440" cy="1554480"/>
+          </a:xfrm>
+          <a:prstGeom prst="rect">
+            <a:avLst/>
+          </a:prstGeom>
+          <a:noFill/>
+        </p:spPr>
+        <p:txBody>
+          <a:bodyPr wrap="square" anchor="t">
+            <a:spAutoFit/>
+          </a:bodyPr>
+          <a:lstStyle/>
+          <a:p>
+            <a:r>
+              <a:rPr sz="1700" b="0" dirty="0" err="1">
+                <a:solidFill>
+                  <a:srgbClr val="323A46"/>
+                </a:solidFill>
+                <a:latin typeface="Leelawadee UI"/>
+              </a:rPr>
+              <a:t>ใช้ท่า</a:t>
+            </a:r>
+            <a:r>
+              <a:rPr sz="1700" b="0" dirty="0">
+                <a:solidFill>
+                  <a:srgbClr val="323A46"/>
+                </a:solidFill>
+                <a:latin typeface="Leelawadee UI"/>
+              </a:rPr>
+              <a:t> bicep curl </a:t>
+            </a:r>
+            <a:r>
+              <a:rPr sz="1700" b="0" dirty="0" err="1">
+                <a:solidFill>
+                  <a:srgbClr val="323A46"/>
+                </a:solidFill>
+                <a:latin typeface="Leelawadee UI"/>
+              </a:rPr>
+              <a:t>เป็นตัวแทนของ</a:t>
+            </a:r>
+            <a:r>
+              <a:rPr sz="1700" b="0" dirty="0">
+                <a:solidFill>
+                  <a:srgbClr val="323A46"/>
+                </a:solidFill>
+                <a:latin typeface="Leelawadee UI"/>
+              </a:rPr>
+              <a:t> articulated motion primitive </a:t>
+            </a:r>
+            <a:r>
+              <a:rPr sz="1700" b="0" dirty="0" err="1">
+                <a:solidFill>
+                  <a:srgbClr val="323A46"/>
+                </a:solidFill>
+                <a:latin typeface="Leelawadee UI"/>
+              </a:rPr>
+              <a:t>สำหรับวัด</a:t>
+            </a:r>
+            <a:r>
+              <a:rPr sz="1700" b="0" dirty="0">
+                <a:solidFill>
+                  <a:srgbClr val="323A46"/>
+                </a:solidFill>
+                <a:latin typeface="Leelawadee UI"/>
+              </a:rPr>
+              <a:t> baseline/proposed </a:t>
+            </a:r>
+            <a:r>
+              <a:rPr sz="1700" b="0" dirty="0" err="1">
+                <a:solidFill>
+                  <a:srgbClr val="323A46"/>
+                </a:solidFill>
+                <a:latin typeface="Leelawadee UI"/>
+              </a:rPr>
+              <a:t>อย่างยุติธรรม</a:t>
+            </a:r>
+            <a:r>
+              <a:rPr sz="1700" b="0" dirty="0">
+                <a:solidFill>
+                  <a:srgbClr val="323A46"/>
+                </a:solidFill>
+                <a:latin typeface="Leelawadee UI"/>
+              </a:rPr>
+              <a:t> </a:t>
+            </a:r>
+            <a:r>
+              <a:rPr sz="1700" b="0" dirty="0" err="1">
+                <a:solidFill>
+                  <a:srgbClr val="323A46"/>
+                </a:solidFill>
+                <a:latin typeface="Leelawadee UI"/>
+              </a:rPr>
+              <a:t>ส่วน</a:t>
+            </a:r>
+            <a:r>
+              <a:rPr sz="1700" b="0" dirty="0">
+                <a:solidFill>
+                  <a:srgbClr val="323A46"/>
+                </a:solidFill>
+                <a:latin typeface="Leelawadee UI"/>
+              </a:rPr>
+              <a:t> live app </a:t>
+            </a:r>
+            <a:r>
+              <a:rPr sz="1700" b="0" dirty="0" err="1">
+                <a:solidFill>
+                  <a:srgbClr val="323A46"/>
+                </a:solidFill>
+                <a:latin typeface="Leelawadee UI"/>
+              </a:rPr>
+              <a:t>ขยาย</a:t>
+            </a:r>
+            <a:r>
+              <a:rPr sz="1700" b="0" dirty="0">
+                <a:solidFill>
+                  <a:srgbClr val="323A46"/>
+                </a:solidFill>
+                <a:latin typeface="Leelawadee UI"/>
+              </a:rPr>
+              <a:t> framework </a:t>
+            </a:r>
+            <a:r>
+              <a:rPr sz="1700" b="0" dirty="0" err="1">
+                <a:solidFill>
+                  <a:srgbClr val="323A46"/>
+                </a:solidFill>
+                <a:latin typeface="Leelawadee UI"/>
+              </a:rPr>
+              <a:t>เดียวกันไปยัง</a:t>
+            </a:r>
+            <a:r>
+              <a:rPr sz="1700" b="0" dirty="0">
+                <a:solidFill>
+                  <a:srgbClr val="323A46"/>
+                </a:solidFill>
+                <a:latin typeface="Leelawadee UI"/>
+              </a:rPr>
+              <a:t> 6 </a:t>
+            </a:r>
+            <a:r>
+              <a:rPr sz="1700" b="0" dirty="0" err="1">
+                <a:solidFill>
+                  <a:srgbClr val="323A46"/>
+                </a:solidFill>
+                <a:latin typeface="Leelawadee UI"/>
+              </a:rPr>
+              <a:t>ท่าออกกำลังกาย</a:t>
+            </a:r>
+            <a:endParaRPr sz="1700" b="0" dirty="0">
+              <a:solidFill>
+                <a:srgbClr val="323A46"/>
+              </a:solidFill>
+              <a:latin typeface="Leelawadee UI"/>
+            </a:endParaRPr>
+          </a:p>
+        </p:txBody>
+      </p:sp>
+      <p:sp>
+        <p:nvSpPr>
+          <p:cNvPr id="7" name="TextBox 6"/>
+          <p:cNvSpPr txBox="1"/>
+          <p:nvPr/>
+        </p:nvSpPr>
+        <p:spPr>
+          <a:xfrm>
+            <a:off x="6922008" y="3564840"/>
+            <a:ext cx="2743200" cy="274320"/>
+          </a:xfrm>
+          <a:prstGeom prst="rect">
+            <a:avLst/>
+          </a:prstGeom>
+          <a:noFill/>
+        </p:spPr>
+        <p:txBody>
+          <a:bodyPr wrap="square" anchor="t">
+            <a:spAutoFit/>
+          </a:bodyPr>
+          <a:lstStyle/>
+          <a:p>
+            <a:r>
+              <a:rPr sz="1800" b="1" dirty="0">
+                <a:solidFill>
+                  <a:srgbClr val="006D77"/>
+                </a:solidFill>
+                <a:latin typeface="Leelawadee UI"/>
+              </a:rPr>
+              <a:t>Visualization </a:t>
+            </a:r>
+            <a:r>
+              <a:rPr sz="1800" b="1" dirty="0" err="1">
+                <a:solidFill>
+                  <a:srgbClr val="006D77"/>
+                </a:solidFill>
+                <a:latin typeface="Leelawadee UI"/>
+              </a:rPr>
+              <a:t>ที่ส่งพร้อมงาน</a:t>
+            </a:r>
+            <a:endParaRPr sz="1800" b="1" dirty="0">
+              <a:solidFill>
+                <a:srgbClr val="006D77"/>
+              </a:solidFill>
+              <a:latin typeface="Leelawadee UI"/>
+            </a:endParaRPr>
+          </a:p>
+        </p:txBody>
+      </p:sp>
+      <p:sp>
+        <p:nvSpPr>
+          <p:cNvPr id="8" name="TextBox 7"/>
+          <p:cNvSpPr txBox="1"/>
+          <p:nvPr/>
+        </p:nvSpPr>
+        <p:spPr>
+          <a:xfrm>
+            <a:off x="7068312" y="3931918"/>
+            <a:ext cx="4206240" cy="1645920"/>
+          </a:xfrm>
+          <a:prstGeom prst="rect">
+            <a:avLst/>
+          </a:prstGeom>
+          <a:noFill/>
+        </p:spPr>
+        <p:txBody>
+          <a:bodyPr wrap="square" lIns="0">
+            <a:spAutoFit/>
+          </a:bodyPr>
+          <a:lstStyle/>
+          <a:p>
+            <a:pPr>
+              <a:spcAft>
+                <a:spcPts val="800"/>
+              </a:spcAft>
+              <a:defRPr sz="1700">
+                <a:solidFill>
+                  <a:srgbClr val="323A46"/>
+                </a:solidFill>
+                <a:latin typeface="Leelawadee UI"/>
+              </a:defRPr>
+            </a:pPr>
+            <a:r>
+              <a:rPr dirty="0" err="1"/>
+              <a:t>หน้าเว็บ</a:t>
+            </a:r>
+            <a:r>
+              <a:rPr dirty="0"/>
+              <a:t> Flask </a:t>
+            </a:r>
+            <a:r>
+              <a:rPr dirty="0" err="1"/>
+              <a:t>แบบ</a:t>
+            </a:r>
+            <a:r>
+              <a:rPr dirty="0"/>
+              <a:t> live</a:t>
+            </a:r>
+          </a:p>
+          <a:p>
+            <a:pPr>
+              <a:spcAft>
+                <a:spcPts val="800"/>
+              </a:spcAft>
+              <a:defRPr sz="1700">
+                <a:solidFill>
+                  <a:srgbClr val="323A46"/>
+                </a:solidFill>
+                <a:latin typeface="Leelawadee UI"/>
+              </a:defRPr>
+            </a:pPr>
+            <a:r>
+              <a:rPr dirty="0"/>
+              <a:t>demo video </a:t>
+            </a:r>
+            <a:r>
+              <a:rPr dirty="0" err="1"/>
+              <a:t>แบบ</a:t>
+            </a:r>
+            <a:r>
+              <a:rPr dirty="0"/>
+              <a:t> side-by-side</a:t>
+            </a:r>
+          </a:p>
+          <a:p>
+            <a:pPr>
+              <a:spcAft>
+                <a:spcPts val="800"/>
+              </a:spcAft>
+              <a:defRPr sz="1700">
+                <a:solidFill>
+                  <a:srgbClr val="323A46"/>
+                </a:solidFill>
+                <a:latin typeface="Leelawadee UI"/>
+              </a:defRPr>
+            </a:pPr>
+            <a:r>
+              <a:rPr dirty="0"/>
+              <a:t>plots </a:t>
+            </a:r>
+            <a:r>
+              <a:rPr dirty="0" err="1"/>
+              <a:t>สำหรับ</a:t>
+            </a:r>
+            <a:r>
+              <a:rPr dirty="0"/>
+              <a:t> runtime </a:t>
+            </a:r>
+            <a:r>
+              <a:rPr dirty="0" err="1"/>
+              <a:t>และ</a:t>
+            </a:r>
+            <a:r>
+              <a:rPr dirty="0"/>
+              <a:t> stability</a:t>
+            </a:r>
+          </a:p>
+        </p:txBody>
+      </p:sp>
+    </p:spTree>
+  </p:cSld>
+  <p:clrMapOvr>
+    <a:masterClrMapping/>
+  </p:clrMapOvr>
+</p:sld>
+</file>
+
+<file path=ppt/slides/slide5.xml><?xml version="1.0" encoding="utf-8"?>
+<p:sld xmlns:a="http://schemas.openxmlformats.org/drawingml/2006/main" xmlns:r="http://schemas.openxmlformats.org/officeDocument/2006/relationships" xmlns:p="http://schemas.openxmlformats.org/presentationml/2006/main">
+  <p:cSld>
+    <p:bg>
+      <p:bgPr>
+        <a:solidFill>
+          <a:srgbClr val="FFFFFF"/>
+        </a:solidFill>
+        <a:effectLst/>
+      </p:bgPr>
+    </p:bg>
+    <p:spTree>
+      <p:nvGrpSpPr>
+        <p:cNvPr id="1" name=""/>
+        <p:cNvGrpSpPr/>
+        <p:nvPr/>
+      </p:nvGrpSpPr>
+      <p:grpSpPr>
+        <a:xfrm>
+          <a:off x="0" y="0"/>
+          <a:ext cx="0" cy="0"/>
+          <a:chOff x="0" y="0"/>
+          <a:chExt cx="0" cy="0"/>
+        </a:xfrm>
+      </p:grpSpPr>
+      <p:sp>
+        <p:nvSpPr>
+          <p:cNvPr id="2" name="TextBox 1"/>
+          <p:cNvSpPr txBox="1"/>
+          <p:nvPr/>
+        </p:nvSpPr>
+        <p:spPr>
+          <a:xfrm>
+            <a:off x="548640" y="365760"/>
+            <a:ext cx="10972800" cy="731520"/>
+          </a:xfrm>
+          <a:prstGeom prst="rect">
+            <a:avLst/>
+          </a:prstGeom>
+          <a:noFill/>
+        </p:spPr>
+        <p:txBody>
+          <a:bodyPr wrap="none">
+            <a:spAutoFit/>
+          </a:bodyPr>
+          <a:lstStyle/>
+          <a:p>
+            <a:r>
+              <a:rPr sz="2400" b="1" dirty="0">
+                <a:solidFill>
+                  <a:srgbClr val="141820"/>
+                </a:solidFill>
+                <a:latin typeface="Leelawadee UI"/>
+              </a:rPr>
+              <a:t>Baseline, Proposed </a:t>
+            </a:r>
+            <a:r>
+              <a:rPr sz="2400" b="1" dirty="0" err="1">
+                <a:solidFill>
+                  <a:srgbClr val="141820"/>
+                </a:solidFill>
+                <a:latin typeface="Leelawadee UI"/>
+              </a:rPr>
+              <a:t>และบริบท</a:t>
+            </a:r>
+            <a:r>
+              <a:rPr sz="2400" b="1" dirty="0">
+                <a:solidFill>
+                  <a:srgbClr val="141820"/>
+                </a:solidFill>
+                <a:latin typeface="Leelawadee UI"/>
+              </a:rPr>
+              <a:t> SOTA</a:t>
+            </a:r>
+          </a:p>
+        </p:txBody>
+      </p:sp>
+      <p:sp>
+        <p:nvSpPr>
+          <p:cNvPr id="3" name="Rectangle 2"/>
+          <p:cNvSpPr/>
+          <p:nvPr/>
+        </p:nvSpPr>
+        <p:spPr>
+          <a:xfrm>
+            <a:off x="548640" y="1060704"/>
+            <a:ext cx="2103120" cy="54864"/>
+          </a:xfrm>
+          <a:prstGeom prst="rect">
+            <a:avLst/>
+          </a:prstGeom>
+          <a:solidFill>
+            <a:srgbClr val="006D77"/>
+          </a:solidFill>
+          <a:ln>
+            <a:noFill/>
+          </a:ln>
+        </p:spPr>
+        <p:style>
+          <a:lnRef idx="1">
+            <a:schemeClr val="accent1"/>
+          </a:lnRef>
+          <a:fillRef idx="3">
+            <a:schemeClr val="accent1"/>
+          </a:fillRef>
+          <a:effectRef idx="2">
+            <a:schemeClr val="accent1"/>
+          </a:effectRef>
+          <a:fontRef idx="minor">
+            <a:schemeClr val="lt1"/>
+          </a:fontRef>
+        </p:style>
+        <p:txBody>
+          <a:bodyPr rtlCol="0" anchor="ctr"/>
+          <a:lstStyle/>
+          <a:p>
+            <a:pPr algn="ctr"/>
+            <a:endParaRPr/>
+          </a:p>
+        </p:txBody>
+      </p:sp>
+      <p:graphicFrame>
+        <p:nvGraphicFramePr>
+          <p:cNvPr id="4" name="Table 3"/>
+          <p:cNvGraphicFramePr>
+            <a:graphicFrameLocks noGrp="1"/>
+          </p:cNvGraphicFramePr>
+          <p:nvPr/>
+        </p:nvGraphicFramePr>
+        <p:xfrm>
+          <a:off x="685800" y="1737360"/>
+          <a:ext cx="10881360" cy="2194560"/>
+        </p:xfrm>
+        <a:graphic>
+          <a:graphicData uri="http://schemas.openxmlformats.org/drawingml/2006/table">
+            <a:tbl>
+              <a:tblPr firstRow="1" bandRow="1">
+                <a:tableStyleId>{5C22544A-7EE6-4342-B048-85BDC9FD1C3A}</a:tableStyleId>
+              </a:tblPr>
+              <a:tblGrid>
+                <a:gridCol w="2720340">
+                  <a:extLst>
+                    <a:ext uri="{9D8B030D-6E8A-4147-A177-3AD203B41FA5}">
+                      <a16:colId xmlns:a16="http://schemas.microsoft.com/office/drawing/2014/main" val="20000"/>
+                    </a:ext>
+                  </a:extLst>
+                </a:gridCol>
+                <a:gridCol w="2720340">
+                  <a:extLst>
+                    <a:ext uri="{9D8B030D-6E8A-4147-A177-3AD203B41FA5}">
+                      <a16:colId xmlns:a16="http://schemas.microsoft.com/office/drawing/2014/main" val="20001"/>
+                    </a:ext>
+                  </a:extLst>
+                </a:gridCol>
+                <a:gridCol w="2720340">
+                  <a:extLst>
+                    <a:ext uri="{9D8B030D-6E8A-4147-A177-3AD203B41FA5}">
+                      <a16:colId xmlns:a16="http://schemas.microsoft.com/office/drawing/2014/main" val="20002"/>
+                    </a:ext>
+                  </a:extLst>
+                </a:gridCol>
+                <a:gridCol w="2720340">
+                  <a:extLst>
+                    <a:ext uri="{9D8B030D-6E8A-4147-A177-3AD203B41FA5}">
+                      <a16:colId xmlns:a16="http://schemas.microsoft.com/office/drawing/2014/main" val="20003"/>
+                    </a:ext>
+                  </a:extLst>
+                </a:gridCol>
+              </a:tblGrid>
+              <a:tr h="548640">
+                <a:tc>
+                  <a:txBody>
+                    <a:bodyPr/>
+                    <a:lstStyle/>
+                    <a:p>
+                      <a:pPr algn="ctr"/>
+                      <a:r>
+                        <a:rPr sz="1100" b="1">
+                          <a:solidFill>
+                            <a:srgbClr val="141820"/>
+                          </a:solidFill>
+                          <a:latin typeface="Leelawadee UI"/>
+                        </a:rPr>
+                        <a:t>วิธี</a:t>
+                      </a:r>
+                    </a:p>
+                  </a:txBody>
+                  <a:tcPr>
+                    <a:solidFill>
+                      <a:srgbClr val="E8F8F9"/>
+                    </a:solidFill>
+                  </a:tcPr>
+                </a:tc>
+                <a:tc>
+                  <a:txBody>
+                    <a:bodyPr/>
+                    <a:lstStyle/>
+                    <a:p>
+                      <a:pPr algn="ctr"/>
+                      <a:r>
+                        <a:rPr sz="1100" b="1">
+                          <a:solidFill>
+                            <a:srgbClr val="141820"/>
+                          </a:solidFill>
+                          <a:latin typeface="Leelawadee UI"/>
+                        </a:rPr>
+                        <a:t>แนวคิดหลัก</a:t>
+                      </a:r>
+                    </a:p>
+                  </a:txBody>
+                  <a:tcPr>
+                    <a:solidFill>
+                      <a:srgbClr val="E8F8F9"/>
+                    </a:solidFill>
+                  </a:tcPr>
+                </a:tc>
+                <a:tc>
+                  <a:txBody>
+                    <a:bodyPr/>
+                    <a:lstStyle/>
+                    <a:p>
+                      <a:pPr algn="ctr"/>
+                      <a:r>
+                        <a:rPr sz="1100" b="1">
+                          <a:solidFill>
+                            <a:srgbClr val="141820"/>
+                          </a:solidFill>
+                          <a:latin typeface="Leelawadee UI"/>
+                        </a:rPr>
+                        <a:t>จุดเด่น</a:t>
+                      </a:r>
+                    </a:p>
+                  </a:txBody>
+                  <a:tcPr>
+                    <a:solidFill>
+                      <a:srgbClr val="E8F8F9"/>
+                    </a:solidFill>
+                  </a:tcPr>
+                </a:tc>
+                <a:tc>
+                  <a:txBody>
+                    <a:bodyPr/>
+                    <a:lstStyle/>
+                    <a:p>
+                      <a:pPr algn="ctr"/>
+                      <a:r>
+                        <a:rPr sz="1100" b="1">
+                          <a:solidFill>
+                            <a:srgbClr val="141820"/>
+                          </a:solidFill>
+                          <a:latin typeface="Leelawadee UI"/>
+                        </a:rPr>
+                        <a:t>ข้อจำกัด</a:t>
+                      </a:r>
+                    </a:p>
+                  </a:txBody>
+                  <a:tcPr>
+                    <a:solidFill>
+                      <a:srgbClr val="E8F8F9"/>
+                    </a:solidFill>
+                  </a:tcPr>
+                </a:tc>
+                <a:extLst>
+                  <a:ext uri="{0D108BD9-81ED-4DB2-BD59-A6C34878D82A}">
+                    <a16:rowId xmlns:a16="http://schemas.microsoft.com/office/drawing/2014/main" val="10000"/>
+                  </a:ext>
+                </a:extLst>
+              </a:tr>
+              <a:tr h="548640">
+                <a:tc>
+                  <a:txBody>
+                    <a:bodyPr/>
+                    <a:lstStyle/>
+                    <a:p>
+                      <a:pPr algn="ctr"/>
+                      <a:r>
+                        <a:rPr sz="1100" b="0">
+                          <a:solidFill>
+                            <a:srgbClr val="323A46"/>
+                          </a:solidFill>
+                          <a:latin typeface="Leelawadee UI"/>
+                        </a:rPr>
+                        <a:t>Baseline</a:t>
+                      </a:r>
+                    </a:p>
+                  </a:txBody>
+                  <a:tcPr>
+                    <a:solidFill>
+                      <a:srgbClr val="FFFFFF"/>
+                    </a:solidFill>
+                  </a:tcPr>
+                </a:tc>
+                <a:tc>
+                  <a:txBody>
+                    <a:bodyPr/>
+                    <a:lstStyle/>
+                    <a:p>
+                      <a:pPr algn="ctr"/>
+                      <a:r>
+                        <a:rPr sz="1100" b="0">
+                          <a:solidFill>
+                            <a:srgbClr val="323A46"/>
+                          </a:solidFill>
+                          <a:latin typeface="Leelawadee UI"/>
+                        </a:rPr>
+                        <a:t>ใช้ elbow angle + threshold นับตรง ๆ</a:t>
+                      </a:r>
+                    </a:p>
+                  </a:txBody>
+                  <a:tcPr>
+                    <a:solidFill>
+                      <a:srgbClr val="FFFFFF"/>
+                    </a:solidFill>
+                  </a:tcPr>
+                </a:tc>
+                <a:tc>
+                  <a:txBody>
+                    <a:bodyPr/>
+                    <a:lstStyle/>
+                    <a:p>
+                      <a:pPr algn="ctr"/>
+                      <a:r>
+                        <a:rPr sz="1100" b="0">
+                          <a:solidFill>
+                            <a:srgbClr val="323A46"/>
+                          </a:solidFill>
+                          <a:latin typeface="Leelawadee UI"/>
+                        </a:rPr>
+                        <a:t>ง่ายและ deterministic</a:t>
+                      </a:r>
+                    </a:p>
+                  </a:txBody>
+                  <a:tcPr>
+                    <a:solidFill>
+                      <a:srgbClr val="FFFFFF"/>
+                    </a:solidFill>
+                  </a:tcPr>
+                </a:tc>
+                <a:tc>
+                  <a:txBody>
+                    <a:bodyPr/>
+                    <a:lstStyle/>
+                    <a:p>
+                      <a:pPr algn="ctr"/>
+                      <a:r>
+                        <a:rPr sz="1100" b="0">
+                          <a:solidFill>
+                            <a:srgbClr val="323A46"/>
+                          </a:solidFill>
+                          <a:latin typeface="Leelawadee UI"/>
+                        </a:rPr>
+                        <a:t>เปราะกับ jitter และ occlusion</a:t>
+                      </a:r>
+                    </a:p>
+                  </a:txBody>
+                  <a:tcPr>
+                    <a:solidFill>
+                      <a:srgbClr val="FFFFFF"/>
+                    </a:solidFill>
+                  </a:tcPr>
+                </a:tc>
+                <a:extLst>
+                  <a:ext uri="{0D108BD9-81ED-4DB2-BD59-A6C34878D82A}">
+                    <a16:rowId xmlns:a16="http://schemas.microsoft.com/office/drawing/2014/main" val="10001"/>
+                  </a:ext>
+                </a:extLst>
+              </a:tr>
+              <a:tr h="548640">
+                <a:tc>
+                  <a:txBody>
+                    <a:bodyPr/>
+                    <a:lstStyle/>
+                    <a:p>
+                      <a:pPr algn="ctr"/>
+                      <a:r>
+                        <a:rPr sz="1100" b="0">
+                          <a:solidFill>
+                            <a:srgbClr val="323A46"/>
+                          </a:solidFill>
+                          <a:latin typeface="Leelawadee UI"/>
+                        </a:rPr>
+                        <a:t>Proposed</a:t>
+                      </a:r>
+                    </a:p>
+                  </a:txBody>
+                  <a:tcPr>
+                    <a:solidFill>
+                      <a:srgbClr val="FFFFFF"/>
+                    </a:solidFill>
+                  </a:tcPr>
+                </a:tc>
+                <a:tc>
+                  <a:txBody>
+                    <a:bodyPr/>
+                    <a:lstStyle/>
+                    <a:p>
+                      <a:pPr algn="ctr"/>
+                      <a:r>
+                        <a:rPr sz="1100" b="0">
+                          <a:solidFill>
+                            <a:srgbClr val="323A46"/>
+                          </a:solidFill>
+                          <a:latin typeface="Leelawadee UI"/>
+                        </a:rPr>
+                        <a:t>เพิ่ม confidence-aware side lock + EMA smoothing</a:t>
+                      </a:r>
+                    </a:p>
+                  </a:txBody>
+                  <a:tcPr>
+                    <a:solidFill>
+                      <a:srgbClr val="FFFFFF"/>
+                    </a:solidFill>
+                  </a:tcPr>
+                </a:tc>
+                <a:tc>
+                  <a:txBody>
+                    <a:bodyPr/>
+                    <a:lstStyle/>
+                    <a:p>
+                      <a:pPr algn="ctr"/>
+                      <a:r>
+                        <a:rPr sz="1100" b="0">
+                          <a:solidFill>
+                            <a:srgbClr val="323A46"/>
+                          </a:solidFill>
+                          <a:latin typeface="Leelawadee UI"/>
+                        </a:rPr>
+                        <a:t>นิ่งขึ้นและ benchmark เร็วกว่า</a:t>
+                      </a:r>
+                    </a:p>
+                  </a:txBody>
+                  <a:tcPr>
+                    <a:solidFill>
+                      <a:srgbClr val="FFFFFF"/>
+                    </a:solidFill>
+                  </a:tcPr>
+                </a:tc>
+                <a:tc>
+                  <a:txBody>
+                    <a:bodyPr/>
+                    <a:lstStyle/>
+                    <a:p>
+                      <a:pPr algn="ctr"/>
+                      <a:r>
+                        <a:rPr sz="1100" b="0">
+                          <a:solidFill>
+                            <a:srgbClr val="323A46"/>
+                          </a:solidFill>
+                          <a:latin typeface="Leelawadee UI"/>
+                        </a:rPr>
+                        <a:t>ยังเป็น handcrafted method</a:t>
+                      </a:r>
+                    </a:p>
+                  </a:txBody>
+                  <a:tcPr>
+                    <a:solidFill>
+                      <a:srgbClr val="FFFFFF"/>
+                    </a:solidFill>
+                  </a:tcPr>
+                </a:tc>
+                <a:extLst>
+                  <a:ext uri="{0D108BD9-81ED-4DB2-BD59-A6C34878D82A}">
+                    <a16:rowId xmlns:a16="http://schemas.microsoft.com/office/drawing/2014/main" val="10002"/>
+                  </a:ext>
+                </a:extLst>
+              </a:tr>
+              <a:tr h="548640">
+                <a:tc>
+                  <a:txBody>
+                    <a:bodyPr/>
+                    <a:lstStyle/>
+                    <a:p>
+                      <a:pPr algn="ctr"/>
+                      <a:r>
+                        <a:rPr sz="1100" b="0">
+                          <a:solidFill>
+                            <a:srgbClr val="323A46"/>
+                          </a:solidFill>
+                          <a:latin typeface="Leelawadee UI"/>
+                        </a:rPr>
+                        <a:t>SOTA context</a:t>
+                      </a:r>
+                    </a:p>
+                  </a:txBody>
+                  <a:tcPr>
+                    <a:solidFill>
+                      <a:srgbClr val="FFFFFF"/>
+                    </a:solidFill>
+                  </a:tcPr>
+                </a:tc>
+                <a:tc>
+                  <a:txBody>
+                    <a:bodyPr/>
+                    <a:lstStyle/>
+                    <a:p>
+                      <a:pPr algn="ctr"/>
+                      <a:r>
+                        <a:rPr sz="1100" b="0">
+                          <a:solidFill>
+                            <a:srgbClr val="323A46"/>
+                          </a:solidFill>
+                          <a:latin typeface="Leelawadee UI"/>
+                        </a:rPr>
+                        <a:t>โมเดล temporal neural / action model</a:t>
+                      </a:r>
+                    </a:p>
+                  </a:txBody>
+                  <a:tcPr>
+                    <a:solidFill>
+                      <a:srgbClr val="FFFFFF"/>
+                    </a:solidFill>
+                  </a:tcPr>
+                </a:tc>
+                <a:tc>
+                  <a:txBody>
+                    <a:bodyPr/>
+                    <a:lstStyle/>
+                    <a:p>
+                      <a:pPr algn="ctr"/>
+                      <a:r>
+                        <a:rPr sz="1100" b="0">
+                          <a:solidFill>
+                            <a:srgbClr val="323A46"/>
+                          </a:solidFill>
+                          <a:latin typeface="Leelawadee UI"/>
+                        </a:rPr>
+                        <a:t>จับ sequence context ได้มากกว่า</a:t>
+                      </a:r>
+                    </a:p>
+                  </a:txBody>
+                  <a:tcPr>
+                    <a:solidFill>
+                      <a:srgbClr val="FFFFFF"/>
+                    </a:solidFill>
+                  </a:tcPr>
+                </a:tc>
+                <a:tc>
+                  <a:txBody>
+                    <a:bodyPr/>
+                    <a:lstStyle/>
+                    <a:p>
+                      <a:pPr algn="ctr"/>
+                      <a:r>
+                        <a:rPr sz="1100" b="0" dirty="0" err="1">
+                          <a:solidFill>
+                            <a:srgbClr val="323A46"/>
+                          </a:solidFill>
+                          <a:latin typeface="Leelawadee UI"/>
+                        </a:rPr>
+                        <a:t>ใช้</a:t>
+                      </a:r>
+                      <a:r>
+                        <a:rPr sz="1100" b="0" dirty="0">
+                          <a:solidFill>
+                            <a:srgbClr val="323A46"/>
+                          </a:solidFill>
+                          <a:latin typeface="Leelawadee UI"/>
+                        </a:rPr>
+                        <a:t> compute </a:t>
+                      </a:r>
+                      <a:r>
+                        <a:rPr sz="1100" b="0" dirty="0" err="1">
+                          <a:solidFill>
+                            <a:srgbClr val="323A46"/>
+                          </a:solidFill>
+                          <a:latin typeface="Leelawadee UI"/>
+                        </a:rPr>
+                        <a:t>สูงและอธิบายยากกว่า</a:t>
+                      </a:r>
+                      <a:endParaRPr sz="1100" b="0" dirty="0">
+                        <a:solidFill>
+                          <a:srgbClr val="323A46"/>
+                        </a:solidFill>
+                        <a:latin typeface="Leelawadee UI"/>
+                      </a:endParaRPr>
+                    </a:p>
+                  </a:txBody>
+                  <a:tcPr>
+                    <a:solidFill>
+                      <a:srgbClr val="FFFFFF"/>
+                    </a:solidFill>
+                  </a:tcPr>
+                </a:tc>
+                <a:extLst>
+                  <a:ext uri="{0D108BD9-81ED-4DB2-BD59-A6C34878D82A}">
+                    <a16:rowId xmlns:a16="http://schemas.microsoft.com/office/drawing/2014/main" val="10003"/>
+                  </a:ext>
+                </a:extLst>
+              </a:tr>
+            </a:tbl>
+          </a:graphicData>
+        </a:graphic>
+      </p:graphicFrame>
+      <p:sp>
+        <p:nvSpPr>
+          <p:cNvPr id="5" name="TextBox 4"/>
+          <p:cNvSpPr txBox="1"/>
+          <p:nvPr/>
+        </p:nvSpPr>
+        <p:spPr>
+          <a:xfrm>
+            <a:off x="822960" y="4343400"/>
+            <a:ext cx="10058400" cy="1645920"/>
+          </a:xfrm>
+          <a:prstGeom prst="rect">
+            <a:avLst/>
+          </a:prstGeom>
+          <a:noFill/>
+        </p:spPr>
+        <p:txBody>
+          <a:bodyPr wrap="square" lIns="0">
+            <a:spAutoFit/>
+          </a:bodyPr>
+          <a:lstStyle/>
+          <a:p>
+            <a:pPr>
+              <a:spcAft>
+                <a:spcPts val="800"/>
+              </a:spcAft>
+              <a:defRPr sz="1700">
+                <a:solidFill>
+                  <a:srgbClr val="323A46"/>
+                </a:solidFill>
+                <a:latin typeface="Leelawadee UI"/>
+              </a:defRPr>
+            </a:pPr>
+            <a:r>
+              <a:rPr dirty="0" err="1"/>
+              <a:t>ทั้ง</a:t>
+            </a:r>
+            <a:r>
+              <a:rPr dirty="0"/>
+              <a:t> baseline </a:t>
+            </a:r>
+            <a:r>
+              <a:rPr dirty="0" err="1"/>
+              <a:t>และ</a:t>
+            </a:r>
+            <a:r>
+              <a:rPr dirty="0"/>
+              <a:t> proposed </a:t>
+            </a:r>
+            <a:r>
+              <a:rPr dirty="0" err="1"/>
+              <a:t>ใช้</a:t>
+            </a:r>
+            <a:r>
+              <a:rPr dirty="0"/>
+              <a:t> input/output </a:t>
+            </a:r>
+            <a:r>
+              <a:rPr dirty="0" err="1"/>
+              <a:t>แบบเดียวกัน</a:t>
+            </a:r>
+            <a:r>
+              <a:rPr dirty="0"/>
+              <a:t> </a:t>
+            </a:r>
+            <a:r>
+              <a:rPr dirty="0" err="1"/>
+              <a:t>จึงเปรียบเทียบกันได้ยุติธรรม</a:t>
+            </a:r>
+            <a:endParaRPr dirty="0"/>
+          </a:p>
+          <a:p>
+            <a:pPr>
+              <a:spcAft>
+                <a:spcPts val="800"/>
+              </a:spcAft>
+              <a:defRPr sz="1700">
+                <a:solidFill>
+                  <a:srgbClr val="323A46"/>
+                </a:solidFill>
+                <a:latin typeface="Leelawadee UI"/>
+              </a:defRPr>
+            </a:pPr>
+            <a:r>
+              <a:rPr dirty="0" err="1"/>
+              <a:t>งานนี้ไม่ได้อ้างว่าเหนือกว่า</a:t>
+            </a:r>
+            <a:r>
+              <a:rPr dirty="0"/>
+              <a:t> SOTA </a:t>
+            </a:r>
+            <a:r>
+              <a:rPr dirty="0" err="1"/>
+              <a:t>แต่แสดง</a:t>
+            </a:r>
+            <a:r>
+              <a:rPr dirty="0"/>
+              <a:t> improvement </a:t>
+            </a:r>
+            <a:r>
+              <a:rPr dirty="0" err="1"/>
+              <a:t>ที่วัดซ้ำได้จริงเหนือ</a:t>
+            </a:r>
+            <a:r>
+              <a:rPr dirty="0"/>
+              <a:t> baseline</a:t>
+            </a:r>
+          </a:p>
+          <a:p>
+            <a:pPr>
+              <a:spcAft>
+                <a:spcPts val="800"/>
+              </a:spcAft>
+              <a:defRPr sz="1700">
+                <a:solidFill>
+                  <a:srgbClr val="323A46"/>
+                </a:solidFill>
+                <a:latin typeface="Leelawadee UI"/>
+              </a:defRPr>
+            </a:pPr>
+            <a:r>
+              <a:rPr dirty="0" err="1"/>
+              <a:t>จุดเน้นของ</a:t>
+            </a:r>
+            <a:r>
+              <a:rPr dirty="0"/>
+              <a:t> proposed </a:t>
+            </a:r>
+            <a:r>
+              <a:rPr dirty="0" err="1"/>
+              <a:t>คือคุณค่าทางวิศวกรรม</a:t>
+            </a:r>
+            <a:r>
+              <a:rPr dirty="0"/>
+              <a:t>: </a:t>
+            </a:r>
+            <a:r>
+              <a:rPr dirty="0" err="1"/>
+              <a:t>เสถียรขึ้นโดยยังอธิบายการทำงานได้ง่าย</a:t>
+            </a:r>
+            <a:endParaRPr dirty="0"/>
+          </a:p>
+        </p:txBody>
+      </p:sp>
+    </p:spTree>
+  </p:cSld>
+  <p:clrMapOvr>
+    <a:masterClrMapping/>
+  </p:clrMapOvr>
+</p:sld>
+</file>
+
+<file path=ppt/slides/slide6.xml><?xml version="1.0" encoding="utf-8"?>
+<p:sld xmlns:a="http://schemas.openxmlformats.org/drawingml/2006/main" xmlns:r="http://schemas.openxmlformats.org/officeDocument/2006/relationships" xmlns:p="http://schemas.openxmlformats.org/presentationml/2006/main">
+  <p:cSld>
+    <p:bg>
+      <p:bgPr>
+        <a:solidFill>
+          <a:srgbClr val="FFFFFF"/>
+        </a:solidFill>
+        <a:effectLst/>
+      </p:bgPr>
+    </p:bg>
+    <p:spTree>
+      <p:nvGrpSpPr>
+        <p:cNvPr id="1" name=""/>
+        <p:cNvGrpSpPr/>
+        <p:nvPr/>
+      </p:nvGrpSpPr>
+      <p:grpSpPr>
+        <a:xfrm>
+          <a:off x="0" y="0"/>
+          <a:ext cx="0" cy="0"/>
+          <a:chOff x="0" y="0"/>
+          <a:chExt cx="0" cy="0"/>
+        </a:xfrm>
+      </p:grpSpPr>
+      <p:sp>
+        <p:nvSpPr>
+          <p:cNvPr id="2" name="TextBox 1"/>
+          <p:cNvSpPr txBox="1"/>
+          <p:nvPr/>
+        </p:nvSpPr>
+        <p:spPr>
+          <a:xfrm>
+            <a:off x="548640" y="365760"/>
+            <a:ext cx="10972800" cy="731520"/>
+          </a:xfrm>
+          <a:prstGeom prst="rect">
+            <a:avLst/>
+          </a:prstGeom>
+          <a:noFill/>
+        </p:spPr>
+        <p:txBody>
+          <a:bodyPr wrap="none">
+            <a:spAutoFit/>
+          </a:bodyPr>
+          <a:lstStyle/>
+          <a:p>
+            <a:r>
+              <a:rPr sz="2400" b="1">
+                <a:solidFill>
+                  <a:srgbClr val="141820"/>
+                </a:solidFill>
+                <a:latin typeface="Leelawadee UI"/>
+              </a:rPr>
+              <a:t>แนวคิดของวิธี Proposed และ Workflow</a:t>
+            </a:r>
+          </a:p>
+        </p:txBody>
+      </p:sp>
+      <p:sp>
+        <p:nvSpPr>
+          <p:cNvPr id="3" name="Rectangle 2"/>
+          <p:cNvSpPr/>
+          <p:nvPr/>
+        </p:nvSpPr>
+        <p:spPr>
+          <a:xfrm>
+            <a:off x="548640" y="1060704"/>
+            <a:ext cx="2103120" cy="54864"/>
+          </a:xfrm>
+          <a:prstGeom prst="rect">
+            <a:avLst/>
+          </a:prstGeom>
+          <a:solidFill>
+            <a:srgbClr val="006D77"/>
+          </a:solidFill>
+          <a:ln>
+            <a:noFill/>
+          </a:ln>
+        </p:spPr>
+        <p:style>
+          <a:lnRef idx="1">
+            <a:schemeClr val="accent1"/>
+          </a:lnRef>
+          <a:fillRef idx="3">
+            <a:schemeClr val="accent1"/>
+          </a:fillRef>
+          <a:effectRef idx="2">
+            <a:schemeClr val="accent1"/>
+          </a:effectRef>
+          <a:fontRef idx="minor">
+            <a:schemeClr val="lt1"/>
+          </a:fontRef>
+        </p:style>
+        <p:txBody>
+          <a:bodyPr rtlCol="0" anchor="ctr"/>
+          <a:lstStyle/>
+          <a:p>
+            <a:pPr algn="ctr"/>
+            <a:endParaRPr/>
+          </a:p>
+        </p:txBody>
+      </p:sp>
+      <p:sp>
+        <p:nvSpPr>
+          <p:cNvPr id="5" name="TextBox 4"/>
+          <p:cNvSpPr txBox="1"/>
+          <p:nvPr/>
+        </p:nvSpPr>
+        <p:spPr>
+          <a:xfrm>
+            <a:off x="777240" y="1783080"/>
+            <a:ext cx="6665976" cy="1887696"/>
+          </a:xfrm>
+          <a:prstGeom prst="rect">
+            <a:avLst/>
+          </a:prstGeom>
+          <a:noFill/>
+        </p:spPr>
+        <p:txBody>
+          <a:bodyPr wrap="square" lIns="0">
+            <a:spAutoFit/>
+          </a:bodyPr>
+          <a:lstStyle/>
+          <a:p>
+            <a:pPr marL="285750" indent="-285750">
+              <a:spcAft>
+                <a:spcPts val="800"/>
+              </a:spcAft>
+              <a:buFont typeface="Arial" panose="020B0604020202020204" pitchFamily="34" charset="0"/>
+              <a:buChar char="•"/>
+              <a:defRPr sz="1800">
+                <a:solidFill>
+                  <a:srgbClr val="323A46"/>
+                </a:solidFill>
+                <a:latin typeface="Leelawadee UI"/>
+              </a:defRPr>
+            </a:pPr>
+            <a:r>
+              <a:rPr dirty="0" err="1"/>
+              <a:t>คำนวณ</a:t>
+            </a:r>
+            <a:r>
+              <a:rPr dirty="0"/>
+              <a:t> confidence </a:t>
+            </a:r>
+            <a:r>
+              <a:rPr dirty="0" err="1"/>
+              <a:t>ของแขนซ้าย</a:t>
+            </a:r>
+            <a:r>
+              <a:rPr dirty="0"/>
+              <a:t>/</a:t>
+            </a:r>
+            <a:r>
+              <a:rPr dirty="0" err="1"/>
+              <a:t>ขวาจาก</a:t>
+            </a:r>
+            <a:r>
+              <a:rPr dirty="0"/>
+              <a:t> visibility </a:t>
+            </a:r>
+            <a:r>
+              <a:rPr dirty="0" err="1"/>
+              <a:t>และตำแหน่งบนหน้าจอ</a:t>
+            </a:r>
+            <a:endParaRPr dirty="0"/>
+          </a:p>
+          <a:p>
+            <a:pPr marL="285750" indent="-285750">
+              <a:spcAft>
+                <a:spcPts val="800"/>
+              </a:spcAft>
+              <a:buFont typeface="Arial" panose="020B0604020202020204" pitchFamily="34" charset="0"/>
+              <a:buChar char="•"/>
+              <a:defRPr sz="1800">
+                <a:solidFill>
+                  <a:srgbClr val="323A46"/>
+                </a:solidFill>
+                <a:latin typeface="Leelawadee UI"/>
+              </a:defRPr>
+            </a:pPr>
+            <a:r>
+              <a:rPr dirty="0" err="1"/>
+              <a:t>ถ้าแขนที่</a:t>
+            </a:r>
+            <a:r>
+              <a:rPr dirty="0"/>
+              <a:t> lock </a:t>
+            </a:r>
+            <a:r>
+              <a:rPr dirty="0" err="1"/>
+              <a:t>ไว้ยังน่าเชื่อถือ</a:t>
+            </a:r>
+            <a:r>
+              <a:rPr dirty="0"/>
+              <a:t> </a:t>
+            </a:r>
+            <a:r>
+              <a:rPr dirty="0" err="1"/>
+              <a:t>ให้ใช้แขนนั้นต่อเพื่อลด</a:t>
+            </a:r>
+            <a:r>
+              <a:rPr dirty="0"/>
+              <a:t> arm flapping</a:t>
+            </a:r>
+          </a:p>
+          <a:p>
+            <a:pPr marL="285750" indent="-285750">
+              <a:spcAft>
+                <a:spcPts val="800"/>
+              </a:spcAft>
+              <a:buFont typeface="Arial" panose="020B0604020202020204" pitchFamily="34" charset="0"/>
+              <a:buChar char="•"/>
+              <a:defRPr sz="1800">
+                <a:solidFill>
+                  <a:srgbClr val="323A46"/>
+                </a:solidFill>
+                <a:latin typeface="Leelawadee UI"/>
+              </a:defRPr>
+            </a:pPr>
+            <a:r>
+              <a:rPr dirty="0" err="1"/>
+              <a:t>ใช้</a:t>
+            </a:r>
+            <a:r>
+              <a:rPr dirty="0"/>
+              <a:t> exponential moving average </a:t>
+            </a:r>
+            <a:r>
+              <a:rPr dirty="0" err="1"/>
+              <a:t>เพื่อลด</a:t>
+            </a:r>
+            <a:r>
+              <a:rPr dirty="0"/>
+              <a:t> noise </a:t>
+            </a:r>
+            <a:r>
+              <a:rPr dirty="0" err="1"/>
+              <a:t>ของ</a:t>
+            </a:r>
+            <a:r>
+              <a:rPr dirty="0"/>
+              <a:t> elbow angle</a:t>
+            </a:r>
+          </a:p>
+          <a:p>
+            <a:pPr marL="285750" indent="-285750">
+              <a:spcAft>
+                <a:spcPts val="800"/>
+              </a:spcAft>
+              <a:buFont typeface="Arial" panose="020B0604020202020204" pitchFamily="34" charset="0"/>
+              <a:buChar char="•"/>
+              <a:defRPr sz="1800">
+                <a:solidFill>
+                  <a:srgbClr val="323A46"/>
+                </a:solidFill>
+                <a:latin typeface="Leelawadee UI"/>
+              </a:defRPr>
+            </a:pPr>
+            <a:r>
+              <a:rPr dirty="0" err="1"/>
+              <a:t>ใช้</a:t>
+            </a:r>
+            <a:r>
+              <a:rPr dirty="0"/>
+              <a:t> hysteresis thresholds </a:t>
+            </a:r>
+            <a:r>
+              <a:rPr dirty="0" err="1"/>
+              <a:t>เพื่อตัดสิน</a:t>
+            </a:r>
+            <a:r>
+              <a:rPr dirty="0"/>
+              <a:t> stage </a:t>
+            </a:r>
+            <a:r>
+              <a:rPr dirty="0" err="1"/>
+              <a:t>และนับ</a:t>
+            </a:r>
+            <a:r>
+              <a:rPr dirty="0"/>
+              <a:t> repetition</a:t>
+            </a:r>
+          </a:p>
+          <a:p>
+            <a:pPr marL="285750" indent="-285750">
+              <a:spcAft>
+                <a:spcPts val="800"/>
+              </a:spcAft>
+              <a:buFont typeface="Arial" panose="020B0604020202020204" pitchFamily="34" charset="0"/>
+              <a:buChar char="•"/>
+              <a:defRPr sz="1800">
+                <a:solidFill>
+                  <a:srgbClr val="323A46"/>
+                </a:solidFill>
+                <a:latin typeface="Leelawadee UI"/>
+              </a:defRPr>
+            </a:pPr>
+            <a:r>
+              <a:rPr dirty="0" err="1"/>
+              <a:t>ให้</a:t>
+            </a:r>
+            <a:r>
+              <a:rPr dirty="0"/>
+              <a:t> output </a:t>
+            </a:r>
+            <a:r>
+              <a:rPr dirty="0" err="1"/>
+              <a:t>แบบเดียวกับ</a:t>
+            </a:r>
+            <a:r>
+              <a:rPr dirty="0"/>
+              <a:t> baseline: count, stage, angle </a:t>
+            </a:r>
+            <a:r>
+              <a:rPr dirty="0" err="1"/>
+              <a:t>และ</a:t>
+            </a:r>
+            <a:r>
+              <a:rPr dirty="0"/>
+              <a:t> progress</a:t>
+            </a:r>
+          </a:p>
+        </p:txBody>
+      </p:sp>
+      <p:sp>
+        <p:nvSpPr>
+          <p:cNvPr id="6" name="TextBox 5"/>
+          <p:cNvSpPr txBox="1"/>
+          <p:nvPr/>
+        </p:nvSpPr>
+        <p:spPr>
+          <a:xfrm>
+            <a:off x="777240" y="5349240"/>
+            <a:ext cx="10698480" cy="548640"/>
+          </a:xfrm>
+          <a:prstGeom prst="rect">
+            <a:avLst/>
+          </a:prstGeom>
+          <a:noFill/>
+        </p:spPr>
+        <p:txBody>
+          <a:bodyPr wrap="square" anchor="t">
+            <a:spAutoFit/>
+          </a:bodyPr>
+          <a:lstStyle/>
+          <a:p>
+            <a:r>
+              <a:rPr sz="1600" b="0">
+                <a:solidFill>
+                  <a:srgbClr val="687484"/>
+                </a:solidFill>
+                <a:latin typeface="Leelawadee UI"/>
+              </a:rPr>
+              <a:t>Complexity: ทั้ง baseline และ proposed เป็น O(1) time และ O(1) memory ต่อเฟรม ความต่างอยู่ที่การจัดการ state ให้เสถียรกว่าเดิม</a:t>
+            </a:r>
+          </a:p>
+        </p:txBody>
+      </p:sp>
+    </p:spTree>
+  </p:cSld>
+  <p:clrMapOvr>
+    <a:masterClrMapping/>
+  </p:clrMapOvr>
+</p:sld>
+</file>
+
+<file path=ppt/slides/slide7.xml><?xml version="1.0" encoding="utf-8"?>
+<p:sld xmlns:a="http://schemas.openxmlformats.org/drawingml/2006/main" xmlns:r="http://schemas.openxmlformats.org/officeDocument/2006/relationships" xmlns:p="http://schemas.openxmlformats.org/presentationml/2006/main">
+  <p:cSld>
+    <p:spTree>
+      <p:nvGrpSpPr>
+        <p:cNvPr id="1" name=""/>
+        <p:cNvGrpSpPr/>
+        <p:nvPr/>
+      </p:nvGrpSpPr>
+      <p:grpSpPr>
+        <a:xfrm>
+          <a:off x="0" y="0"/>
+          <a:ext cx="0" cy="0"/>
+          <a:chOff x="0" y="0"/>
+          <a:chExt cx="0" cy="0"/>
+        </a:xfrm>
+      </p:grpSpPr>
+      <p:pic>
+        <p:nvPicPr>
+          <p:cNvPr id="4" name="Picture 3" descr="workflow.png"/>
+          <p:cNvPicPr>
+            <a:picLocks noChangeAspect="1"/>
+          </p:cNvPicPr>
+          <p:nvPr/>
+        </p:nvPicPr>
+        <p:blipFill>
+          <a:blip r:embed="rId2"/>
+          <a:stretch>
+            <a:fillRect/>
+          </a:stretch>
+        </p:blipFill>
+        <p:spPr>
+          <a:xfrm>
+            <a:off x="555170" y="1600200"/>
+            <a:ext cx="10966270" cy="2670048"/>
+          </a:xfrm>
+          <a:prstGeom prst="rect">
+            <a:avLst/>
+          </a:prstGeom>
+        </p:spPr>
+      </p:pic>
+    </p:spTree>
+    <p:extLst>
+      <p:ext uri="{BB962C8B-B14F-4D97-AF65-F5344CB8AC3E}">
+        <p14:creationId xmlns:p14="http://schemas.microsoft.com/office/powerpoint/2010/main" val="2798971267"/>
+      </p:ext>
+    </p:extLst>
+  </p:cSld>
+  <p:clrMapOvr>
+    <a:masterClrMapping/>
+  </p:clrMapOvr>
+</p:sld>
+</file>
+
+<file path=ppt/slides/slide8.xml><?xml version="1.0" encoding="utf-8"?>
+<p:sld xmlns:a="http://schemas.openxmlformats.org/drawingml/2006/main" xmlns:r="http://schemas.openxmlformats.org/officeDocument/2006/relationships" xmlns:p="http://schemas.openxmlformats.org/presentationml/2006/main">
+  <p:cSld>
+    <p:bg>
+      <p:bgPr>
+        <a:solidFill>
+          <a:srgbClr val="FFFFFF"/>
+        </a:solidFill>
+        <a:effectLst/>
+      </p:bgPr>
+    </p:bg>
+    <p:spTree>
+      <p:nvGrpSpPr>
+        <p:cNvPr id="1" name=""/>
+        <p:cNvGrpSpPr/>
+        <p:nvPr/>
+      </p:nvGrpSpPr>
+      <p:grpSpPr>
+        <a:xfrm>
+          <a:off x="0" y="0"/>
+          <a:ext cx="0" cy="0"/>
+          <a:chOff x="0" y="0"/>
+          <a:chExt cx="0" cy="0"/>
+        </a:xfrm>
+      </p:grpSpPr>
+      <p:sp>
+        <p:nvSpPr>
+          <p:cNvPr id="2" name="TextBox 1"/>
+          <p:cNvSpPr txBox="1"/>
+          <p:nvPr/>
+        </p:nvSpPr>
+        <p:spPr>
+          <a:xfrm>
+            <a:off x="548640" y="365760"/>
+            <a:ext cx="10972800" cy="731520"/>
+          </a:xfrm>
+          <a:prstGeom prst="rect">
+            <a:avLst/>
+          </a:prstGeom>
+          <a:noFill/>
+        </p:spPr>
+        <p:txBody>
+          <a:bodyPr wrap="none">
+            <a:spAutoFit/>
+          </a:bodyPr>
+          <a:lstStyle/>
+          <a:p>
+            <a:r>
+              <a:rPr sz="2400" b="1">
+                <a:solidFill>
+                  <a:srgbClr val="141820"/>
+                </a:solidFill>
+                <a:latin typeface="Leelawadee UI"/>
+              </a:rPr>
+              <a:t>รายละเอียดการพัฒนา</a:t>
+            </a:r>
+          </a:p>
+        </p:txBody>
+      </p:sp>
+      <p:sp>
+        <p:nvSpPr>
+          <p:cNvPr id="3" name="Rectangle 2"/>
+          <p:cNvSpPr/>
+          <p:nvPr/>
+        </p:nvSpPr>
+        <p:spPr>
+          <a:xfrm>
+            <a:off x="548640" y="1060704"/>
+            <a:ext cx="2103120" cy="54864"/>
+          </a:xfrm>
+          <a:prstGeom prst="rect">
+            <a:avLst/>
+          </a:prstGeom>
+          <a:solidFill>
+            <a:srgbClr val="006D77"/>
+          </a:solidFill>
+          <a:ln>
+            <a:noFill/>
+          </a:ln>
+        </p:spPr>
+        <p:style>
+          <a:lnRef idx="1">
+            <a:schemeClr val="accent1"/>
+          </a:lnRef>
+          <a:fillRef idx="3">
+            <a:schemeClr val="accent1"/>
+          </a:fillRef>
+          <a:effectRef idx="2">
+            <a:schemeClr val="accent1"/>
+          </a:effectRef>
+          <a:fontRef idx="minor">
+            <a:schemeClr val="lt1"/>
+          </a:fontRef>
+        </p:style>
+        <p:txBody>
+          <a:bodyPr rtlCol="0" anchor="ctr"/>
+          <a:lstStyle/>
+          <a:p>
+            <a:pPr algn="ctr"/>
+            <a:endParaRPr/>
+          </a:p>
+        </p:txBody>
+      </p:sp>
+      <p:sp>
+        <p:nvSpPr>
+          <p:cNvPr id="4" name="TextBox 3"/>
+          <p:cNvSpPr txBox="1"/>
+          <p:nvPr/>
+        </p:nvSpPr>
+        <p:spPr>
+          <a:xfrm>
+            <a:off x="777240" y="1737360"/>
+            <a:ext cx="5705856" cy="2339102"/>
+          </a:xfrm>
+          <a:prstGeom prst="rect">
+            <a:avLst/>
+          </a:prstGeom>
+          <a:noFill/>
+        </p:spPr>
+        <p:txBody>
+          <a:bodyPr wrap="square" lIns="0">
+            <a:spAutoFit/>
+          </a:bodyPr>
+          <a:lstStyle/>
+          <a:p>
+            <a:pPr marL="285750" indent="-285750">
+              <a:spcAft>
+                <a:spcPts val="800"/>
+              </a:spcAft>
+              <a:buFont typeface="Arial" panose="020B0604020202020204" pitchFamily="34" charset="0"/>
+              <a:buChar char="•"/>
+              <a:defRPr sz="1800">
+                <a:solidFill>
+                  <a:srgbClr val="323A46"/>
+                </a:solidFill>
+                <a:latin typeface="Leelawadee UI"/>
+              </a:defRPr>
+            </a:pPr>
+            <a:r>
+              <a:rPr dirty="0" err="1"/>
+              <a:t>ระบบ</a:t>
+            </a:r>
+            <a:r>
+              <a:rPr dirty="0"/>
+              <a:t> live </a:t>
+            </a:r>
+            <a:r>
+              <a:rPr dirty="0" err="1"/>
+              <a:t>ใช้</a:t>
+            </a:r>
+            <a:r>
+              <a:rPr dirty="0"/>
+              <a:t> Flask + OpenCV + </a:t>
+            </a:r>
+            <a:r>
+              <a:rPr dirty="0" err="1"/>
+              <a:t>MediaPipe</a:t>
+            </a:r>
+            <a:r>
+              <a:rPr dirty="0"/>
+              <a:t> + NumPy</a:t>
+            </a:r>
+          </a:p>
+          <a:p>
+            <a:pPr marL="285750" indent="-285750">
+              <a:spcAft>
+                <a:spcPts val="800"/>
+              </a:spcAft>
+              <a:buFont typeface="Arial" panose="020B0604020202020204" pitchFamily="34" charset="0"/>
+              <a:buChar char="•"/>
+              <a:defRPr sz="1800">
+                <a:solidFill>
+                  <a:srgbClr val="323A46"/>
+                </a:solidFill>
+                <a:latin typeface="Leelawadee UI"/>
+              </a:defRPr>
+            </a:pPr>
+            <a:r>
+              <a:rPr dirty="0" err="1"/>
+              <a:t>ส่วน</a:t>
+            </a:r>
+            <a:r>
+              <a:rPr dirty="0"/>
+              <a:t> benchmark </a:t>
+            </a:r>
+            <a:r>
+              <a:rPr dirty="0" err="1"/>
+              <a:t>แยกไว้ใน</a:t>
+            </a:r>
+            <a:r>
+              <a:rPr dirty="0"/>
+              <a:t> `</a:t>
+            </a:r>
+            <a:r>
+              <a:rPr dirty="0" err="1"/>
+              <a:t>src</a:t>
+            </a:r>
+            <a:r>
+              <a:rPr dirty="0"/>
+              <a:t>/algorithms/` </a:t>
+            </a:r>
+            <a:r>
+              <a:rPr dirty="0" err="1"/>
+              <a:t>เพื่อวัด</a:t>
+            </a:r>
+            <a:r>
+              <a:rPr dirty="0"/>
+              <a:t> baseline/proposed </a:t>
+            </a:r>
+            <a:r>
+              <a:rPr dirty="0" err="1"/>
+              <a:t>โดยไม่ต้องเปิดกล้อง</a:t>
+            </a:r>
+            <a:endParaRPr dirty="0"/>
+          </a:p>
+          <a:p>
+            <a:pPr marL="285750" indent="-285750">
+              <a:spcAft>
+                <a:spcPts val="800"/>
+              </a:spcAft>
+              <a:buFont typeface="Arial" panose="020B0604020202020204" pitchFamily="34" charset="0"/>
+              <a:buChar char="•"/>
+              <a:defRPr sz="1800">
+                <a:solidFill>
+                  <a:srgbClr val="323A46"/>
+                </a:solidFill>
+                <a:latin typeface="Leelawadee UI"/>
+              </a:defRPr>
+            </a:pPr>
+            <a:r>
+              <a:rPr dirty="0"/>
+              <a:t>state </a:t>
+            </a:r>
+            <a:r>
+              <a:rPr dirty="0" err="1"/>
+              <a:t>ที่ใช้มี</a:t>
+            </a:r>
+            <a:r>
+              <a:rPr dirty="0"/>
+              <a:t> counter, stage, active side, </a:t>
+            </a:r>
+            <a:r>
+              <a:rPr dirty="0" err="1"/>
+              <a:t>ค่า</a:t>
+            </a:r>
+            <a:r>
+              <a:rPr dirty="0"/>
+              <a:t> EMA </a:t>
+            </a:r>
+            <a:r>
+              <a:rPr dirty="0" err="1"/>
+              <a:t>และ</a:t>
+            </a:r>
+            <a:r>
+              <a:rPr dirty="0"/>
+              <a:t> side-lock timer</a:t>
+            </a:r>
+          </a:p>
+          <a:p>
+            <a:pPr marL="285750" indent="-285750">
+              <a:spcAft>
+                <a:spcPts val="800"/>
+              </a:spcAft>
+              <a:buFont typeface="Arial" panose="020B0604020202020204" pitchFamily="34" charset="0"/>
+              <a:buChar char="•"/>
+              <a:defRPr sz="1800">
+                <a:solidFill>
+                  <a:srgbClr val="323A46"/>
+                </a:solidFill>
+                <a:latin typeface="Leelawadee UI"/>
+              </a:defRPr>
+            </a:pPr>
+            <a:r>
+              <a:rPr dirty="0" err="1"/>
+              <a:t>เพิ่ม</a:t>
+            </a:r>
+            <a:r>
+              <a:rPr dirty="0"/>
+              <a:t> pipeline </a:t>
+            </a:r>
+            <a:r>
+              <a:rPr dirty="0" err="1"/>
+              <a:t>ข้อมูลจริงด้วย</a:t>
+            </a:r>
+            <a:r>
+              <a:rPr dirty="0"/>
+              <a:t> `tools/collect_mocap.py` </a:t>
+            </a:r>
+            <a:r>
+              <a:rPr dirty="0" err="1"/>
+              <a:t>และ</a:t>
+            </a:r>
+            <a:r>
+              <a:rPr dirty="0"/>
+              <a:t> `experiments/evaluate_recorded_sequence.py`</a:t>
+            </a:r>
+          </a:p>
+        </p:txBody>
+      </p:sp>
+      <p:sp>
+        <p:nvSpPr>
+          <p:cNvPr id="5" name="TextBox 4"/>
+          <p:cNvSpPr txBox="1"/>
+          <p:nvPr/>
+        </p:nvSpPr>
+        <p:spPr>
+          <a:xfrm>
+            <a:off x="6894576" y="1728216"/>
+            <a:ext cx="3017520" cy="274320"/>
+          </a:xfrm>
+          <a:prstGeom prst="rect">
+            <a:avLst/>
+          </a:prstGeom>
+          <a:noFill/>
+        </p:spPr>
+        <p:txBody>
+          <a:bodyPr wrap="square" anchor="t">
+            <a:spAutoFit/>
+          </a:bodyPr>
+          <a:lstStyle/>
+          <a:p>
+            <a:r>
+              <a:rPr sz="1800" b="1" dirty="0" err="1">
+                <a:solidFill>
+                  <a:srgbClr val="006D77"/>
+                </a:solidFill>
+                <a:latin typeface="Leelawadee UI"/>
+              </a:rPr>
+              <a:t>โครงสร้างไฟล์สำคัญ</a:t>
+            </a:r>
+            <a:endParaRPr sz="1800" b="1" dirty="0">
+              <a:solidFill>
+                <a:srgbClr val="006D77"/>
+              </a:solidFill>
+              <a:latin typeface="Leelawadee UI"/>
+            </a:endParaRPr>
+          </a:p>
+        </p:txBody>
+      </p:sp>
+      <p:sp>
+        <p:nvSpPr>
+          <p:cNvPr id="6" name="TextBox 5"/>
+          <p:cNvSpPr txBox="1"/>
+          <p:nvPr/>
+        </p:nvSpPr>
+        <p:spPr>
+          <a:xfrm>
+            <a:off x="6949440" y="2075688"/>
+            <a:ext cx="4572000" cy="3291840"/>
+          </a:xfrm>
+          <a:prstGeom prst="rect">
+            <a:avLst/>
+          </a:prstGeom>
+          <a:noFill/>
+        </p:spPr>
+        <p:txBody>
+          <a:bodyPr wrap="square" lIns="0">
+            <a:spAutoFit/>
+          </a:bodyPr>
+          <a:lstStyle/>
+          <a:p>
+            <a:pPr>
+              <a:spcAft>
+                <a:spcPts val="800"/>
+              </a:spcAft>
+              <a:defRPr sz="1700">
+                <a:solidFill>
+                  <a:srgbClr val="323A46"/>
+                </a:solidFill>
+                <a:latin typeface="Leelawadee UI"/>
+              </a:defRPr>
+            </a:pPr>
+            <a:r>
+              <a:rPr dirty="0"/>
+              <a:t>`app.py`, `camera.py`, `exercises/`</a:t>
+            </a:r>
+          </a:p>
+          <a:p>
+            <a:pPr>
+              <a:spcAft>
+                <a:spcPts val="800"/>
+              </a:spcAft>
+              <a:defRPr sz="1700">
+                <a:solidFill>
+                  <a:srgbClr val="323A46"/>
+                </a:solidFill>
+                <a:latin typeface="Leelawadee UI"/>
+              </a:defRPr>
+            </a:pPr>
+            <a:r>
+              <a:rPr dirty="0"/>
+              <a:t>`</a:t>
+            </a:r>
+            <a:r>
+              <a:rPr dirty="0" err="1"/>
+              <a:t>src</a:t>
+            </a:r>
+            <a:r>
+              <a:rPr dirty="0"/>
+              <a:t>/algorithms/baseline.py`</a:t>
+            </a:r>
+          </a:p>
+          <a:p>
+            <a:pPr>
+              <a:spcAft>
+                <a:spcPts val="800"/>
+              </a:spcAft>
+              <a:defRPr sz="1700">
+                <a:solidFill>
+                  <a:srgbClr val="323A46"/>
+                </a:solidFill>
+                <a:latin typeface="Leelawadee UI"/>
+              </a:defRPr>
+            </a:pPr>
+            <a:r>
+              <a:rPr dirty="0"/>
+              <a:t>`</a:t>
+            </a:r>
+            <a:r>
+              <a:rPr dirty="0" err="1"/>
+              <a:t>src</a:t>
+            </a:r>
+            <a:r>
+              <a:rPr dirty="0"/>
+              <a:t>/algorithms/proposed.py`</a:t>
+            </a:r>
+          </a:p>
+          <a:p>
+            <a:pPr>
+              <a:spcAft>
+                <a:spcPts val="800"/>
+              </a:spcAft>
+              <a:defRPr sz="1700">
+                <a:solidFill>
+                  <a:srgbClr val="323A46"/>
+                </a:solidFill>
+                <a:latin typeface="Leelawadee UI"/>
+              </a:defRPr>
+            </a:pPr>
+            <a:r>
+              <a:rPr dirty="0"/>
+              <a:t>`experiments/benchmark.py`</a:t>
+            </a:r>
+          </a:p>
+          <a:p>
+            <a:pPr>
+              <a:spcAft>
+                <a:spcPts val="800"/>
+              </a:spcAft>
+              <a:defRPr sz="1700">
+                <a:solidFill>
+                  <a:srgbClr val="323A46"/>
+                </a:solidFill>
+                <a:latin typeface="Leelawadee UI"/>
+              </a:defRPr>
+            </a:pPr>
+            <a:r>
+              <a:rPr dirty="0"/>
+              <a:t>`visualization/animate_results.py`</a:t>
+            </a:r>
+          </a:p>
+          <a:p>
+            <a:pPr>
+              <a:spcAft>
+                <a:spcPts val="800"/>
+              </a:spcAft>
+              <a:defRPr sz="1700">
+                <a:solidFill>
+                  <a:srgbClr val="323A46"/>
+                </a:solidFill>
+                <a:latin typeface="Leelawadee UI"/>
+              </a:defRPr>
+            </a:pPr>
+            <a:r>
+              <a:rPr dirty="0"/>
+              <a:t>`tests/test_simulation.py`</a:t>
+            </a:r>
+          </a:p>
+        </p:txBody>
+      </p:sp>
+    </p:spTree>
+  </p:cSld>
+  <p:clrMapOvr>
+    <a:masterClrMapping/>
+  </p:clrMapOvr>
+</p:sld>
+</file>
+
+<file path=ppt/slides/slide9.xml><?xml version="1.0" encoding="utf-8"?>
+<p:sld xmlns:a="http://schemas.openxmlformats.org/drawingml/2006/main" xmlns:r="http://schemas.openxmlformats.org/officeDocument/2006/relationships" xmlns:p="http://schemas.openxmlformats.org/presentationml/2006/main">
+  <p:cSld>
+    <p:bg>
+      <p:bgPr>
+        <a:solidFill>
+          <a:srgbClr val="FFFFFF"/>
+        </a:solidFill>
+        <a:effectLst/>
+      </p:bgPr>
+    </p:bg>
+    <p:spTree>
+      <p:nvGrpSpPr>
+        <p:cNvPr id="1" name=""/>
+        <p:cNvGrpSpPr/>
+        <p:nvPr/>
+      </p:nvGrpSpPr>
+      <p:grpSpPr>
+        <a:xfrm>
+          <a:off x="0" y="0"/>
+          <a:ext cx="0" cy="0"/>
+          <a:chOff x="0" y="0"/>
+          <a:chExt cx="0" cy="0"/>
+        </a:xfrm>
+      </p:grpSpPr>
+      <p:sp>
+        <p:nvSpPr>
+          <p:cNvPr id="2" name="TextBox 1"/>
+          <p:cNvSpPr txBox="1"/>
+          <p:nvPr/>
+        </p:nvSpPr>
+        <p:spPr>
+          <a:xfrm>
+            <a:off x="548640" y="365760"/>
+            <a:ext cx="10972800" cy="731520"/>
+          </a:xfrm>
+          <a:prstGeom prst="rect">
+            <a:avLst/>
+          </a:prstGeom>
+          <a:noFill/>
+        </p:spPr>
+        <p:txBody>
+          <a:bodyPr wrap="none">
+            <a:spAutoFit/>
+          </a:bodyPr>
+          <a:lstStyle/>
+          <a:p>
+            <a:r>
+              <a:rPr sz="2400" b="1">
+                <a:solidFill>
+                  <a:srgbClr val="141820"/>
+                </a:solidFill>
+                <a:latin typeface="Leelawadee UI"/>
+              </a:rPr>
+              <a:t>Experimental Setup</a:t>
+            </a:r>
+          </a:p>
+        </p:txBody>
+      </p:sp>
+      <p:sp>
+        <p:nvSpPr>
+          <p:cNvPr id="3" name="Rectangle 2"/>
+          <p:cNvSpPr/>
+          <p:nvPr/>
+        </p:nvSpPr>
+        <p:spPr>
+          <a:xfrm>
+            <a:off x="548640" y="1060704"/>
+            <a:ext cx="2103120" cy="54864"/>
+          </a:xfrm>
+          <a:prstGeom prst="rect">
+            <a:avLst/>
+          </a:prstGeom>
+          <a:solidFill>
+            <a:srgbClr val="006D77"/>
+          </a:solidFill>
+          <a:ln>
+            <a:noFill/>
+          </a:ln>
+        </p:spPr>
+        <p:style>
+          <a:lnRef idx="1">
+            <a:schemeClr val="accent1"/>
+          </a:lnRef>
+          <a:fillRef idx="3">
+            <a:schemeClr val="accent1"/>
+          </a:fillRef>
+          <a:effectRef idx="2">
+            <a:schemeClr val="accent1"/>
+          </a:effectRef>
+          <a:fontRef idx="minor">
+            <a:schemeClr val="lt1"/>
+          </a:fontRef>
+        </p:style>
+        <p:txBody>
+          <a:bodyPr rtlCol="0" anchor="ctr"/>
+          <a:lstStyle/>
+          <a:p>
+            <a:pPr algn="ctr"/>
+            <a:endParaRPr/>
+          </a:p>
+        </p:txBody>
+      </p:sp>
+      <p:sp>
+        <p:nvSpPr>
+          <p:cNvPr id="4" name="TextBox 3"/>
+          <p:cNvSpPr txBox="1"/>
+          <p:nvPr/>
+        </p:nvSpPr>
+        <p:spPr>
+          <a:xfrm>
+            <a:off x="777240" y="1783080"/>
+            <a:ext cx="5888736" cy="3272691"/>
+          </a:xfrm>
+          <a:prstGeom prst="rect">
+            <a:avLst/>
+          </a:prstGeom>
+          <a:noFill/>
+        </p:spPr>
+        <p:txBody>
+          <a:bodyPr wrap="square" lIns="0">
+            <a:spAutoFit/>
+          </a:bodyPr>
+          <a:lstStyle/>
+          <a:p>
+            <a:pPr marL="285750" indent="-285750">
+              <a:spcAft>
+                <a:spcPts val="800"/>
+              </a:spcAft>
+              <a:buFont typeface="Arial" panose="020B0604020202020204" pitchFamily="34" charset="0"/>
+              <a:buChar char="•"/>
+              <a:defRPr sz="1800">
+                <a:solidFill>
+                  <a:srgbClr val="323A46"/>
+                </a:solidFill>
+                <a:latin typeface="Leelawadee UI"/>
+              </a:defRPr>
+            </a:pPr>
+            <a:r>
+              <a:rPr dirty="0"/>
+              <a:t>Scaling benchmark </a:t>
+            </a:r>
+            <a:r>
+              <a:rPr dirty="0" err="1"/>
+              <a:t>ใช้ข้อมูลสังเคราะห์</a:t>
+            </a:r>
+            <a:r>
+              <a:rPr dirty="0"/>
+              <a:t> 3 </a:t>
+            </a:r>
+            <a:r>
+              <a:rPr dirty="0" err="1"/>
+              <a:t>ขนาด</a:t>
+            </a:r>
+            <a:r>
+              <a:rPr dirty="0"/>
+              <a:t>: 1k, 10k </a:t>
+            </a:r>
+            <a:r>
+              <a:rPr dirty="0" err="1"/>
+              <a:t>และ</a:t>
+            </a:r>
+            <a:r>
+              <a:rPr dirty="0"/>
+              <a:t> 100k frames</a:t>
+            </a:r>
+          </a:p>
+          <a:p>
+            <a:pPr marL="285750" indent="-285750">
+              <a:spcAft>
+                <a:spcPts val="800"/>
+              </a:spcAft>
+              <a:buFont typeface="Arial" panose="020B0604020202020204" pitchFamily="34" charset="0"/>
+              <a:buChar char="•"/>
+              <a:defRPr sz="1800">
+                <a:solidFill>
+                  <a:srgbClr val="323A46"/>
+                </a:solidFill>
+                <a:latin typeface="Leelawadee UI"/>
+              </a:defRPr>
+            </a:pPr>
+            <a:r>
+              <a:rPr dirty="0" err="1"/>
+              <a:t>ตัวสร้างข้อมูลเพิ่มทั้ง</a:t>
+            </a:r>
+            <a:r>
+              <a:rPr dirty="0"/>
+              <a:t> angle noise </a:t>
+            </a:r>
+            <a:r>
+              <a:rPr dirty="0" err="1"/>
+              <a:t>และ</a:t>
+            </a:r>
+            <a:r>
+              <a:rPr dirty="0"/>
+              <a:t> visibility dropout </a:t>
+            </a:r>
+            <a:r>
+              <a:rPr dirty="0" err="1"/>
+              <a:t>เพื่อทดสอบ</a:t>
+            </a:r>
+            <a:r>
+              <a:rPr dirty="0"/>
+              <a:t> temporal robustness</a:t>
+            </a:r>
+          </a:p>
+          <a:p>
+            <a:pPr marL="285750" indent="-285750">
+              <a:spcAft>
+                <a:spcPts val="800"/>
+              </a:spcAft>
+              <a:buFont typeface="Arial" panose="020B0604020202020204" pitchFamily="34" charset="0"/>
+              <a:buChar char="•"/>
+              <a:defRPr sz="1800">
+                <a:solidFill>
+                  <a:srgbClr val="323A46"/>
+                </a:solidFill>
+                <a:latin typeface="Leelawadee UI"/>
+              </a:defRPr>
+            </a:pPr>
+            <a:r>
+              <a:rPr dirty="0" err="1"/>
+              <a:t>ข้อมูลจริงรองรับผ่านการอัด</a:t>
+            </a:r>
+            <a:r>
+              <a:rPr dirty="0"/>
+              <a:t> landmark CSV </a:t>
+            </a:r>
+            <a:r>
+              <a:rPr dirty="0" err="1"/>
+              <a:t>จาก</a:t>
+            </a:r>
+            <a:r>
+              <a:rPr dirty="0"/>
+              <a:t> webcam </a:t>
+            </a:r>
+            <a:r>
+              <a:rPr dirty="0" err="1"/>
+              <a:t>แล้ว</a:t>
+            </a:r>
+            <a:r>
+              <a:rPr dirty="0"/>
+              <a:t> replay </a:t>
+            </a:r>
+            <a:r>
+              <a:rPr dirty="0" err="1"/>
+              <a:t>เพื่อประเมินซ้ำ</a:t>
+            </a:r>
+            <a:endParaRPr dirty="0"/>
+          </a:p>
+          <a:p>
+            <a:pPr marL="285750" indent="-285750">
+              <a:spcAft>
+                <a:spcPts val="800"/>
+              </a:spcAft>
+              <a:buFont typeface="Arial" panose="020B0604020202020204" pitchFamily="34" charset="0"/>
+              <a:buChar char="•"/>
+              <a:defRPr sz="1800">
+                <a:solidFill>
+                  <a:srgbClr val="323A46"/>
+                </a:solidFill>
+                <a:latin typeface="Leelawadee UI"/>
+              </a:defRPr>
+            </a:pPr>
+            <a:r>
+              <a:rPr dirty="0"/>
+              <a:t>Metrics </a:t>
+            </a:r>
+            <a:r>
+              <a:rPr dirty="0" err="1"/>
+              <a:t>ที่ใช้</a:t>
+            </a:r>
+            <a:r>
+              <a:rPr dirty="0"/>
+              <a:t>: total runtime, </a:t>
+            </a:r>
+            <a:r>
+              <a:rPr dirty="0" err="1"/>
+              <a:t>ms</a:t>
+            </a:r>
+            <a:r>
+              <a:rPr dirty="0"/>
+              <a:t>/frame, peak traced memory, repetition count error </a:t>
+            </a:r>
+            <a:r>
+              <a:rPr dirty="0" err="1"/>
+              <a:t>และ</a:t>
+            </a:r>
+            <a:r>
+              <a:rPr dirty="0"/>
+              <a:t> side-switch jitter</a:t>
+            </a:r>
+          </a:p>
+          <a:p>
+            <a:pPr marL="285750" indent="-285750">
+              <a:spcAft>
+                <a:spcPts val="800"/>
+              </a:spcAft>
+              <a:buFont typeface="Arial" panose="020B0604020202020204" pitchFamily="34" charset="0"/>
+              <a:buChar char="•"/>
+              <a:defRPr sz="1800">
+                <a:solidFill>
+                  <a:srgbClr val="323A46"/>
+                </a:solidFill>
+                <a:latin typeface="Leelawadee UI"/>
+              </a:defRPr>
+            </a:pPr>
+            <a:r>
+              <a:rPr dirty="0" err="1"/>
+              <a:t>การตรวจสอบความถูกต้อง</a:t>
+            </a:r>
+            <a:r>
+              <a:rPr dirty="0"/>
+              <a:t>: `python -m </a:t>
+            </a:r>
+            <a:r>
+              <a:rPr dirty="0" err="1"/>
+              <a:t>unittest</a:t>
+            </a:r>
+            <a:r>
+              <a:rPr dirty="0"/>
+              <a:t> </a:t>
+            </a:r>
+            <a:r>
+              <a:rPr dirty="0" err="1"/>
+              <a:t>tests.test_simulation</a:t>
+            </a:r>
+            <a:r>
+              <a:rPr dirty="0"/>
+              <a:t>` </a:t>
+            </a:r>
+            <a:r>
+              <a:rPr dirty="0" err="1"/>
+              <a:t>ผ่าน</a:t>
+            </a:r>
+            <a:endParaRPr dirty="0"/>
+          </a:p>
+        </p:txBody>
+      </p:sp>
+      <p:sp>
+        <p:nvSpPr>
+          <p:cNvPr id="5" name="Rounded Rectangle 4"/>
+          <p:cNvSpPr/>
+          <p:nvPr/>
+        </p:nvSpPr>
+        <p:spPr>
+          <a:xfrm>
+            <a:off x="8138160" y="1828800"/>
+            <a:ext cx="2377440" cy="1005840"/>
+          </a:xfrm>
+          <a:prstGeom prst="roundRect">
+            <a:avLst/>
+          </a:prstGeom>
+          <a:solidFill>
+            <a:srgbClr val="E8F8F9"/>
+          </a:solidFill>
+          <a:ln w="19050">
+            <a:solidFill>
+              <a:srgbClr val="006D77"/>
+            </a:solidFill>
+          </a:ln>
+        </p:spPr>
+        <p:style>
+          <a:lnRef idx="1">
+            <a:schemeClr val="accent1"/>
+          </a:lnRef>
+          <a:fillRef idx="3">
+            <a:schemeClr val="accent1"/>
+          </a:fillRef>
+          <a:effectRef idx="2">
+            <a:schemeClr val="accent1"/>
+          </a:effectRef>
+          <a:fontRef idx="minor">
+            <a:schemeClr val="lt1"/>
+          </a:fontRef>
+        </p:style>
+        <p:txBody>
+          <a:bodyPr rtlCol="0" anchor="ctr"/>
+          <a:lstStyle/>
+          <a:p>
+            <a:pPr algn="ctr"/>
+            <a:r>
+              <a:rPr sz="1100" b="1" dirty="0">
+                <a:solidFill>
+                  <a:srgbClr val="006D77"/>
+                </a:solidFill>
+                <a:latin typeface="Leelawadee UI"/>
+              </a:rPr>
+              <a:t>Synthetic Sizes</a:t>
+            </a:r>
+          </a:p>
+          <a:p>
+            <a:pPr algn="ctr"/>
+            <a:r>
+              <a:rPr sz="1700" b="1" dirty="0">
+                <a:solidFill>
+                  <a:srgbClr val="141820"/>
+                </a:solidFill>
+                <a:latin typeface="Leelawadee UI"/>
+              </a:rPr>
+              <a:t>1k / 10k / 100k</a:t>
+            </a:r>
+          </a:p>
+        </p:txBody>
+      </p:sp>
+      <p:sp>
+        <p:nvSpPr>
+          <p:cNvPr id="7" name="Rounded Rectangle 6"/>
+          <p:cNvSpPr/>
+          <p:nvPr/>
+        </p:nvSpPr>
+        <p:spPr>
+          <a:xfrm>
+            <a:off x="6766560" y="3154680"/>
+            <a:ext cx="2377440" cy="1005840"/>
+          </a:xfrm>
+          <a:prstGeom prst="roundRect">
+            <a:avLst/>
+          </a:prstGeom>
+          <a:solidFill>
+            <a:srgbClr val="E8F8F9"/>
+          </a:solidFill>
+          <a:ln w="19050">
+            <a:solidFill>
+              <a:srgbClr val="006D77"/>
+            </a:solidFill>
+          </a:ln>
+        </p:spPr>
+        <p:style>
+          <a:lnRef idx="1">
+            <a:schemeClr val="accent1"/>
+          </a:lnRef>
+          <a:fillRef idx="3">
+            <a:schemeClr val="accent1"/>
+          </a:fillRef>
+          <a:effectRef idx="2">
+            <a:schemeClr val="accent1"/>
+          </a:effectRef>
+          <a:fontRef idx="minor">
+            <a:schemeClr val="lt1"/>
+          </a:fontRef>
+        </p:style>
+        <p:txBody>
+          <a:bodyPr rtlCol="0" anchor="ctr"/>
+          <a:lstStyle/>
+          <a:p>
+            <a:pPr algn="ctr"/>
+            <a:r>
+              <a:rPr sz="1100" b="1">
+                <a:solidFill>
+                  <a:srgbClr val="006D77"/>
+                </a:solidFill>
+                <a:latin typeface="Leelawadee UI"/>
+              </a:rPr>
+              <a:t>Real-data Path</a:t>
+            </a:r>
+          </a:p>
+          <a:p>
+            <a:pPr algn="ctr"/>
+            <a:r>
+              <a:rPr sz="1700" b="1">
+                <a:solidFill>
+                  <a:srgbClr val="141820"/>
+                </a:solidFill>
+                <a:latin typeface="Leelawadee UI"/>
+              </a:rPr>
+              <a:t>Capture + Replay</a:t>
+            </a:r>
+          </a:p>
+        </p:txBody>
+      </p:sp>
+      <p:sp>
+        <p:nvSpPr>
+          <p:cNvPr id="8" name="Rounded Rectangle 7"/>
+          <p:cNvSpPr/>
+          <p:nvPr/>
+        </p:nvSpPr>
+        <p:spPr>
+          <a:xfrm>
+            <a:off x="9326880" y="3154680"/>
+            <a:ext cx="2103120" cy="1005840"/>
+          </a:xfrm>
+          <a:prstGeom prst="roundRect">
+            <a:avLst/>
+          </a:prstGeom>
+          <a:solidFill>
+            <a:srgbClr val="E8F8F9"/>
+          </a:solidFill>
+          <a:ln w="19050">
+            <a:solidFill>
+              <a:srgbClr val="006D77"/>
+            </a:solidFill>
+          </a:ln>
+        </p:spPr>
+        <p:style>
+          <a:lnRef idx="1">
+            <a:schemeClr val="accent1"/>
+          </a:lnRef>
+          <a:fillRef idx="3">
+            <a:schemeClr val="accent1"/>
+          </a:fillRef>
+          <a:effectRef idx="2">
+            <a:schemeClr val="accent1"/>
+          </a:effectRef>
+          <a:fontRef idx="minor">
+            <a:schemeClr val="lt1"/>
+          </a:fontRef>
+        </p:style>
+        <p:txBody>
+          <a:bodyPr rtlCol="0" anchor="ctr"/>
+          <a:lstStyle/>
+          <a:p>
+            <a:pPr algn="ctr"/>
+            <a:r>
+              <a:rPr sz="1100" b="1">
+                <a:solidFill>
+                  <a:srgbClr val="006D77"/>
+                </a:solidFill>
+                <a:latin typeface="Leelawadee UI"/>
+              </a:rPr>
+              <a:t>Visualization</a:t>
+            </a:r>
+          </a:p>
+          <a:p>
+            <a:pPr algn="ctr"/>
+            <a:r>
+              <a:rPr sz="1700" b="1">
+                <a:solidFill>
+                  <a:srgbClr val="141820"/>
+                </a:solidFill>
+                <a:latin typeface="Leelawadee UI"/>
+              </a:rPr>
+              <a:t>Plots + Demo</a:t>
+            </a:r>
+          </a:p>
+        </p:txBody>
+      </p:sp>
+    </p:spTree>
+  </p:cSld>
+  <p:clrMapOvr>
+    <a:masterClrMapping/>
+  </p:clrMapOvr>
+</p:sld>
+</file>
+
 <file path=ppt/theme/theme1.xml><?xml version="1.0" encoding="utf-8"?>
 <a:theme xmlns:a="http://schemas.openxmlformats.org/drawingml/2006/main" name="Office Theme">
   <a:themeElements>

--- a/report/presentation.pptx
+++ b/report/presentation.pptx
@@ -3204,7 +3204,7 @@
         <p:spPr>
           <a:xfrm>
             <a:off x="731520" y="1783080"/>
-            <a:ext cx="2560320" cy="274320"/>
+            <a:ext cx="5082684" cy="369332"/>
           </a:xfrm>
           <a:prstGeom prst="rect">
             <a:avLst/>
@@ -3233,8 +3233,32 @@
                 </a:solidFill>
                 <a:latin typeface="Leelawadee UI"/>
               </a:rPr>
-              <a:t> Computer Animation</a:t>
-            </a:r>
+              <a:t> </a:t>
+            </a:r>
+            <a:r>
+              <a:rPr sz="1800" b="1">
+                <a:solidFill>
+                  <a:srgbClr val="006D77"/>
+                </a:solidFill>
+                <a:latin typeface="Leelawadee UI"/>
+              </a:rPr>
+              <a:t>Computer Animation</a:t>
+            </a:r>
+            <a:r>
+              <a:rPr lang="en-US" sz="1800" b="1">
+                <a:solidFill>
+                  <a:srgbClr val="006D77"/>
+                </a:solidFill>
+                <a:latin typeface="Leelawadee UI"/>
+              </a:rPr>
+              <a:t> 2110512</a:t>
+            </a:r>
+            <a:endParaRPr sz="1800" b="1" dirty="0">
+              <a:solidFill>
+                <a:srgbClr val="006D77"/>
+              </a:solidFill>
+              <a:latin typeface="Leelawadee UI"/>
+            </a:endParaRPr>
           </a:p>
         </p:txBody>
       </p:sp>

--- a/report/presentation.pptx
+++ b/report/presentation.pptx
@@ -3233,19 +3233,10 @@
                 </a:solidFill>
                 <a:latin typeface="Leelawadee UI"/>
               </a:rPr>
-              <a:t> </a:t>
-            </a:r>
-            <a:r>
-              <a:rPr sz="1800" b="1">
-                <a:solidFill>
-                  <a:srgbClr val="006D77"/>
-                </a:solidFill>
-                <a:latin typeface="Leelawadee UI"/>
-              </a:rPr>
-              <a:t>Computer Animation</a:t>
-            </a:r>
-            <a:r>
-              <a:rPr lang="en-US" sz="1800" b="1">
+              <a:t> Computer Animation</a:t>
+            </a:r>
+            <a:r>
+              <a:rPr lang="en-US" sz="1800" b="1" dirty="0">
                 <a:solidFill>
                   <a:srgbClr val="006D77"/>
                 </a:solidFill>
